--- a/PRESENTATION.pptx
+++ b/PRESENTATION.pptx
@@ -23,6 +23,11 @@
     <p:sldId id="271" r:id="rId22"/>
     <p:sldId id="272" r:id="rId23"/>
     <p:sldId id="273" r:id="rId24"/>
+    <p:sldId id="274" r:id="rId25"/>
+    <p:sldId id="275" r:id="rId26"/>
+    <p:sldId id="276" r:id="rId27"/>
+    <p:sldId id="277" r:id="rId28"/>
+    <p:sldId id="278" r:id="rId29"/>
   </p:sldIdLst>
   <p:sldSz cx="12191695" cy="6858000" type="screen4x3"/>
   <p:notesSz cx="6858000" cy="9144000"/>
@@ -3472,7 +3477,7 @@
                 </a:solidFill>
                 <a:latin typeface="Cambria"/>
               </a:rPr>
-              <a:t>Image Pipeline</a:t>
+              <a:t>Text Pipeline</a:t>
             </a:r>
           </a:p>
         </p:txBody>
@@ -3527,8 +3532,8 @@
                 </a:solidFill>
                 <a:latin typeface="Calibri"/>
               </a:rPr>
-              <a:t>Raw
-image</a:t>
+              <a:t>Raw tweet
+text</a:t>
             </a:r>
           </a:p>
         </p:txBody>
@@ -3627,8 +3632,8 @@
                 </a:solidFill>
                 <a:latin typeface="Calibri"/>
               </a:rPr>
-              <a:t>Resize /
-normalize</a:t>
+              <a:t>Clean
+(URL / mention / emoji)</a:t>
             </a:r>
           </a:p>
         </p:txBody>
@@ -3728,7 +3733,7 @@
                 <a:latin typeface="Calibri"/>
               </a:rPr>
               <a:t>Embed
-(CNN or ResNet18)</a:t>
+(TF-IDF or DistilBERT)</a:t>
             </a:r>
           </a:p>
         </p:txBody>
@@ -3911,7 +3916,7 @@
                 </a:solidFill>
                 <a:latin typeface="Cambria"/>
               </a:rPr>
-              <a:t>B1 — CNN from scratch</a:t>
+              <a:t>A1 — TF-IDF baseline</a:t>
             </a:r>
           </a:p>
         </p:txBody>
@@ -3953,7 +3958,7 @@
                 </a:solidFill>
                 <a:latin typeface="Calibri"/>
               </a:rPr>
-              <a:t>•  Small 4-layer CNN, trained from scratch</a:t>
+              <a:t>•  Unigrams + bigrams, 10k features</a:t>
             </a:r>
           </a:p>
           <a:p>
@@ -3972,7 +3977,7 @@
                 </a:solidFill>
                 <a:latin typeface="Calibri"/>
               </a:rPr>
-              <a:t>•  Reduced to 96x96 / 3 epochs (CPU budget)</a:t>
+              <a:t>•  Class-weighted Logistic Regression</a:t>
             </a:r>
           </a:p>
           <a:p>
@@ -3991,7 +3996,7 @@
                 </a:solidFill>
                 <a:latin typeface="Calibri"/>
               </a:rPr>
-              <a:t>•  Test: 47.6% accuracy / 42.9% macro-F1</a:t>
+              <a:t>•  Test: 60.9% accuracy / 52.0% macro-F1</a:t>
             </a:r>
           </a:p>
         </p:txBody>
@@ -4074,7 +4079,7 @@
                 </a:solidFill>
                 <a:latin typeface="Cambria"/>
               </a:rPr>
-              <a:t>B2 — Frozen ResNet18</a:t>
+              <a:t>A2 — Frozen DistilBERT</a:t>
             </a:r>
           </a:p>
         </p:txBody>
@@ -4116,7 +4121,7 @@
                 </a:solidFill>
                 <a:latin typeface="Calibri"/>
               </a:rPr>
-              <a:t>•  ImageNet-pretrained, frozen feature extractor</a:t>
+              <a:t>•  distilbert-base-uncased, mean-pooled</a:t>
             </a:r>
           </a:p>
           <a:p>
@@ -4135,7 +4140,7 @@
                 </a:solidFill>
                 <a:latin typeface="Calibri"/>
               </a:rPr>
-              <a:t>•  Transfer learning over from-scratch training</a:t>
+              <a:t>•  Chosen for CPU-only feasibility</a:t>
             </a:r>
           </a:p>
           <a:p>
@@ -4154,7 +4159,7 @@
                 </a:solidFill>
                 <a:latin typeface="Calibri"/>
               </a:rPr>
-              <a:t>•  Test: 52.7% accuracy / 42.8% macro-F1</a:t>
+              <a:t>•  Test: 61.6% accuracy / 54.6% macro-F1</a:t>
             </a:r>
           </a:p>
         </p:txBody>
@@ -4320,7 +4325,7 @@
                 </a:solidFill>
                 <a:latin typeface="Cambria"/>
               </a:rPr>
-              <a:t>Multimodal Fusion</a:t>
+              <a:t>Image Pipeline</a:t>
             </a:r>
           </a:p>
         </p:txBody>
@@ -4334,7 +4339,7 @@
         <p:spPr>
           <a:xfrm>
             <a:off x="731520" y="1920240"/>
-            <a:ext cx="3017520" cy="822960"/>
+            <a:ext cx="2331720" cy="914400"/>
           </a:xfrm>
           <a:prstGeom prst="roundRect">
             <a:avLst>
@@ -4375,27 +4380,25 @@
                 </a:solidFill>
                 <a:latin typeface="Calibri"/>
               </a:rPr>
-              <a:t>Text embedding
-(768-dim)</a:t>
-            </a:r>
-          </a:p>
-        </p:txBody>
-      </p:sp>
-      <p:sp>
-        <p:nvSpPr>
-          <p:cNvPr id="5" name="Rounded Rectangle 4"/>
+              <a:t>Raw
+image</a:t>
+            </a:r>
+          </a:p>
+        </p:txBody>
+      </p:sp>
+      <p:sp>
+        <p:nvSpPr>
+          <p:cNvPr id="5" name="Right Arrow 4"/>
           <p:cNvSpPr/>
           <p:nvPr/>
         </p:nvSpPr>
         <p:spPr>
           <a:xfrm>
-            <a:off x="731520" y="3108960"/>
-            <a:ext cx="3017520" cy="822960"/>
-          </a:xfrm>
-          <a:prstGeom prst="roundRect">
-            <a:avLst>
-              <a:gd name="adj" fmla="val 15000"/>
-            </a:avLst>
+            <a:off x="3063240" y="2194560"/>
+            <a:ext cx="320040" cy="365760"/>
+          </a:xfrm>
+          <a:prstGeom prst="rightArrow">
+            <a:avLst/>
           </a:prstGeom>
           <a:solidFill>
             <a:srgbClr val="EB6834"/>
@@ -4420,36 +4423,28 @@
           </a:fontRef>
         </p:style>
         <p:txBody>
-          <a:bodyPr rtlCol="0" anchor="ctr" wrap="square" lIns="50800" rIns="50800"/>
+          <a:bodyPr rtlCol="0" anchor="ctr"/>
           <a:lstStyle/>
           <a:p>
             <a:pPr algn="ctr"/>
-            <a:r>
-              <a:rPr sz="1250" b="1">
-                <a:solidFill>
-                  <a:srgbClr val="FFFFFF"/>
-                </a:solidFill>
-                <a:latin typeface="Calibri"/>
-              </a:rPr>
-              <a:t>Image embedding
-(512-dim)</a:t>
-            </a:r>
-          </a:p>
-        </p:txBody>
-      </p:sp>
-      <p:sp>
-        <p:nvSpPr>
-          <p:cNvPr id="6" name="Right Arrow 5"/>
+          </a:p>
+        </p:txBody>
+      </p:sp>
+      <p:sp>
+        <p:nvSpPr>
+          <p:cNvPr id="6" name="Rounded Rectangle 5"/>
           <p:cNvSpPr/>
           <p:nvPr/>
         </p:nvSpPr>
         <p:spPr>
           <a:xfrm>
-            <a:off x="3886200" y="2286000"/>
-            <a:ext cx="640080" cy="365760"/>
-          </a:xfrm>
-          <a:prstGeom prst="rightArrow">
-            <a:avLst/>
+            <a:off x="3383280" y="1920240"/>
+            <a:ext cx="2331720" cy="914400"/>
+          </a:xfrm>
+          <a:prstGeom prst="roundRect">
+            <a:avLst>
+              <a:gd name="adj" fmla="val 15000"/>
+            </a:avLst>
           </a:prstGeom>
           <a:solidFill>
             <a:srgbClr val="EB6834"/>
@@ -4474,10 +4469,20 @@
           </a:fontRef>
         </p:style>
         <p:txBody>
-          <a:bodyPr rtlCol="0" anchor="ctr"/>
+          <a:bodyPr rtlCol="0" anchor="ctr" wrap="square" lIns="50800" rIns="50800"/>
           <a:lstStyle/>
           <a:p>
             <a:pPr algn="ctr"/>
+            <a:r>
+              <a:rPr sz="1250" b="1">
+                <a:solidFill>
+                  <a:srgbClr val="FFFFFF"/>
+                </a:solidFill>
+                <a:latin typeface="Calibri"/>
+              </a:rPr>
+              <a:t>Resize /
+normalize</a:t>
+            </a:r>
           </a:p>
         </p:txBody>
       </p:sp>
@@ -4489,8 +4494,8 @@
         </p:nvSpPr>
         <p:spPr>
           <a:xfrm>
-            <a:off x="3886200" y="3474720"/>
-            <a:ext cx="640080" cy="365760"/>
+            <a:off x="5715000" y="2194560"/>
+            <a:ext cx="320040" cy="365760"/>
           </a:xfrm>
           <a:prstGeom prst="rightArrow">
             <a:avLst/>
@@ -4533,8 +4538,8 @@
         </p:nvSpPr>
         <p:spPr>
           <a:xfrm>
-            <a:off x="4663440" y="2514600"/>
-            <a:ext cx="2743200" cy="822960"/>
+            <a:off x="6035040" y="1920240"/>
+            <a:ext cx="2331720" cy="914400"/>
           </a:xfrm>
           <a:prstGeom prst="roundRect">
             <a:avLst>
@@ -4542,7 +4547,7 @@
             </a:avLst>
           </a:prstGeom>
           <a:solidFill>
-            <a:srgbClr val="141B46"/>
+            <a:srgbClr val="1E2761"/>
           </a:solidFill>
           <a:ln>
             <a:noFill/>
@@ -4575,8 +4580,8 @@
                 </a:solidFill>
                 <a:latin typeface="Calibri"/>
               </a:rPr>
-              <a:t>Concatenate
-(1280-dim)</a:t>
+              <a:t>Embed
+(CNN or ResNet18)</a:t>
             </a:r>
           </a:p>
         </p:txBody>
@@ -4589,8 +4594,8 @@
         </p:nvSpPr>
         <p:spPr>
           <a:xfrm>
-            <a:off x="7498079" y="2697480"/>
-            <a:ext cx="640080" cy="365760"/>
+            <a:off x="8366760" y="2194560"/>
+            <a:ext cx="320040" cy="365760"/>
           </a:xfrm>
           <a:prstGeom prst="rightArrow">
             <a:avLst/>
@@ -4633,8 +4638,8 @@
         </p:nvSpPr>
         <p:spPr>
           <a:xfrm>
-            <a:off x="8229600" y="2514600"/>
-            <a:ext cx="2834640" cy="822960"/>
+            <a:off x="8686800" y="1920240"/>
+            <a:ext cx="2331720" cy="914400"/>
           </a:xfrm>
           <a:prstGeom prst="roundRect">
             <a:avLst>
@@ -4642,7 +4647,7 @@
             </a:avLst>
           </a:prstGeom>
           <a:solidFill>
-            <a:srgbClr val="1E2761"/>
+            <a:srgbClr val="EB6834"/>
           </a:solidFill>
           <a:ln>
             <a:noFill/>
@@ -4675,8 +4680,8 @@
                 </a:solidFill>
                 <a:latin typeface="Calibri"/>
               </a:rPr>
-              <a:t>MLP classifier
-(dropout, softmax)</a:t>
+              <a:t>Classify
+(Logistic Regression)</a:t>
             </a:r>
           </a:p>
         </p:txBody>
@@ -4689,8 +4694,8 @@
         </p:nvSpPr>
         <p:spPr>
           <a:xfrm>
-            <a:off x="731520" y="4297680"/>
-            <a:ext cx="10332720" cy="1737360"/>
+            <a:off x="731520" y="3383280"/>
+            <a:ext cx="5212080" cy="2377440"/>
           </a:xfrm>
           <a:prstGeom prst="roundRect">
             <a:avLst>
@@ -4737,8 +4742,8 @@
         </p:nvSpPr>
         <p:spPr>
           <a:xfrm>
-            <a:off x="960120" y="4480560"/>
-            <a:ext cx="9875520" cy="457200"/>
+            <a:off x="960120" y="3566160"/>
+            <a:ext cx="4754880" cy="457200"/>
           </a:xfrm>
           <a:prstGeom prst="rect">
             <a:avLst/>
@@ -4759,7 +4764,7 @@
                 </a:solidFill>
                 <a:latin typeface="Cambria"/>
               </a:rPr>
-              <a:t>Primary vs. ablation</a:t>
+              <a:t>B1 — CNN from scratch</a:t>
             </a:r>
           </a:p>
         </p:txBody>
@@ -4772,8 +4777,8 @@
         </p:nvSpPr>
         <p:spPr>
           <a:xfrm>
-            <a:off x="960120" y="4983480"/>
-            <a:ext cx="9875520" cy="822960"/>
+            <a:off x="960120" y="4069080"/>
+            <a:ext cx="4754880" cy="1463040"/>
           </a:xfrm>
           <a:prstGeom prst="rect">
             <a:avLst/>
@@ -4801,7 +4806,7 @@
                 </a:solidFill>
                 <a:latin typeface="Calibri"/>
               </a:rPr>
-              <a:t>•  Primary: feature-level (early) concatenation fusion — cheap to train on CPU, standard first fusion strategy in the literature</a:t>
+              <a:t>•  Small 4-layer CNN, trained from scratch</a:t>
             </a:r>
           </a:p>
           <a:p>
@@ -4820,14 +4825,196 @@
                 </a:solidFill>
                 <a:latin typeface="Calibri"/>
               </a:rPr>
-              <a:t>•  Ablation: late (decision-level) fusion — independent text/image classifiers' probabilities combined by averaging and by a validation-tuned weight (w_text = 0.80)</a:t>
-            </a:r>
-          </a:p>
-        </p:txBody>
-      </p:sp>
-      <p:sp>
-        <p:nvSpPr>
-          <p:cNvPr id="14" name="TextBox 13"/>
+              <a:t>•  Reduced to 96x96 / 3 epochs (CPU budget)</a:t>
+            </a:r>
+          </a:p>
+          <a:p>
+            <a:pPr algn="l">
+              <a:lnSpc>
+                <a:spcPct val="108000"/>
+              </a:lnSpc>
+              <a:spcAft>
+                <a:spcPts val="600"/>
+              </a:spcAft>
+            </a:pPr>
+            <a:r>
+              <a:rPr sz="1250">
+                <a:solidFill>
+                  <a:srgbClr val="16213E"/>
+                </a:solidFill>
+                <a:latin typeface="Calibri"/>
+              </a:rPr>
+              <a:t>•  Test: 47.6% accuracy / 42.9% macro-F1</a:t>
+            </a:r>
+          </a:p>
+        </p:txBody>
+      </p:sp>
+      <p:sp>
+        <p:nvSpPr>
+          <p:cNvPr id="14" name="Rounded Rectangle 13"/>
+          <p:cNvSpPr/>
+          <p:nvPr/>
+        </p:nvSpPr>
+        <p:spPr>
+          <a:xfrm>
+            <a:off x="6217920" y="3383280"/>
+            <a:ext cx="5212080" cy="2377440"/>
+          </a:xfrm>
+          <a:prstGeom prst="roundRect">
+            <a:avLst>
+              <a:gd name="adj" fmla="val 4000"/>
+            </a:avLst>
+          </a:prstGeom>
+          <a:solidFill>
+            <a:srgbClr val="FFFFFF"/>
+          </a:solidFill>
+          <a:ln w="15875">
+            <a:solidFill>
+              <a:srgbClr val="EB6834"/>
+            </a:solidFill>
+          </a:ln>
+          <a:effectLst/>
+        </p:spPr>
+        <p:style>
+          <a:lnRef idx="1">
+            <a:schemeClr val="accent1"/>
+          </a:lnRef>
+          <a:fillRef idx="3">
+            <a:schemeClr val="accent1"/>
+          </a:fillRef>
+          <a:effectRef idx="2">
+            <a:schemeClr val="accent1"/>
+          </a:effectRef>
+          <a:fontRef idx="minor">
+            <a:schemeClr val="lt1"/>
+          </a:fontRef>
+        </p:style>
+        <p:txBody>
+          <a:bodyPr rtlCol="0" anchor="ctr"/>
+          <a:lstStyle/>
+          <a:p>
+            <a:pPr algn="ctr"/>
+          </a:p>
+        </p:txBody>
+      </p:sp>
+      <p:sp>
+        <p:nvSpPr>
+          <p:cNvPr id="15" name="TextBox 14"/>
+          <p:cNvSpPr txBox="1"/>
+          <p:nvPr/>
+        </p:nvSpPr>
+        <p:spPr>
+          <a:xfrm>
+            <a:off x="6446520" y="3566160"/>
+            <a:ext cx="4754880" cy="457200"/>
+          </a:xfrm>
+          <a:prstGeom prst="rect">
+            <a:avLst/>
+          </a:prstGeom>
+          <a:noFill/>
+        </p:spPr>
+        <p:txBody>
+          <a:bodyPr wrap="square" anchor="t" lIns="0" rIns="0" tIns="0" bIns="0">
+            <a:spAutoFit/>
+          </a:bodyPr>
+          <a:lstStyle/>
+          <a:p>
+            <a:pPr algn="l"/>
+            <a:r>
+              <a:rPr sz="1700" b="1" i="0">
+                <a:solidFill>
+                  <a:srgbClr val="1E2761"/>
+                </a:solidFill>
+                <a:latin typeface="Cambria"/>
+              </a:rPr>
+              <a:t>B2 — Frozen ResNet18</a:t>
+            </a:r>
+          </a:p>
+        </p:txBody>
+      </p:sp>
+      <p:sp>
+        <p:nvSpPr>
+          <p:cNvPr id="16" name="TextBox 15"/>
+          <p:cNvSpPr txBox="1"/>
+          <p:nvPr/>
+        </p:nvSpPr>
+        <p:spPr>
+          <a:xfrm>
+            <a:off x="6446520" y="4069080"/>
+            <a:ext cx="4754880" cy="1463040"/>
+          </a:xfrm>
+          <a:prstGeom prst="rect">
+            <a:avLst/>
+          </a:prstGeom>
+          <a:noFill/>
+        </p:spPr>
+        <p:txBody>
+          <a:bodyPr wrap="square" lIns="0" rIns="0">
+            <a:spAutoFit/>
+          </a:bodyPr>
+          <a:lstStyle/>
+          <a:p>
+            <a:pPr algn="l">
+              <a:lnSpc>
+                <a:spcPct val="108000"/>
+              </a:lnSpc>
+              <a:spcAft>
+                <a:spcPts val="600"/>
+              </a:spcAft>
+            </a:pPr>
+            <a:r>
+              <a:rPr sz="1250">
+                <a:solidFill>
+                  <a:srgbClr val="16213E"/>
+                </a:solidFill>
+                <a:latin typeface="Calibri"/>
+              </a:rPr>
+              <a:t>•  ImageNet-pretrained, frozen feature extractor</a:t>
+            </a:r>
+          </a:p>
+          <a:p>
+            <a:pPr algn="l">
+              <a:lnSpc>
+                <a:spcPct val="108000"/>
+              </a:lnSpc>
+              <a:spcAft>
+                <a:spcPts val="600"/>
+              </a:spcAft>
+            </a:pPr>
+            <a:r>
+              <a:rPr sz="1250">
+                <a:solidFill>
+                  <a:srgbClr val="16213E"/>
+                </a:solidFill>
+                <a:latin typeface="Calibri"/>
+              </a:rPr>
+              <a:t>•  Transfer learning over from-scratch training</a:t>
+            </a:r>
+          </a:p>
+          <a:p>
+            <a:pPr algn="l">
+              <a:lnSpc>
+                <a:spcPct val="108000"/>
+              </a:lnSpc>
+              <a:spcAft>
+                <a:spcPts val="600"/>
+              </a:spcAft>
+            </a:pPr>
+            <a:r>
+              <a:rPr sz="1250">
+                <a:solidFill>
+                  <a:srgbClr val="16213E"/>
+                </a:solidFill>
+                <a:latin typeface="Calibri"/>
+              </a:rPr>
+              <a:t>•  Test: 52.7% accuracy / 42.8% macro-F1</a:t>
+            </a:r>
+          </a:p>
+        </p:txBody>
+      </p:sp>
+      <p:sp>
+        <p:nvSpPr>
+          <p:cNvPr id="17" name="TextBox 16"/>
           <p:cNvSpPr txBox="1"/>
           <p:nvPr/>
         </p:nvSpPr>
@@ -4862,7 +5049,7 @@
       </p:sp>
       <p:sp>
         <p:nvSpPr>
-          <p:cNvPr id="15" name="TextBox 14"/>
+          <p:cNvPr id="18" name="TextBox 17"/>
           <p:cNvSpPr txBox="1"/>
           <p:nvPr/>
         </p:nvSpPr>
@@ -4951,7 +5138,7 @@
                 </a:solidFill>
                 <a:latin typeface="Calibri"/>
               </a:rPr>
-              <a:t>RESEARCH PROGRESS</a:t>
+              <a:t>RESEARCH DESIGN</a:t>
             </a:r>
           </a:p>
         </p:txBody>
@@ -4986,7 +5173,7 @@
                 </a:solidFill>
                 <a:latin typeface="Cambria"/>
               </a:rPr>
-              <a:t>Experimental Setup</a:t>
+              <a:t>Multimodal Fusion</a:t>
             </a:r>
           </a:p>
         </p:txBody>
@@ -4999,21 +5186,19 @@
         </p:nvSpPr>
         <p:spPr>
           <a:xfrm>
-            <a:off x="731520" y="2103120"/>
-            <a:ext cx="2514600" cy="1828800"/>
+            <a:off x="731520" y="1920240"/>
+            <a:ext cx="3017520" cy="822960"/>
           </a:xfrm>
           <a:prstGeom prst="roundRect">
             <a:avLst>
-              <a:gd name="adj" fmla="val 8000"/>
+              <a:gd name="adj" fmla="val 15000"/>
             </a:avLst>
           </a:prstGeom>
           <a:solidFill>
-            <a:srgbClr val="FFFFFF"/>
+            <a:srgbClr val="1E2761"/>
           </a:solidFill>
-          <a:ln w="12700">
-            <a:solidFill>
-              <a:srgbClr val="E3E8F0"/>
-            </a:solidFill>
+          <a:ln>
+            <a:noFill/>
           </a:ln>
           <a:effectLst/>
         </p:spPr>
@@ -5032,106 +5217,44 @@
           </a:fontRef>
         </p:style>
         <p:txBody>
-          <a:bodyPr rtlCol="0" anchor="ctr"/>
+          <a:bodyPr rtlCol="0" anchor="ctr" wrap="square" lIns="50800" rIns="50800"/>
           <a:lstStyle/>
           <a:p>
             <a:pPr algn="ctr"/>
-          </a:p>
-        </p:txBody>
-      </p:sp>
-      <p:sp>
-        <p:nvSpPr>
-          <p:cNvPr id="5" name="TextBox 4"/>
-          <p:cNvSpPr txBox="1"/>
-          <p:nvPr/>
-        </p:nvSpPr>
-        <p:spPr>
-          <a:xfrm>
-            <a:off x="868680" y="2267712"/>
-            <a:ext cx="2240280" cy="685800"/>
-          </a:xfrm>
-          <a:prstGeom prst="rect">
-            <a:avLst/>
-          </a:prstGeom>
-          <a:noFill/>
-        </p:spPr>
-        <p:txBody>
-          <a:bodyPr wrap="square" anchor="t" lIns="0" rIns="0" tIns="0" bIns="0">
-            <a:spAutoFit/>
-          </a:bodyPr>
-          <a:lstStyle/>
-          <a:p>
-            <a:pPr algn="ctr"/>
-            <a:r>
-              <a:rPr sz="3000" b="1" i="0">
-                <a:solidFill>
-                  <a:srgbClr val="EB6834"/>
-                </a:solidFill>
-                <a:latin typeface="Cambria"/>
-              </a:rPr>
-              <a:t>Seed = 42</a:t>
-            </a:r>
-          </a:p>
-        </p:txBody>
-      </p:sp>
-      <p:sp>
-        <p:nvSpPr>
-          <p:cNvPr id="6" name="TextBox 5"/>
-          <p:cNvSpPr txBox="1"/>
-          <p:nvPr/>
-        </p:nvSpPr>
-        <p:spPr>
-          <a:xfrm>
-            <a:off x="868680" y="3364992"/>
-            <a:ext cx="2240280" cy="457200"/>
-          </a:xfrm>
-          <a:prstGeom prst="rect">
-            <a:avLst/>
-          </a:prstGeom>
-          <a:noFill/>
-        </p:spPr>
-        <p:txBody>
-          <a:bodyPr wrap="square" anchor="t" lIns="0" rIns="0" tIns="0" bIns="0">
-            <a:spAutoFit/>
-          </a:bodyPr>
-          <a:lstStyle/>
-          <a:p>
-            <a:pPr algn="ctr"/>
-            <a:r>
-              <a:rPr sz="1150" b="0" i="0">
-                <a:solidFill>
-                  <a:srgbClr val="5B6B7A"/>
-                </a:solidFill>
-                <a:latin typeface="Calibri"/>
-              </a:rPr>
-              <a:t>fixed throughout</a:t>
-            </a:r>
-          </a:p>
-        </p:txBody>
-      </p:sp>
-      <p:sp>
-        <p:nvSpPr>
-          <p:cNvPr id="7" name="Rounded Rectangle 6"/>
+            <a:r>
+              <a:rPr sz="1250" b="1">
+                <a:solidFill>
+                  <a:srgbClr val="FFFFFF"/>
+                </a:solidFill>
+                <a:latin typeface="Calibri"/>
+              </a:rPr>
+              <a:t>Text embedding
+(768-dim)</a:t>
+            </a:r>
+          </a:p>
+        </p:txBody>
+      </p:sp>
+      <p:sp>
+        <p:nvSpPr>
+          <p:cNvPr id="5" name="Rounded Rectangle 4"/>
           <p:cNvSpPr/>
           <p:nvPr/>
         </p:nvSpPr>
         <p:spPr>
           <a:xfrm>
-            <a:off x="3520440" y="2103120"/>
-            <a:ext cx="2514600" cy="1828800"/>
+            <a:off x="731520" y="3108960"/>
+            <a:ext cx="3017520" cy="822960"/>
           </a:xfrm>
           <a:prstGeom prst="roundRect">
             <a:avLst>
-              <a:gd name="adj" fmla="val 8000"/>
+              <a:gd name="adj" fmla="val 15000"/>
             </a:avLst>
           </a:prstGeom>
           <a:solidFill>
-            <a:srgbClr val="FFFFFF"/>
+            <a:srgbClr val="EB6834"/>
           </a:solidFill>
-          <a:ln w="12700">
-            <a:solidFill>
-              <a:srgbClr val="E3E8F0"/>
-            </a:solidFill>
+          <a:ln>
+            <a:noFill/>
           </a:ln>
           <a:effectLst/>
         </p:spPr>
@@ -5150,106 +5273,42 @@
           </a:fontRef>
         </p:style>
         <p:txBody>
-          <a:bodyPr rtlCol="0" anchor="ctr"/>
+          <a:bodyPr rtlCol="0" anchor="ctr" wrap="square" lIns="50800" rIns="50800"/>
           <a:lstStyle/>
           <a:p>
             <a:pPr algn="ctr"/>
-          </a:p>
-        </p:txBody>
-      </p:sp>
-      <p:sp>
-        <p:nvSpPr>
-          <p:cNvPr id="8" name="TextBox 7"/>
-          <p:cNvSpPr txBox="1"/>
-          <p:nvPr/>
-        </p:nvSpPr>
-        <p:spPr>
-          <a:xfrm>
-            <a:off x="3657600" y="2267712"/>
-            <a:ext cx="2240280" cy="685800"/>
-          </a:xfrm>
-          <a:prstGeom prst="rect">
-            <a:avLst/>
-          </a:prstGeom>
-          <a:noFill/>
-        </p:spPr>
-        <p:txBody>
-          <a:bodyPr wrap="square" anchor="t" lIns="0" rIns="0" tIns="0" bIns="0">
-            <a:spAutoFit/>
-          </a:bodyPr>
-          <a:lstStyle/>
-          <a:p>
-            <a:pPr algn="ctr"/>
-            <a:r>
-              <a:rPr sz="3000" b="1" i="0">
-                <a:solidFill>
-                  <a:srgbClr val="EB6834"/>
-                </a:solidFill>
-                <a:latin typeface="Cambria"/>
-              </a:rPr>
-              <a:t>CPU-only</a:t>
-            </a:r>
-          </a:p>
-        </p:txBody>
-      </p:sp>
-      <p:sp>
-        <p:nvSpPr>
-          <p:cNvPr id="9" name="TextBox 8"/>
-          <p:cNvSpPr txBox="1"/>
-          <p:nvPr/>
-        </p:nvSpPr>
-        <p:spPr>
-          <a:xfrm>
-            <a:off x="3657600" y="3364992"/>
-            <a:ext cx="2240280" cy="457200"/>
-          </a:xfrm>
-          <a:prstGeom prst="rect">
-            <a:avLst/>
-          </a:prstGeom>
-          <a:noFill/>
-        </p:spPr>
-        <p:txBody>
-          <a:bodyPr wrap="square" anchor="t" lIns="0" rIns="0" tIns="0" bIns="0">
-            <a:spAutoFit/>
-          </a:bodyPr>
-          <a:lstStyle/>
-          <a:p>
-            <a:pPr algn="ctr"/>
-            <a:r>
-              <a:rPr sz="1150" b="0" i="0">
-                <a:solidFill>
-                  <a:srgbClr val="5B6B7A"/>
-                </a:solidFill>
-                <a:latin typeface="Calibri"/>
-              </a:rPr>
-              <a:t>no GPU, 8GB RAM</a:t>
-            </a:r>
-          </a:p>
-        </p:txBody>
-      </p:sp>
-      <p:sp>
-        <p:nvSpPr>
-          <p:cNvPr id="10" name="Rounded Rectangle 9"/>
+            <a:r>
+              <a:rPr sz="1250" b="1">
+                <a:solidFill>
+                  <a:srgbClr val="FFFFFF"/>
+                </a:solidFill>
+                <a:latin typeface="Calibri"/>
+              </a:rPr>
+              <a:t>Image embedding
+(512-dim)</a:t>
+            </a:r>
+          </a:p>
+        </p:txBody>
+      </p:sp>
+      <p:sp>
+        <p:nvSpPr>
+          <p:cNvPr id="6" name="Right Arrow 5"/>
           <p:cNvSpPr/>
           <p:nvPr/>
         </p:nvSpPr>
         <p:spPr>
           <a:xfrm>
-            <a:off x="6309360" y="2103120"/>
-            <a:ext cx="2514600" cy="1828800"/>
-          </a:xfrm>
-          <a:prstGeom prst="roundRect">
-            <a:avLst>
-              <a:gd name="adj" fmla="val 8000"/>
-            </a:avLst>
+            <a:off x="3886200" y="2286000"/>
+            <a:ext cx="640080" cy="365760"/>
+          </a:xfrm>
+          <a:prstGeom prst="rightArrow">
+            <a:avLst/>
           </a:prstGeom>
           <a:solidFill>
-            <a:srgbClr val="FFFFFF"/>
+            <a:srgbClr val="EB6834"/>
           </a:solidFill>
-          <a:ln w="12700">
-            <a:solidFill>
-              <a:srgbClr val="E3E8F0"/>
-            </a:solidFill>
+          <a:ln>
+            <a:noFill/>
           </a:ln>
           <a:effectLst/>
         </p:spPr>
@@ -5277,97 +5336,23 @@
       </p:sp>
       <p:sp>
         <p:nvSpPr>
-          <p:cNvPr id="11" name="TextBox 10"/>
-          <p:cNvSpPr txBox="1"/>
-          <p:nvPr/>
-        </p:nvSpPr>
-        <p:spPr>
-          <a:xfrm>
-            <a:off x="6446520" y="2267712"/>
-            <a:ext cx="2240280" cy="685800"/>
-          </a:xfrm>
-          <a:prstGeom prst="rect">
-            <a:avLst/>
-          </a:prstGeom>
-          <a:noFill/>
-        </p:spPr>
-        <p:txBody>
-          <a:bodyPr wrap="square" anchor="t" lIns="0" rIns="0" tIns="0" bIns="0">
-            <a:spAutoFit/>
-          </a:bodyPr>
-          <a:lstStyle/>
-          <a:p>
-            <a:pPr algn="ctr"/>
-            <a:r>
-              <a:rPr sz="3000" b="1" i="0">
-                <a:solidFill>
-                  <a:srgbClr val="EB6834"/>
-                </a:solidFill>
-                <a:latin typeface="Cambria"/>
-              </a:rPr>
-              <a:t>Macro-F1</a:t>
-            </a:r>
-          </a:p>
-        </p:txBody>
-      </p:sp>
-      <p:sp>
-        <p:nvSpPr>
-          <p:cNvPr id="12" name="TextBox 11"/>
-          <p:cNvSpPr txBox="1"/>
-          <p:nvPr/>
-        </p:nvSpPr>
-        <p:spPr>
-          <a:xfrm>
-            <a:off x="6446520" y="3364992"/>
-            <a:ext cx="2240280" cy="457200"/>
-          </a:xfrm>
-          <a:prstGeom prst="rect">
-            <a:avLst/>
-          </a:prstGeom>
-          <a:noFill/>
-        </p:spPr>
-        <p:txBody>
-          <a:bodyPr wrap="square" anchor="t" lIns="0" rIns="0" tIns="0" bIns="0">
-            <a:spAutoFit/>
-          </a:bodyPr>
-          <a:lstStyle/>
-          <a:p>
-            <a:pPr algn="ctr"/>
-            <a:r>
-              <a:rPr sz="1150" b="0" i="0">
-                <a:solidFill>
-                  <a:srgbClr val="5B6B7A"/>
-                </a:solidFill>
-                <a:latin typeface="Calibri"/>
-              </a:rPr>
-              <a:t>prioritized metric</a:t>
-            </a:r>
-          </a:p>
-        </p:txBody>
-      </p:sp>
-      <p:sp>
-        <p:nvSpPr>
-          <p:cNvPr id="13" name="Rounded Rectangle 12"/>
+          <p:cNvPr id="7" name="Right Arrow 6"/>
           <p:cNvSpPr/>
           <p:nvPr/>
         </p:nvSpPr>
         <p:spPr>
           <a:xfrm>
-            <a:off x="9098280" y="2103120"/>
-            <a:ext cx="2514600" cy="1828800"/>
-          </a:xfrm>
-          <a:prstGeom prst="roundRect">
-            <a:avLst>
-              <a:gd name="adj" fmla="val 8000"/>
-            </a:avLst>
+            <a:off x="3886200" y="3474720"/>
+            <a:ext cx="640080" cy="365760"/>
+          </a:xfrm>
+          <a:prstGeom prst="rightArrow">
+            <a:avLst/>
           </a:prstGeom>
           <a:solidFill>
-            <a:srgbClr val="FFFFFF"/>
+            <a:srgbClr val="EB6834"/>
           </a:solidFill>
-          <a:ln w="12700">
-            <a:solidFill>
-              <a:srgbClr val="E3E8F0"/>
-            </a:solidFill>
+          <a:ln>
+            <a:noFill/>
           </a:ln>
           <a:effectLst/>
         </p:spPr>
@@ -5395,84 +5380,253 @@
       </p:sp>
       <p:sp>
         <p:nvSpPr>
-          <p:cNvPr id="14" name="TextBox 13"/>
-          <p:cNvSpPr txBox="1"/>
-          <p:nvPr/>
-        </p:nvSpPr>
-        <p:spPr>
-          <a:xfrm>
-            <a:off x="9235440" y="2267712"/>
-            <a:ext cx="2240280" cy="685800"/>
-          </a:xfrm>
-          <a:prstGeom prst="rect">
-            <a:avLst/>
-          </a:prstGeom>
-          <a:noFill/>
-        </p:spPr>
-        <p:txBody>
-          <a:bodyPr wrap="square" anchor="t" lIns="0" rIns="0" tIns="0" bIns="0">
-            <a:spAutoFit/>
-          </a:bodyPr>
+          <p:cNvPr id="8" name="Rounded Rectangle 7"/>
+          <p:cNvSpPr/>
+          <p:nvPr/>
+        </p:nvSpPr>
+        <p:spPr>
+          <a:xfrm>
+            <a:off x="4663440" y="2514600"/>
+            <a:ext cx="2743200" cy="822960"/>
+          </a:xfrm>
+          <a:prstGeom prst="roundRect">
+            <a:avLst>
+              <a:gd name="adj" fmla="val 15000"/>
+            </a:avLst>
+          </a:prstGeom>
+          <a:solidFill>
+            <a:srgbClr val="141B46"/>
+          </a:solidFill>
+          <a:ln>
+            <a:noFill/>
+          </a:ln>
+          <a:effectLst/>
+        </p:spPr>
+        <p:style>
+          <a:lnRef idx="1">
+            <a:schemeClr val="accent1"/>
+          </a:lnRef>
+          <a:fillRef idx="3">
+            <a:schemeClr val="accent1"/>
+          </a:fillRef>
+          <a:effectRef idx="2">
+            <a:schemeClr val="accent1"/>
+          </a:effectRef>
+          <a:fontRef idx="minor">
+            <a:schemeClr val="lt1"/>
+          </a:fontRef>
+        </p:style>
+        <p:txBody>
+          <a:bodyPr rtlCol="0" anchor="ctr" wrap="square" lIns="50800" rIns="50800"/>
           <a:lstStyle/>
           <a:p>
             <a:pPr algn="ctr"/>
             <a:r>
-              <a:rPr sz="3000" b="1" i="0">
-                <a:solidFill>
-                  <a:srgbClr val="EB6834"/>
+              <a:rPr sz="1250" b="1">
+                <a:solidFill>
+                  <a:srgbClr val="FFFFFF"/>
+                </a:solidFill>
+                <a:latin typeface="Calibri"/>
+              </a:rPr>
+              <a:t>Concatenate
+(1280-dim)</a:t>
+            </a:r>
+          </a:p>
+        </p:txBody>
+      </p:sp>
+      <p:sp>
+        <p:nvSpPr>
+          <p:cNvPr id="9" name="Right Arrow 8"/>
+          <p:cNvSpPr/>
+          <p:nvPr/>
+        </p:nvSpPr>
+        <p:spPr>
+          <a:xfrm>
+            <a:off x="7498079" y="2697480"/>
+            <a:ext cx="640080" cy="365760"/>
+          </a:xfrm>
+          <a:prstGeom prst="rightArrow">
+            <a:avLst/>
+          </a:prstGeom>
+          <a:solidFill>
+            <a:srgbClr val="EB6834"/>
+          </a:solidFill>
+          <a:ln>
+            <a:noFill/>
+          </a:ln>
+          <a:effectLst/>
+        </p:spPr>
+        <p:style>
+          <a:lnRef idx="1">
+            <a:schemeClr val="accent1"/>
+          </a:lnRef>
+          <a:fillRef idx="3">
+            <a:schemeClr val="accent1"/>
+          </a:fillRef>
+          <a:effectRef idx="2">
+            <a:schemeClr val="accent1"/>
+          </a:effectRef>
+          <a:fontRef idx="minor">
+            <a:schemeClr val="lt1"/>
+          </a:fontRef>
+        </p:style>
+        <p:txBody>
+          <a:bodyPr rtlCol="0" anchor="ctr"/>
+          <a:lstStyle/>
+          <a:p>
+            <a:pPr algn="ctr"/>
+          </a:p>
+        </p:txBody>
+      </p:sp>
+      <p:sp>
+        <p:nvSpPr>
+          <p:cNvPr id="10" name="Rounded Rectangle 9"/>
+          <p:cNvSpPr/>
+          <p:nvPr/>
+        </p:nvSpPr>
+        <p:spPr>
+          <a:xfrm>
+            <a:off x="8229600" y="2514600"/>
+            <a:ext cx="2834640" cy="822960"/>
+          </a:xfrm>
+          <a:prstGeom prst="roundRect">
+            <a:avLst>
+              <a:gd name="adj" fmla="val 15000"/>
+            </a:avLst>
+          </a:prstGeom>
+          <a:solidFill>
+            <a:srgbClr val="1E2761"/>
+          </a:solidFill>
+          <a:ln>
+            <a:noFill/>
+          </a:ln>
+          <a:effectLst/>
+        </p:spPr>
+        <p:style>
+          <a:lnRef idx="1">
+            <a:schemeClr val="accent1"/>
+          </a:lnRef>
+          <a:fillRef idx="3">
+            <a:schemeClr val="accent1"/>
+          </a:fillRef>
+          <a:effectRef idx="2">
+            <a:schemeClr val="accent1"/>
+          </a:effectRef>
+          <a:fontRef idx="minor">
+            <a:schemeClr val="lt1"/>
+          </a:fontRef>
+        </p:style>
+        <p:txBody>
+          <a:bodyPr rtlCol="0" anchor="ctr" wrap="square" lIns="50800" rIns="50800"/>
+          <a:lstStyle/>
+          <a:p>
+            <a:pPr algn="ctr"/>
+            <a:r>
+              <a:rPr sz="1250" b="1">
+                <a:solidFill>
+                  <a:srgbClr val="FFFFFF"/>
+                </a:solidFill>
+                <a:latin typeface="Calibri"/>
+              </a:rPr>
+              <a:t>MLP classifier
+(dropout, softmax)</a:t>
+            </a:r>
+          </a:p>
+        </p:txBody>
+      </p:sp>
+      <p:sp>
+        <p:nvSpPr>
+          <p:cNvPr id="11" name="Rounded Rectangle 10"/>
+          <p:cNvSpPr/>
+          <p:nvPr/>
+        </p:nvSpPr>
+        <p:spPr>
+          <a:xfrm>
+            <a:off x="731520" y="4297680"/>
+            <a:ext cx="10332720" cy="1737360"/>
+          </a:xfrm>
+          <a:prstGeom prst="roundRect">
+            <a:avLst>
+              <a:gd name="adj" fmla="val 4000"/>
+            </a:avLst>
+          </a:prstGeom>
+          <a:solidFill>
+            <a:srgbClr val="FFFFFF"/>
+          </a:solidFill>
+          <a:ln w="15875">
+            <a:solidFill>
+              <a:srgbClr val="CADCFC"/>
+            </a:solidFill>
+          </a:ln>
+          <a:effectLst/>
+        </p:spPr>
+        <p:style>
+          <a:lnRef idx="1">
+            <a:schemeClr val="accent1"/>
+          </a:lnRef>
+          <a:fillRef idx="3">
+            <a:schemeClr val="accent1"/>
+          </a:fillRef>
+          <a:effectRef idx="2">
+            <a:schemeClr val="accent1"/>
+          </a:effectRef>
+          <a:fontRef idx="minor">
+            <a:schemeClr val="lt1"/>
+          </a:fontRef>
+        </p:style>
+        <p:txBody>
+          <a:bodyPr rtlCol="0" anchor="ctr"/>
+          <a:lstStyle/>
+          <a:p>
+            <a:pPr algn="ctr"/>
+          </a:p>
+        </p:txBody>
+      </p:sp>
+      <p:sp>
+        <p:nvSpPr>
+          <p:cNvPr id="12" name="TextBox 11"/>
+          <p:cNvSpPr txBox="1"/>
+          <p:nvPr/>
+        </p:nvSpPr>
+        <p:spPr>
+          <a:xfrm>
+            <a:off x="960120" y="4480560"/>
+            <a:ext cx="9875520" cy="457200"/>
+          </a:xfrm>
+          <a:prstGeom prst="rect">
+            <a:avLst/>
+          </a:prstGeom>
+          <a:noFill/>
+        </p:spPr>
+        <p:txBody>
+          <a:bodyPr wrap="square" anchor="t" lIns="0" rIns="0" tIns="0" bIns="0">
+            <a:spAutoFit/>
+          </a:bodyPr>
+          <a:lstStyle/>
+          <a:p>
+            <a:pPr algn="l"/>
+            <a:r>
+              <a:rPr sz="1700" b="1" i="0">
+                <a:solidFill>
+                  <a:srgbClr val="1E2761"/>
                 </a:solidFill>
                 <a:latin typeface="Cambria"/>
               </a:rPr>
-              <a:t>3,611 / 450 / 450</a:t>
-            </a:r>
-          </a:p>
-        </p:txBody>
-      </p:sp>
-      <p:sp>
-        <p:nvSpPr>
-          <p:cNvPr id="15" name="TextBox 14"/>
-          <p:cNvSpPr txBox="1"/>
-          <p:nvPr/>
-        </p:nvSpPr>
-        <p:spPr>
-          <a:xfrm>
-            <a:off x="9235440" y="3364992"/>
-            <a:ext cx="2240280" cy="457200"/>
-          </a:xfrm>
-          <a:prstGeom prst="rect">
-            <a:avLst/>
-          </a:prstGeom>
-          <a:noFill/>
-        </p:spPr>
-        <p:txBody>
-          <a:bodyPr wrap="square" anchor="t" lIns="0" rIns="0" tIns="0" bIns="0">
-            <a:spAutoFit/>
-          </a:bodyPr>
-          <a:lstStyle/>
-          <a:p>
-            <a:pPr algn="ctr"/>
-            <a:r>
-              <a:rPr sz="1150" b="0" i="0">
-                <a:solidFill>
-                  <a:srgbClr val="5B6B7A"/>
-                </a:solidFill>
-                <a:latin typeface="Calibri"/>
-              </a:rPr>
-              <a:t>train / val / test</a:t>
-            </a:r>
-          </a:p>
-        </p:txBody>
-      </p:sp>
-      <p:sp>
-        <p:nvSpPr>
-          <p:cNvPr id="16" name="TextBox 15"/>
-          <p:cNvSpPr txBox="1"/>
-          <p:nvPr/>
-        </p:nvSpPr>
-        <p:spPr>
-          <a:xfrm>
-            <a:off x="731520" y="4389120"/>
-            <a:ext cx="10515600" cy="1371600"/>
+              <a:t>Primary vs. ablation</a:t>
+            </a:r>
+          </a:p>
+        </p:txBody>
+      </p:sp>
+      <p:sp>
+        <p:nvSpPr>
+          <p:cNvPr id="13" name="TextBox 12"/>
+          <p:cNvSpPr txBox="1"/>
+          <p:nvPr/>
+        </p:nvSpPr>
+        <p:spPr>
+          <a:xfrm>
+            <a:off x="960120" y="4983480"/>
+            <a:ext cx="9875520" cy="822960"/>
           </a:xfrm>
           <a:prstGeom prst="rect">
             <a:avLst/>
@@ -5490,17 +5644,17 @@
                 <a:spcPct val="108000"/>
               </a:lnSpc>
               <a:spcAft>
-                <a:spcPts val="1000"/>
+                <a:spcPts val="600"/>
               </a:spcAft>
             </a:pPr>
             <a:r>
-              <a:rPr sz="1450">
+              <a:rPr sz="1250">
                 <a:solidFill>
                   <a:srgbClr val="16213E"/>
                 </a:solidFill>
                 <a:latin typeface="Calibri"/>
               </a:rPr>
-              <a:t>•  Evaluation: accuracy, precision/recall/F1 (macro + weighted), confusion matrix</a:t>
+              <a:t>•  Primary: feature-level (early) concatenation fusion — cheap to train on CPU, standard first fusion strategy in the literature</a:t>
             </a:r>
           </a:p>
           <a:p>
@@ -5509,24 +5663,24 @@
                 <a:spcPct val="108000"/>
               </a:lnSpc>
               <a:spcAft>
-                <a:spcPts val="1000"/>
+                <a:spcPts val="600"/>
               </a:spcAft>
             </a:pPr>
             <a:r>
-              <a:rPr sz="1450">
+              <a:rPr sz="1250">
                 <a:solidFill>
                   <a:srgbClr val="16213E"/>
                 </a:solidFill>
                 <a:latin typeface="Calibri"/>
               </a:rPr>
-              <a:t>•  All numbers read directly from results/*.json, generated by actually-executed scripts under src/</a:t>
-            </a:r>
-          </a:p>
-        </p:txBody>
-      </p:sp>
-      <p:sp>
-        <p:nvSpPr>
-          <p:cNvPr id="17" name="TextBox 16"/>
+              <a:t>•  Ablation: late (decision-level) fusion — independent text/image classifiers' probabilities combined by averaging and by a validation-tuned weight (w_text = 0.80)</a:t>
+            </a:r>
+          </a:p>
+        </p:txBody>
+      </p:sp>
+      <p:sp>
+        <p:nvSpPr>
+          <p:cNvPr id="14" name="TextBox 13"/>
           <p:cNvSpPr txBox="1"/>
           <p:nvPr/>
         </p:nvSpPr>
@@ -5561,7 +5715,7 @@
       </p:sp>
       <p:sp>
         <p:nvSpPr>
-          <p:cNvPr id="18" name="TextBox 17"/>
+          <p:cNvPr id="15" name="TextBox 14"/>
           <p:cNvSpPr txBox="1"/>
           <p:nvPr/>
         </p:nvSpPr>
@@ -5650,7 +5804,7 @@
                 </a:solidFill>
                 <a:latin typeface="Calibri"/>
               </a:rPr>
-              <a:t>RESULTS &amp; VALIDATION</a:t>
+              <a:t>RESEARCH PROGRESS</a:t>
             </a:r>
           </a:p>
         </p:txBody>
@@ -5685,31 +5839,33 @@
                 </a:solidFill>
                 <a:latin typeface="Cambria"/>
               </a:rPr>
-              <a:t>Results</a:t>
-            </a:r>
-          </a:p>
-        </p:txBody>
-      </p:sp>
-      <p:sp>
-        <p:nvSpPr>
-          <p:cNvPr id="4" name="Rectangle 3"/>
+              <a:t>Experimental Setup</a:t>
+            </a:r>
+          </a:p>
+        </p:txBody>
+      </p:sp>
+      <p:sp>
+        <p:nvSpPr>
+          <p:cNvPr id="4" name="Rounded Rectangle 3"/>
           <p:cNvSpPr/>
           <p:nvPr/>
         </p:nvSpPr>
         <p:spPr>
           <a:xfrm>
-            <a:off x="2244344" y="1640840"/>
-            <a:ext cx="7672832" cy="4307840"/>
-          </a:xfrm>
-          <a:prstGeom prst="rect">
-            <a:avLst/>
+            <a:off x="731520" y="2103120"/>
+            <a:ext cx="2514600" cy="1828800"/>
+          </a:xfrm>
+          <a:prstGeom prst="roundRect">
+            <a:avLst>
+              <a:gd name="adj" fmla="val 8000"/>
+            </a:avLst>
           </a:prstGeom>
           <a:solidFill>
             <a:srgbClr val="FFFFFF"/>
           </a:solidFill>
           <a:ln w="12700">
             <a:solidFill>
-              <a:srgbClr val="DDE3EC"/>
+              <a:srgbClr val="E3E8F0"/>
             </a:solidFill>
           </a:ln>
           <a:effectLst/>
@@ -5736,30 +5892,41 @@
           </a:p>
         </p:txBody>
       </p:sp>
-      <p:pic>
-        <p:nvPicPr>
-          <p:cNvPr id="5" name="Picture 4" descr="model_comparison.png"/>
-          <p:cNvPicPr>
-            <a:picLocks noChangeAspect="1"/>
-          </p:cNvPicPr>
-          <p:nvPr/>
-        </p:nvPicPr>
-        <p:blipFill>
-          <a:blip r:embed="rId2"/>
-          <a:stretch>
-            <a:fillRect/>
-          </a:stretch>
-        </p:blipFill>
-        <p:spPr>
-          <a:xfrm>
-            <a:off x="2295144" y="1691640"/>
-            <a:ext cx="7571232" cy="4206240"/>
-          </a:xfrm>
-          <a:prstGeom prst="rect">
-            <a:avLst/>
-          </a:prstGeom>
-        </p:spPr>
-      </p:pic>
+      <p:sp>
+        <p:nvSpPr>
+          <p:cNvPr id="5" name="TextBox 4"/>
+          <p:cNvSpPr txBox="1"/>
+          <p:nvPr/>
+        </p:nvSpPr>
+        <p:spPr>
+          <a:xfrm>
+            <a:off x="868680" y="2267712"/>
+            <a:ext cx="2240280" cy="685800"/>
+          </a:xfrm>
+          <a:prstGeom prst="rect">
+            <a:avLst/>
+          </a:prstGeom>
+          <a:noFill/>
+        </p:spPr>
+        <p:txBody>
+          <a:bodyPr wrap="square" anchor="t" lIns="0" rIns="0" tIns="0" bIns="0">
+            <a:spAutoFit/>
+          </a:bodyPr>
+          <a:lstStyle/>
+          <a:p>
+            <a:pPr algn="ctr"/>
+            <a:r>
+              <a:rPr sz="3000" b="1" i="0">
+                <a:solidFill>
+                  <a:srgbClr val="EB6834"/>
+                </a:solidFill>
+                <a:latin typeface="Cambria"/>
+              </a:rPr>
+              <a:t>Seed = 42</a:t>
+            </a:r>
+          </a:p>
+        </p:txBody>
+      </p:sp>
       <p:sp>
         <p:nvSpPr>
           <p:cNvPr id="6" name="TextBox 5"/>
@@ -5768,8 +5935,8 @@
         </p:nvSpPr>
         <p:spPr>
           <a:xfrm>
-            <a:off x="731520" y="6080760"/>
-            <a:ext cx="10698480" cy="457200"/>
+            <a:off x="868680" y="3364992"/>
+            <a:ext cx="2240280" cy="457200"/>
           </a:xfrm>
           <a:prstGeom prst="rect">
             <a:avLst/>
@@ -5784,20 +5951,435 @@
           <a:p>
             <a:pPr algn="ctr"/>
             <a:r>
-              <a:rPr sz="1400" b="1" i="0">
-                <a:solidFill>
-                  <a:srgbClr val="1E2761"/>
-                </a:solidFill>
-                <a:latin typeface="Calibri"/>
-              </a:rPr>
-              <a:t>Multimodal fusion beats every unimodal model on every metric: 64.4% accuracy / 56.3% macro-F1.</a:t>
-            </a:r>
-          </a:p>
-        </p:txBody>
-      </p:sp>
-      <p:sp>
-        <p:nvSpPr>
-          <p:cNvPr id="7" name="TextBox 6"/>
+              <a:rPr sz="1150" b="0" i="0">
+                <a:solidFill>
+                  <a:srgbClr val="5B6B7A"/>
+                </a:solidFill>
+                <a:latin typeface="Calibri"/>
+              </a:rPr>
+              <a:t>fixed throughout</a:t>
+            </a:r>
+          </a:p>
+        </p:txBody>
+      </p:sp>
+      <p:sp>
+        <p:nvSpPr>
+          <p:cNvPr id="7" name="Rounded Rectangle 6"/>
+          <p:cNvSpPr/>
+          <p:nvPr/>
+        </p:nvSpPr>
+        <p:spPr>
+          <a:xfrm>
+            <a:off x="3520440" y="2103120"/>
+            <a:ext cx="2514600" cy="1828800"/>
+          </a:xfrm>
+          <a:prstGeom prst="roundRect">
+            <a:avLst>
+              <a:gd name="adj" fmla="val 8000"/>
+            </a:avLst>
+          </a:prstGeom>
+          <a:solidFill>
+            <a:srgbClr val="FFFFFF"/>
+          </a:solidFill>
+          <a:ln w="12700">
+            <a:solidFill>
+              <a:srgbClr val="E3E8F0"/>
+            </a:solidFill>
+          </a:ln>
+          <a:effectLst/>
+        </p:spPr>
+        <p:style>
+          <a:lnRef idx="1">
+            <a:schemeClr val="accent1"/>
+          </a:lnRef>
+          <a:fillRef idx="3">
+            <a:schemeClr val="accent1"/>
+          </a:fillRef>
+          <a:effectRef idx="2">
+            <a:schemeClr val="accent1"/>
+          </a:effectRef>
+          <a:fontRef idx="minor">
+            <a:schemeClr val="lt1"/>
+          </a:fontRef>
+        </p:style>
+        <p:txBody>
+          <a:bodyPr rtlCol="0" anchor="ctr"/>
+          <a:lstStyle/>
+          <a:p>
+            <a:pPr algn="ctr"/>
+          </a:p>
+        </p:txBody>
+      </p:sp>
+      <p:sp>
+        <p:nvSpPr>
+          <p:cNvPr id="8" name="TextBox 7"/>
+          <p:cNvSpPr txBox="1"/>
+          <p:nvPr/>
+        </p:nvSpPr>
+        <p:spPr>
+          <a:xfrm>
+            <a:off x="3657600" y="2267712"/>
+            <a:ext cx="2240280" cy="685800"/>
+          </a:xfrm>
+          <a:prstGeom prst="rect">
+            <a:avLst/>
+          </a:prstGeom>
+          <a:noFill/>
+        </p:spPr>
+        <p:txBody>
+          <a:bodyPr wrap="square" anchor="t" lIns="0" rIns="0" tIns="0" bIns="0">
+            <a:spAutoFit/>
+          </a:bodyPr>
+          <a:lstStyle/>
+          <a:p>
+            <a:pPr algn="ctr"/>
+            <a:r>
+              <a:rPr sz="3000" b="1" i="0">
+                <a:solidFill>
+                  <a:srgbClr val="EB6834"/>
+                </a:solidFill>
+                <a:latin typeface="Cambria"/>
+              </a:rPr>
+              <a:t>CPU-only</a:t>
+            </a:r>
+          </a:p>
+        </p:txBody>
+      </p:sp>
+      <p:sp>
+        <p:nvSpPr>
+          <p:cNvPr id="9" name="TextBox 8"/>
+          <p:cNvSpPr txBox="1"/>
+          <p:nvPr/>
+        </p:nvSpPr>
+        <p:spPr>
+          <a:xfrm>
+            <a:off x="3657600" y="3364992"/>
+            <a:ext cx="2240280" cy="457200"/>
+          </a:xfrm>
+          <a:prstGeom prst="rect">
+            <a:avLst/>
+          </a:prstGeom>
+          <a:noFill/>
+        </p:spPr>
+        <p:txBody>
+          <a:bodyPr wrap="square" anchor="t" lIns="0" rIns="0" tIns="0" bIns="0">
+            <a:spAutoFit/>
+          </a:bodyPr>
+          <a:lstStyle/>
+          <a:p>
+            <a:pPr algn="ctr"/>
+            <a:r>
+              <a:rPr sz="1150" b="0" i="0">
+                <a:solidFill>
+                  <a:srgbClr val="5B6B7A"/>
+                </a:solidFill>
+                <a:latin typeface="Calibri"/>
+              </a:rPr>
+              <a:t>no GPU, 8GB RAM</a:t>
+            </a:r>
+          </a:p>
+        </p:txBody>
+      </p:sp>
+      <p:sp>
+        <p:nvSpPr>
+          <p:cNvPr id="10" name="Rounded Rectangle 9"/>
+          <p:cNvSpPr/>
+          <p:nvPr/>
+        </p:nvSpPr>
+        <p:spPr>
+          <a:xfrm>
+            <a:off x="6309360" y="2103120"/>
+            <a:ext cx="2514600" cy="1828800"/>
+          </a:xfrm>
+          <a:prstGeom prst="roundRect">
+            <a:avLst>
+              <a:gd name="adj" fmla="val 8000"/>
+            </a:avLst>
+          </a:prstGeom>
+          <a:solidFill>
+            <a:srgbClr val="FFFFFF"/>
+          </a:solidFill>
+          <a:ln w="12700">
+            <a:solidFill>
+              <a:srgbClr val="E3E8F0"/>
+            </a:solidFill>
+          </a:ln>
+          <a:effectLst/>
+        </p:spPr>
+        <p:style>
+          <a:lnRef idx="1">
+            <a:schemeClr val="accent1"/>
+          </a:lnRef>
+          <a:fillRef idx="3">
+            <a:schemeClr val="accent1"/>
+          </a:fillRef>
+          <a:effectRef idx="2">
+            <a:schemeClr val="accent1"/>
+          </a:effectRef>
+          <a:fontRef idx="minor">
+            <a:schemeClr val="lt1"/>
+          </a:fontRef>
+        </p:style>
+        <p:txBody>
+          <a:bodyPr rtlCol="0" anchor="ctr"/>
+          <a:lstStyle/>
+          <a:p>
+            <a:pPr algn="ctr"/>
+          </a:p>
+        </p:txBody>
+      </p:sp>
+      <p:sp>
+        <p:nvSpPr>
+          <p:cNvPr id="11" name="TextBox 10"/>
+          <p:cNvSpPr txBox="1"/>
+          <p:nvPr/>
+        </p:nvSpPr>
+        <p:spPr>
+          <a:xfrm>
+            <a:off x="6446520" y="2267712"/>
+            <a:ext cx="2240280" cy="685800"/>
+          </a:xfrm>
+          <a:prstGeom prst="rect">
+            <a:avLst/>
+          </a:prstGeom>
+          <a:noFill/>
+        </p:spPr>
+        <p:txBody>
+          <a:bodyPr wrap="square" anchor="t" lIns="0" rIns="0" tIns="0" bIns="0">
+            <a:spAutoFit/>
+          </a:bodyPr>
+          <a:lstStyle/>
+          <a:p>
+            <a:pPr algn="ctr"/>
+            <a:r>
+              <a:rPr sz="3000" b="1" i="0">
+                <a:solidFill>
+                  <a:srgbClr val="EB6834"/>
+                </a:solidFill>
+                <a:latin typeface="Cambria"/>
+              </a:rPr>
+              <a:t>Macro-F1</a:t>
+            </a:r>
+          </a:p>
+        </p:txBody>
+      </p:sp>
+      <p:sp>
+        <p:nvSpPr>
+          <p:cNvPr id="12" name="TextBox 11"/>
+          <p:cNvSpPr txBox="1"/>
+          <p:nvPr/>
+        </p:nvSpPr>
+        <p:spPr>
+          <a:xfrm>
+            <a:off x="6446520" y="3364992"/>
+            <a:ext cx="2240280" cy="457200"/>
+          </a:xfrm>
+          <a:prstGeom prst="rect">
+            <a:avLst/>
+          </a:prstGeom>
+          <a:noFill/>
+        </p:spPr>
+        <p:txBody>
+          <a:bodyPr wrap="square" anchor="t" lIns="0" rIns="0" tIns="0" bIns="0">
+            <a:spAutoFit/>
+          </a:bodyPr>
+          <a:lstStyle/>
+          <a:p>
+            <a:pPr algn="ctr"/>
+            <a:r>
+              <a:rPr sz="1150" b="0" i="0">
+                <a:solidFill>
+                  <a:srgbClr val="5B6B7A"/>
+                </a:solidFill>
+                <a:latin typeface="Calibri"/>
+              </a:rPr>
+              <a:t>prioritized metric</a:t>
+            </a:r>
+          </a:p>
+        </p:txBody>
+      </p:sp>
+      <p:sp>
+        <p:nvSpPr>
+          <p:cNvPr id="13" name="Rounded Rectangle 12"/>
+          <p:cNvSpPr/>
+          <p:nvPr/>
+        </p:nvSpPr>
+        <p:spPr>
+          <a:xfrm>
+            <a:off x="9098280" y="2103120"/>
+            <a:ext cx="2514600" cy="1828800"/>
+          </a:xfrm>
+          <a:prstGeom prst="roundRect">
+            <a:avLst>
+              <a:gd name="adj" fmla="val 8000"/>
+            </a:avLst>
+          </a:prstGeom>
+          <a:solidFill>
+            <a:srgbClr val="FFFFFF"/>
+          </a:solidFill>
+          <a:ln w="12700">
+            <a:solidFill>
+              <a:srgbClr val="E3E8F0"/>
+            </a:solidFill>
+          </a:ln>
+          <a:effectLst/>
+        </p:spPr>
+        <p:style>
+          <a:lnRef idx="1">
+            <a:schemeClr val="accent1"/>
+          </a:lnRef>
+          <a:fillRef idx="3">
+            <a:schemeClr val="accent1"/>
+          </a:fillRef>
+          <a:effectRef idx="2">
+            <a:schemeClr val="accent1"/>
+          </a:effectRef>
+          <a:fontRef idx="minor">
+            <a:schemeClr val="lt1"/>
+          </a:fontRef>
+        </p:style>
+        <p:txBody>
+          <a:bodyPr rtlCol="0" anchor="ctr"/>
+          <a:lstStyle/>
+          <a:p>
+            <a:pPr algn="ctr"/>
+          </a:p>
+        </p:txBody>
+      </p:sp>
+      <p:sp>
+        <p:nvSpPr>
+          <p:cNvPr id="14" name="TextBox 13"/>
+          <p:cNvSpPr txBox="1"/>
+          <p:nvPr/>
+        </p:nvSpPr>
+        <p:spPr>
+          <a:xfrm>
+            <a:off x="9235440" y="2267712"/>
+            <a:ext cx="2240280" cy="685800"/>
+          </a:xfrm>
+          <a:prstGeom prst="rect">
+            <a:avLst/>
+          </a:prstGeom>
+          <a:noFill/>
+        </p:spPr>
+        <p:txBody>
+          <a:bodyPr wrap="square" anchor="t" lIns="0" rIns="0" tIns="0" bIns="0">
+            <a:spAutoFit/>
+          </a:bodyPr>
+          <a:lstStyle/>
+          <a:p>
+            <a:pPr algn="ctr"/>
+            <a:r>
+              <a:rPr sz="3000" b="1" i="0">
+                <a:solidFill>
+                  <a:srgbClr val="EB6834"/>
+                </a:solidFill>
+                <a:latin typeface="Cambria"/>
+              </a:rPr>
+              <a:t>3,611 / 450 / 450</a:t>
+            </a:r>
+          </a:p>
+        </p:txBody>
+      </p:sp>
+      <p:sp>
+        <p:nvSpPr>
+          <p:cNvPr id="15" name="TextBox 14"/>
+          <p:cNvSpPr txBox="1"/>
+          <p:nvPr/>
+        </p:nvSpPr>
+        <p:spPr>
+          <a:xfrm>
+            <a:off x="9235440" y="3364992"/>
+            <a:ext cx="2240280" cy="457200"/>
+          </a:xfrm>
+          <a:prstGeom prst="rect">
+            <a:avLst/>
+          </a:prstGeom>
+          <a:noFill/>
+        </p:spPr>
+        <p:txBody>
+          <a:bodyPr wrap="square" anchor="t" lIns="0" rIns="0" tIns="0" bIns="0">
+            <a:spAutoFit/>
+          </a:bodyPr>
+          <a:lstStyle/>
+          <a:p>
+            <a:pPr algn="ctr"/>
+            <a:r>
+              <a:rPr sz="1150" b="0" i="0">
+                <a:solidFill>
+                  <a:srgbClr val="5B6B7A"/>
+                </a:solidFill>
+                <a:latin typeface="Calibri"/>
+              </a:rPr>
+              <a:t>train / val / test</a:t>
+            </a:r>
+          </a:p>
+        </p:txBody>
+      </p:sp>
+      <p:sp>
+        <p:nvSpPr>
+          <p:cNvPr id="16" name="TextBox 15"/>
+          <p:cNvSpPr txBox="1"/>
+          <p:nvPr/>
+        </p:nvSpPr>
+        <p:spPr>
+          <a:xfrm>
+            <a:off x="731520" y="4389120"/>
+            <a:ext cx="10515600" cy="1371600"/>
+          </a:xfrm>
+          <a:prstGeom prst="rect">
+            <a:avLst/>
+          </a:prstGeom>
+          <a:noFill/>
+        </p:spPr>
+        <p:txBody>
+          <a:bodyPr wrap="square" lIns="0" rIns="0">
+            <a:spAutoFit/>
+          </a:bodyPr>
+          <a:lstStyle/>
+          <a:p>
+            <a:pPr algn="l">
+              <a:lnSpc>
+                <a:spcPct val="108000"/>
+              </a:lnSpc>
+              <a:spcAft>
+                <a:spcPts val="1000"/>
+              </a:spcAft>
+            </a:pPr>
+            <a:r>
+              <a:rPr sz="1450">
+                <a:solidFill>
+                  <a:srgbClr val="16213E"/>
+                </a:solidFill>
+                <a:latin typeface="Calibri"/>
+              </a:rPr>
+              <a:t>•  Evaluation: accuracy, precision/recall/F1 (macro + weighted), confusion matrix</a:t>
+            </a:r>
+          </a:p>
+          <a:p>
+            <a:pPr algn="l">
+              <a:lnSpc>
+                <a:spcPct val="108000"/>
+              </a:lnSpc>
+              <a:spcAft>
+                <a:spcPts val="1000"/>
+              </a:spcAft>
+            </a:pPr>
+            <a:r>
+              <a:rPr sz="1450">
+                <a:solidFill>
+                  <a:srgbClr val="16213E"/>
+                </a:solidFill>
+                <a:latin typeface="Calibri"/>
+              </a:rPr>
+              <a:t>•  All numbers read directly from results/*.json, generated by actually-executed scripts under src/</a:t>
+            </a:r>
+          </a:p>
+        </p:txBody>
+      </p:sp>
+      <p:sp>
+        <p:nvSpPr>
+          <p:cNvPr id="17" name="TextBox 16"/>
           <p:cNvSpPr txBox="1"/>
           <p:nvPr/>
         </p:nvSpPr>
@@ -5832,7 +6414,7 @@
       </p:sp>
       <p:sp>
         <p:nvSpPr>
-          <p:cNvPr id="8" name="TextBox 7"/>
+          <p:cNvPr id="18" name="TextBox 17"/>
           <p:cNvSpPr txBox="1"/>
           <p:nvPr/>
         </p:nvSpPr>
@@ -5956,7 +6538,7 @@
                 </a:solidFill>
                 <a:latin typeface="Cambria"/>
               </a:rPr>
-              <a:t>Modality Conflict Analysis</a:t>
+              <a:t>Results</a:t>
             </a:r>
           </a:p>
         </p:txBody>
@@ -5969,8 +6551,8 @@
         </p:nvSpPr>
         <p:spPr>
           <a:xfrm>
-            <a:off x="854456" y="1686560"/>
-            <a:ext cx="6246368" cy="4490720"/>
+            <a:off x="2244344" y="1640840"/>
+            <a:ext cx="7672832" cy="4307840"/>
           </a:xfrm>
           <a:prstGeom prst="rect">
             <a:avLst/>
@@ -6009,7 +6591,7 @@
       </p:sp>
       <p:pic>
         <p:nvPicPr>
-          <p:cNvPr id="5" name="Picture 4" descr="modality_conflict.png"/>
+          <p:cNvPr id="5" name="Picture 4" descr="model_comparison.png"/>
           <p:cNvPicPr>
             <a:picLocks noChangeAspect="1"/>
           </p:cNvPicPr>
@@ -6023,8 +6605,8 @@
         </p:blipFill>
         <p:spPr>
           <a:xfrm>
-            <a:off x="905256" y="1737360"/>
-            <a:ext cx="6144768" cy="4389120"/>
+            <a:off x="2295144" y="1691640"/>
+            <a:ext cx="7571232" cy="4206240"/>
           </a:xfrm>
           <a:prstGeom prst="rect">
             <a:avLst/>
@@ -6039,93 +6621,29 @@
         </p:nvSpPr>
         <p:spPr>
           <a:xfrm>
-            <a:off x="7589520" y="1920240"/>
-            <a:ext cx="3931920" cy="4114800"/>
-          </a:xfrm>
-          <a:prstGeom prst="rect">
-            <a:avLst/>
-          </a:prstGeom>
-          <a:noFill/>
-        </p:spPr>
-        <p:txBody>
-          <a:bodyPr wrap="square" lIns="0" rIns="0">
-            <a:spAutoFit/>
-          </a:bodyPr>
-          <a:lstStyle/>
-          <a:p>
-            <a:pPr algn="l">
-              <a:lnSpc>
-                <a:spcPct val="108000"/>
-              </a:lnSpc>
-              <a:spcAft>
-                <a:spcPts val="1400"/>
-              </a:spcAft>
-            </a:pPr>
-            <a:r>
-              <a:rPr sz="1350">
-                <a:solidFill>
-                  <a:srgbClr val="16213E"/>
-                </a:solidFill>
-                <a:latin typeface="Calibri"/>
-              </a:rPr>
-              <a:t>•  Text and image models disagree on 53.3% of test posts</a:t>
-            </a:r>
-          </a:p>
-          <a:p>
-            <a:pPr algn="l">
-              <a:lnSpc>
-                <a:spcPct val="108000"/>
-              </a:lnSpc>
-              <a:spcAft>
-                <a:spcPts val="1400"/>
-              </a:spcAft>
-            </a:pPr>
-            <a:r>
-              <a:rPr sz="1350">
-                <a:solidFill>
-                  <a:srgbClr val="16213E"/>
-                </a:solidFill>
-                <a:latin typeface="Calibri"/>
-              </a:rPr>
-              <a:t>•  On disagreement cases, fusion clearly wins: 57.1% vs. 50.0% (text) vs. 33.3% (image)</a:t>
-            </a:r>
-          </a:p>
-          <a:p>
-            <a:pPr algn="l">
-              <a:lnSpc>
-                <a:spcPct val="108000"/>
-              </a:lnSpc>
-              <a:spcAft>
-                <a:spcPts val="1400"/>
-              </a:spcAft>
-            </a:pPr>
-            <a:r>
-              <a:rPr sz="1350">
-                <a:solidFill>
-                  <a:srgbClr val="16213E"/>
-                </a:solidFill>
-                <a:latin typeface="Calibri"/>
-              </a:rPr>
-              <a:t>•  On agreement cases, a small regression: fusion 72.9% vs. text 74.8%</a:t>
-            </a:r>
-          </a:p>
-          <a:p>
-            <a:pPr algn="l">
-              <a:lnSpc>
-                <a:spcPct val="108000"/>
-              </a:lnSpc>
-              <a:spcAft>
-                <a:spcPts val="1400"/>
-              </a:spcAft>
-            </a:pPr>
-            <a:r>
-              <a:rPr sz="1350">
-                <a:solidFill>
-                  <a:srgbClr val="16213E"/>
-                </a:solidFill>
-                <a:latin typeface="Calibri"/>
-              </a:rPr>
-              <a:t>•  An honest finding — not a blanket “multimodal always wins”</a:t>
+            <a:off x="731520" y="6080760"/>
+            <a:ext cx="10698480" cy="457200"/>
+          </a:xfrm>
+          <a:prstGeom prst="rect">
+            <a:avLst/>
+          </a:prstGeom>
+          <a:noFill/>
+        </p:spPr>
+        <p:txBody>
+          <a:bodyPr wrap="square" anchor="t" lIns="0" rIns="0" tIns="0" bIns="0">
+            <a:spAutoFit/>
+          </a:bodyPr>
+          <a:lstStyle/>
+          <a:p>
+            <a:pPr algn="ctr"/>
+            <a:r>
+              <a:rPr sz="1400" b="1" i="0">
+                <a:solidFill>
+                  <a:srgbClr val="1E2761"/>
+                </a:solidFill>
+                <a:latin typeface="Calibri"/>
+              </a:rPr>
+              <a:t>Multimodal fusion beats every unimodal model on every metric: 64.4% accuracy / 56.3% macro-F1.</a:t>
             </a:r>
           </a:p>
         </p:txBody>
@@ -6256,7 +6774,7 @@
                 </a:solidFill>
                 <a:latin typeface="Calibri"/>
               </a:rPr>
-              <a:t>IMPLEMENTATION</a:t>
+              <a:t>RESULTS &amp; VALIDATION</a:t>
             </a:r>
           </a:p>
         </p:txBody>
@@ -6291,30 +6809,32 @@
                 </a:solidFill>
                 <a:latin typeface="Cambria"/>
               </a:rPr>
-              <a:t>Explainability</a:t>
-            </a:r>
-          </a:p>
-        </p:txBody>
-      </p:sp>
-      <p:sp>
-        <p:nvSpPr>
-          <p:cNvPr id="4" name="Oval 3"/>
+              <a:t>Modality Conflict Analysis</a:t>
+            </a:r>
+          </a:p>
+        </p:txBody>
+      </p:sp>
+      <p:sp>
+        <p:nvSpPr>
+          <p:cNvPr id="4" name="Rectangle 3"/>
           <p:cNvSpPr/>
           <p:nvPr/>
         </p:nvSpPr>
         <p:spPr>
           <a:xfrm>
-            <a:off x="731520" y="1828800"/>
-            <a:ext cx="502920" cy="502920"/>
-          </a:xfrm>
-          <a:prstGeom prst="ellipse">
+            <a:off x="854456" y="1686560"/>
+            <a:ext cx="6246368" cy="4490720"/>
+          </a:xfrm>
+          <a:prstGeom prst="rect">
             <a:avLst/>
           </a:prstGeom>
           <a:solidFill>
-            <a:srgbClr val="EB6834"/>
+            <a:srgbClr val="FFFFFF"/>
           </a:solidFill>
-          <a:ln>
-            <a:noFill/>
+          <a:ln w="12700">
+            <a:solidFill>
+              <a:srgbClr val="DDE3EC"/>
+            </a:solidFill>
           </a:ln>
           <a:effectLst/>
         </p:spPr>
@@ -6333,57 +6853,37 @@
           </a:fontRef>
         </p:style>
         <p:txBody>
-          <a:bodyPr rtlCol="0" anchor="ctr" lIns="0" rIns="0" tIns="0" bIns="0"/>
+          <a:bodyPr rtlCol="0" anchor="ctr"/>
           <a:lstStyle/>
           <a:p>
             <a:pPr algn="ctr"/>
-            <a:r>
-              <a:rPr sz="1800" b="1">
-                <a:solidFill>
-                  <a:srgbClr val="FFFFFF"/>
-                </a:solidFill>
-                <a:latin typeface="Cambria"/>
-              </a:rPr>
-              <a:t>1</a:t>
-            </a:r>
-          </a:p>
-        </p:txBody>
-      </p:sp>
-      <p:sp>
-        <p:nvSpPr>
-          <p:cNvPr id="5" name="TextBox 4"/>
-          <p:cNvSpPr txBox="1"/>
-          <p:nvPr/>
-        </p:nvSpPr>
-        <p:spPr>
-          <a:xfrm>
-            <a:off x="1444752" y="1810512"/>
-            <a:ext cx="9784080" cy="365760"/>
-          </a:xfrm>
-          <a:prstGeom prst="rect">
-            <a:avLst/>
-          </a:prstGeom>
-          <a:noFill/>
-        </p:spPr>
-        <p:txBody>
-          <a:bodyPr wrap="square" anchor="t" lIns="0" rIns="0" tIns="0" bIns="0">
-            <a:spAutoFit/>
-          </a:bodyPr>
-          <a:lstStyle/>
-          <a:p>
-            <a:pPr algn="l"/>
-            <a:r>
-              <a:rPr sz="1600" b="1" i="0">
-                <a:solidFill>
-                  <a:srgbClr val="1E2761"/>
-                </a:solidFill>
-                <a:latin typeface="Calibri"/>
-              </a:rPr>
-              <a:t>Text</a:t>
-            </a:r>
-          </a:p>
-        </p:txBody>
-      </p:sp>
+          </a:p>
+        </p:txBody>
+      </p:sp>
+      <p:pic>
+        <p:nvPicPr>
+          <p:cNvPr id="5" name="Picture 4" descr="modality_conflict.png"/>
+          <p:cNvPicPr>
+            <a:picLocks noChangeAspect="1"/>
+          </p:cNvPicPr>
+          <p:nvPr/>
+        </p:nvPicPr>
+        <p:blipFill>
+          <a:blip r:embed="rId2"/>
+          <a:stretch>
+            <a:fillRect/>
+          </a:stretch>
+        </p:blipFill>
+        <p:spPr>
+          <a:xfrm>
+            <a:off x="905256" y="1737360"/>
+            <a:ext cx="6144768" cy="4389120"/>
+          </a:xfrm>
+          <a:prstGeom prst="rect">
+            <a:avLst/>
+          </a:prstGeom>
+        </p:spPr>
+      </p:pic>
       <p:sp>
         <p:nvSpPr>
           <p:cNvPr id="6" name="TextBox 5"/>
@@ -6392,329 +6892,100 @@
         </p:nvSpPr>
         <p:spPr>
           <a:xfrm>
-            <a:off x="1444752" y="2157984"/>
-            <a:ext cx="9784080" cy="731520"/>
-          </a:xfrm>
-          <a:prstGeom prst="rect">
-            <a:avLst/>
-          </a:prstGeom>
-          <a:noFill/>
-        </p:spPr>
-        <p:txBody>
-          <a:bodyPr wrap="square" anchor="t" lIns="0" rIns="0" tIns="0" bIns="0">
+            <a:off x="7589520" y="1920240"/>
+            <a:ext cx="3931920" cy="4114800"/>
+          </a:xfrm>
+          <a:prstGeom prst="rect">
+            <a:avLst/>
+          </a:prstGeom>
+          <a:noFill/>
+        </p:spPr>
+        <p:txBody>
+          <a:bodyPr wrap="square" lIns="0" rIns="0">
             <a:spAutoFit/>
           </a:bodyPr>
           <a:lstStyle/>
           <a:p>
             <a:pPr algn="l">
               <a:lnSpc>
-                <a:spcPct val="110000"/>
+                <a:spcPct val="108000"/>
               </a:lnSpc>
+              <a:spcAft>
+                <a:spcPts val="1400"/>
+              </a:spcAft>
             </a:pPr>
             <a:r>
-              <a:rPr sz="1250" b="0" i="0">
-                <a:solidFill>
-                  <a:srgbClr val="5B6B7A"/>
-                </a:solidFill>
-                <a:latin typeface="Calibri"/>
-              </a:rPr>
-              <a:t>Gradient x input token saliency — no extra library required</a:t>
-            </a:r>
-          </a:p>
-        </p:txBody>
-      </p:sp>
-      <p:sp>
-        <p:nvSpPr>
-          <p:cNvPr id="7" name="Oval 6"/>
-          <p:cNvSpPr/>
-          <p:nvPr/>
-        </p:nvSpPr>
-        <p:spPr>
-          <a:xfrm>
-            <a:off x="731520" y="3017520"/>
-            <a:ext cx="502920" cy="502920"/>
-          </a:xfrm>
-          <a:prstGeom prst="ellipse">
-            <a:avLst/>
-          </a:prstGeom>
-          <a:solidFill>
-            <a:srgbClr val="EB6834"/>
-          </a:solidFill>
-          <a:ln>
-            <a:noFill/>
-          </a:ln>
-          <a:effectLst/>
-        </p:spPr>
-        <p:style>
-          <a:lnRef idx="1">
-            <a:schemeClr val="accent1"/>
-          </a:lnRef>
-          <a:fillRef idx="3">
-            <a:schemeClr val="accent1"/>
-          </a:fillRef>
-          <a:effectRef idx="2">
-            <a:schemeClr val="accent1"/>
-          </a:effectRef>
-          <a:fontRef idx="minor">
-            <a:schemeClr val="lt1"/>
-          </a:fontRef>
-        </p:style>
-        <p:txBody>
-          <a:bodyPr rtlCol="0" anchor="ctr" lIns="0" rIns="0" tIns="0" bIns="0"/>
-          <a:lstStyle/>
-          <a:p>
-            <a:pPr algn="ctr"/>
-            <a:r>
-              <a:rPr sz="1800" b="1">
-                <a:solidFill>
-                  <a:srgbClr val="FFFFFF"/>
-                </a:solidFill>
-                <a:latin typeface="Cambria"/>
-              </a:rPr>
-              <a:t>2</a:t>
-            </a:r>
-          </a:p>
-        </p:txBody>
-      </p:sp>
-      <p:sp>
-        <p:nvSpPr>
-          <p:cNvPr id="8" name="TextBox 7"/>
-          <p:cNvSpPr txBox="1"/>
-          <p:nvPr/>
-        </p:nvSpPr>
-        <p:spPr>
-          <a:xfrm>
-            <a:off x="1444752" y="2999232"/>
-            <a:ext cx="9784080" cy="365760"/>
-          </a:xfrm>
-          <a:prstGeom prst="rect">
-            <a:avLst/>
-          </a:prstGeom>
-          <a:noFill/>
-        </p:spPr>
-        <p:txBody>
-          <a:bodyPr wrap="square" anchor="t" lIns="0" rIns="0" tIns="0" bIns="0">
-            <a:spAutoFit/>
-          </a:bodyPr>
-          <a:lstStyle/>
-          <a:p>
-            <a:pPr algn="l"/>
-            <a:r>
-              <a:rPr sz="1600" b="1" i="0">
-                <a:solidFill>
-                  <a:srgbClr val="1E2761"/>
-                </a:solidFill>
-                <a:latin typeface="Calibri"/>
-              </a:rPr>
-              <a:t>Image</a:t>
-            </a:r>
-          </a:p>
-        </p:txBody>
-      </p:sp>
-      <p:sp>
-        <p:nvSpPr>
-          <p:cNvPr id="9" name="TextBox 8"/>
-          <p:cNvSpPr txBox="1"/>
-          <p:nvPr/>
-        </p:nvSpPr>
-        <p:spPr>
-          <a:xfrm>
-            <a:off x="1444752" y="3346704"/>
-            <a:ext cx="9784080" cy="731520"/>
-          </a:xfrm>
-          <a:prstGeom prst="rect">
-            <a:avLst/>
-          </a:prstGeom>
-          <a:noFill/>
-        </p:spPr>
-        <p:txBody>
-          <a:bodyPr wrap="square" anchor="t" lIns="0" rIns="0" tIns="0" bIns="0">
-            <a:spAutoFit/>
-          </a:bodyPr>
-          <a:lstStyle/>
+              <a:rPr sz="1350">
+                <a:solidFill>
+                  <a:srgbClr val="16213E"/>
+                </a:solidFill>
+                <a:latin typeface="Calibri"/>
+              </a:rPr>
+              <a:t>•  Text and image models disagree on 53.3% of test posts</a:t>
+            </a:r>
+          </a:p>
           <a:p>
             <a:pPr algn="l">
               <a:lnSpc>
-                <a:spcPct val="110000"/>
+                <a:spcPct val="108000"/>
               </a:lnSpc>
+              <a:spcAft>
+                <a:spcPts val="1400"/>
+              </a:spcAft>
             </a:pPr>
             <a:r>
-              <a:rPr sz="1250" b="0" i="0">
-                <a:solidFill>
-                  <a:srgbClr val="5B6B7A"/>
-                </a:solidFill>
-                <a:latin typeface="Calibri"/>
-              </a:rPr>
-              <a:t>Grad-CAM via forward/backward hooks on ResNet18's last conv block</a:t>
-            </a:r>
-          </a:p>
-        </p:txBody>
-      </p:sp>
-      <p:sp>
-        <p:nvSpPr>
-          <p:cNvPr id="10" name="Oval 9"/>
-          <p:cNvSpPr/>
-          <p:nvPr/>
-        </p:nvSpPr>
-        <p:spPr>
-          <a:xfrm>
-            <a:off x="731520" y="4206240"/>
-            <a:ext cx="502920" cy="502920"/>
-          </a:xfrm>
-          <a:prstGeom prst="ellipse">
-            <a:avLst/>
-          </a:prstGeom>
-          <a:solidFill>
-            <a:srgbClr val="EB6834"/>
-          </a:solidFill>
-          <a:ln>
-            <a:noFill/>
-          </a:ln>
-          <a:effectLst/>
-        </p:spPr>
-        <p:style>
-          <a:lnRef idx="1">
-            <a:schemeClr val="accent1"/>
-          </a:lnRef>
-          <a:fillRef idx="3">
-            <a:schemeClr val="accent1"/>
-          </a:fillRef>
-          <a:effectRef idx="2">
-            <a:schemeClr val="accent1"/>
-          </a:effectRef>
-          <a:fontRef idx="minor">
-            <a:schemeClr val="lt1"/>
-          </a:fontRef>
-        </p:style>
-        <p:txBody>
-          <a:bodyPr rtlCol="0" anchor="ctr" lIns="0" rIns="0" tIns="0" bIns="0"/>
-          <a:lstStyle/>
-          <a:p>
-            <a:pPr algn="ctr"/>
-            <a:r>
-              <a:rPr sz="1800" b="1">
-                <a:solidFill>
-                  <a:srgbClr val="FFFFFF"/>
-                </a:solidFill>
-                <a:latin typeface="Cambria"/>
-              </a:rPr>
-              <a:t>3</a:t>
-            </a:r>
-          </a:p>
-        </p:txBody>
-      </p:sp>
-      <p:sp>
-        <p:nvSpPr>
-          <p:cNvPr id="11" name="TextBox 10"/>
-          <p:cNvSpPr txBox="1"/>
-          <p:nvPr/>
-        </p:nvSpPr>
-        <p:spPr>
-          <a:xfrm>
-            <a:off x="1444752" y="4187952"/>
-            <a:ext cx="9784080" cy="365760"/>
-          </a:xfrm>
-          <a:prstGeom prst="rect">
-            <a:avLst/>
-          </a:prstGeom>
-          <a:noFill/>
-        </p:spPr>
-        <p:txBody>
-          <a:bodyPr wrap="square" anchor="t" lIns="0" rIns="0" tIns="0" bIns="0">
-            <a:spAutoFit/>
-          </a:bodyPr>
-          <a:lstStyle/>
-          <a:p>
-            <a:pPr algn="l"/>
-            <a:r>
-              <a:rPr sz="1600" b="1" i="0">
-                <a:solidFill>
-                  <a:srgbClr val="1E2761"/>
-                </a:solidFill>
-                <a:latin typeface="Calibri"/>
-              </a:rPr>
-              <a:t>Multimodal</a:t>
-            </a:r>
-          </a:p>
-        </p:txBody>
-      </p:sp>
-      <p:sp>
-        <p:nvSpPr>
-          <p:cNvPr id="12" name="TextBox 11"/>
-          <p:cNvSpPr txBox="1"/>
-          <p:nvPr/>
-        </p:nvSpPr>
-        <p:spPr>
-          <a:xfrm>
-            <a:off x="1444752" y="4535424"/>
-            <a:ext cx="9784080" cy="731520"/>
-          </a:xfrm>
-          <a:prstGeom prst="rect">
-            <a:avLst/>
-          </a:prstGeom>
-          <a:noFill/>
-        </p:spPr>
-        <p:txBody>
-          <a:bodyPr wrap="square" anchor="t" lIns="0" rIns="0" tIns="0" bIns="0">
-            <a:spAutoFit/>
-          </a:bodyPr>
-          <a:lstStyle/>
+              <a:rPr sz="1350">
+                <a:solidFill>
+                  <a:srgbClr val="16213E"/>
+                </a:solidFill>
+                <a:latin typeface="Calibri"/>
+              </a:rPr>
+              <a:t>•  On disagreement cases, fusion clearly wins: 57.1% vs. 50.0% (text) vs. 33.3% (image)</a:t>
+            </a:r>
+          </a:p>
           <a:p>
             <a:pPr algn="l">
               <a:lnSpc>
-                <a:spcPct val="110000"/>
+                <a:spcPct val="108000"/>
               </a:lnSpc>
+              <a:spcAft>
+                <a:spcPts val="1400"/>
+              </a:spcAft>
             </a:pPr>
             <a:r>
-              <a:rPr sz="1250" b="0" i="0">
-                <a:solidFill>
-                  <a:srgbClr val="5B6B7A"/>
-                </a:solidFill>
-                <a:latin typeface="Calibri"/>
-              </a:rPr>
-              <a:t>Modality-ablation: zero one branch, observe the prediction shift</a:t>
-            </a:r>
-          </a:p>
-        </p:txBody>
-      </p:sp>
-      <p:sp>
-        <p:nvSpPr>
-          <p:cNvPr id="13" name="TextBox 12"/>
-          <p:cNvSpPr txBox="1"/>
-          <p:nvPr/>
-        </p:nvSpPr>
-        <p:spPr>
-          <a:xfrm>
-            <a:off x="731520" y="5577840"/>
-            <a:ext cx="10515600" cy="457200"/>
-          </a:xfrm>
-          <a:prstGeom prst="rect">
-            <a:avLst/>
-          </a:prstGeom>
-          <a:noFill/>
-        </p:spPr>
-        <p:txBody>
-          <a:bodyPr wrap="square" anchor="t" lIns="0" rIns="0" tIns="0" bIns="0">
-            <a:spAutoFit/>
-          </a:bodyPr>
-          <a:lstStyle/>
-          <a:p>
-            <a:pPr algn="l"/>
-            <a:r>
-              <a:rPr sz="1300" b="0" i="1">
-                <a:solidFill>
-                  <a:srgbClr val="5B6B7A"/>
-                </a:solidFill>
-                <a:latin typeface="Calibri"/>
-              </a:rPr>
-              <a:t>Exploratory — not a rigorously validated attribution method (documented limitation).</a:t>
-            </a:r>
-          </a:p>
-        </p:txBody>
-      </p:sp>
-      <p:sp>
-        <p:nvSpPr>
-          <p:cNvPr id="14" name="TextBox 13"/>
+              <a:rPr sz="1350">
+                <a:solidFill>
+                  <a:srgbClr val="16213E"/>
+                </a:solidFill>
+                <a:latin typeface="Calibri"/>
+              </a:rPr>
+              <a:t>•  On agreement cases, a small regression: fusion 72.9% vs. text 74.8%</a:t>
+            </a:r>
+          </a:p>
+          <a:p>
+            <a:pPr algn="l">
+              <a:lnSpc>
+                <a:spcPct val="108000"/>
+              </a:lnSpc>
+              <a:spcAft>
+                <a:spcPts val="1400"/>
+              </a:spcAft>
+            </a:pPr>
+            <a:r>
+              <a:rPr sz="1350">
+                <a:solidFill>
+                  <a:srgbClr val="16213E"/>
+                </a:solidFill>
+                <a:latin typeface="Calibri"/>
+              </a:rPr>
+              <a:t>•  An honest finding — not a blanket “multimodal always wins”</a:t>
+            </a:r>
+          </a:p>
+        </p:txBody>
+      </p:sp>
+      <p:sp>
+        <p:nvSpPr>
+          <p:cNvPr id="7" name="TextBox 6"/>
           <p:cNvSpPr txBox="1"/>
           <p:nvPr/>
         </p:nvSpPr>
@@ -6749,7 +7020,7 @@
       </p:sp>
       <p:sp>
         <p:nvSpPr>
-          <p:cNvPr id="15" name="TextBox 14"/>
+          <p:cNvPr id="8" name="TextBox 7"/>
           <p:cNvSpPr txBox="1"/>
           <p:nvPr/>
         </p:nvSpPr>
@@ -6838,7 +7109,7 @@
                 </a:solidFill>
                 <a:latin typeface="Calibri"/>
               </a:rPr>
-              <a:t>IMPLEMENTATION — LIVE DEMO</a:t>
+              <a:t>IMPLEMENTATION</a:t>
             </a:r>
           </a:p>
         </p:txBody>
@@ -6873,32 +7144,30 @@
                 </a:solidFill>
                 <a:latin typeface="Cambria"/>
               </a:rPr>
-              <a:t>Application &amp; Dashboard</a:t>
-            </a:r>
-          </a:p>
-        </p:txBody>
-      </p:sp>
-      <p:sp>
-        <p:nvSpPr>
-          <p:cNvPr id="4" name="Rectangle 3"/>
+              <a:t>Explainability</a:t>
+            </a:r>
+          </a:p>
+        </p:txBody>
+      </p:sp>
+      <p:sp>
+        <p:nvSpPr>
+          <p:cNvPr id="4" name="Oval 3"/>
           <p:cNvSpPr/>
           <p:nvPr/>
         </p:nvSpPr>
         <p:spPr>
           <a:xfrm>
-            <a:off x="1137920" y="1549400"/>
-            <a:ext cx="4216400" cy="4673600"/>
-          </a:xfrm>
-          <a:prstGeom prst="rect">
+            <a:off x="731520" y="1828800"/>
+            <a:ext cx="502920" cy="502920"/>
+          </a:xfrm>
+          <a:prstGeom prst="ellipse">
             <a:avLst/>
           </a:prstGeom>
           <a:solidFill>
-            <a:srgbClr val="FFFFFF"/>
+            <a:srgbClr val="EB6834"/>
           </a:solidFill>
-          <a:ln w="12700">
-            <a:solidFill>
-              <a:srgbClr val="DDE3EC"/>
-            </a:solidFill>
+          <a:ln>
+            <a:noFill/>
           </a:ln>
           <a:effectLst/>
         </p:spPr>
@@ -6917,58 +7186,115 @@
           </a:fontRef>
         </p:style>
         <p:txBody>
-          <a:bodyPr rtlCol="0" anchor="ctr"/>
+          <a:bodyPr rtlCol="0" anchor="ctr" lIns="0" rIns="0" tIns="0" bIns="0"/>
           <a:lstStyle/>
           <a:p>
             <a:pPr algn="ctr"/>
-          </a:p>
-        </p:txBody>
-      </p:sp>
-      <p:pic>
-        <p:nvPicPr>
-          <p:cNvPr id="5" name="Picture 4" descr="02_predict_result.png"/>
-          <p:cNvPicPr>
-            <a:picLocks noChangeAspect="1"/>
-          </p:cNvPicPr>
-          <p:nvPr/>
-        </p:nvPicPr>
-        <p:blipFill>
-          <a:blip r:embed="rId2"/>
-          <a:stretch>
-            <a:fillRect/>
-          </a:stretch>
-        </p:blipFill>
-        <p:spPr>
-          <a:xfrm>
-            <a:off x="1188720" y="1600200"/>
-            <a:ext cx="4114800" cy="4572000"/>
-          </a:xfrm>
-          <a:prstGeom prst="rect">
-            <a:avLst/>
-          </a:prstGeom>
-        </p:spPr>
-      </p:pic>
-      <p:sp>
-        <p:nvSpPr>
-          <p:cNvPr id="6" name="Rectangle 5"/>
+            <a:r>
+              <a:rPr sz="1800" b="1">
+                <a:solidFill>
+                  <a:srgbClr val="FFFFFF"/>
+                </a:solidFill>
+                <a:latin typeface="Cambria"/>
+              </a:rPr>
+              <a:t>1</a:t>
+            </a:r>
+          </a:p>
+        </p:txBody>
+      </p:sp>
+      <p:sp>
+        <p:nvSpPr>
+          <p:cNvPr id="5" name="TextBox 4"/>
+          <p:cNvSpPr txBox="1"/>
+          <p:nvPr/>
+        </p:nvSpPr>
+        <p:spPr>
+          <a:xfrm>
+            <a:off x="1444752" y="1810512"/>
+            <a:ext cx="9784080" cy="365760"/>
+          </a:xfrm>
+          <a:prstGeom prst="rect">
+            <a:avLst/>
+          </a:prstGeom>
+          <a:noFill/>
+        </p:spPr>
+        <p:txBody>
+          <a:bodyPr wrap="square" anchor="t" lIns="0" rIns="0" tIns="0" bIns="0">
+            <a:spAutoFit/>
+          </a:bodyPr>
+          <a:lstStyle/>
+          <a:p>
+            <a:pPr algn="l"/>
+            <a:r>
+              <a:rPr sz="1600" b="1" i="0">
+                <a:solidFill>
+                  <a:srgbClr val="1E2761"/>
+                </a:solidFill>
+                <a:latin typeface="Calibri"/>
+              </a:rPr>
+              <a:t>Text</a:t>
+            </a:r>
+          </a:p>
+        </p:txBody>
+      </p:sp>
+      <p:sp>
+        <p:nvSpPr>
+          <p:cNvPr id="6" name="TextBox 5"/>
+          <p:cNvSpPr txBox="1"/>
+          <p:nvPr/>
+        </p:nvSpPr>
+        <p:spPr>
+          <a:xfrm>
+            <a:off x="1444752" y="2157984"/>
+            <a:ext cx="9784080" cy="731520"/>
+          </a:xfrm>
+          <a:prstGeom prst="rect">
+            <a:avLst/>
+          </a:prstGeom>
+          <a:noFill/>
+        </p:spPr>
+        <p:txBody>
+          <a:bodyPr wrap="square" anchor="t" lIns="0" rIns="0" tIns="0" bIns="0">
+            <a:spAutoFit/>
+          </a:bodyPr>
+          <a:lstStyle/>
+          <a:p>
+            <a:pPr algn="l">
+              <a:lnSpc>
+                <a:spcPct val="110000"/>
+              </a:lnSpc>
+            </a:pPr>
+            <a:r>
+              <a:rPr sz="1250" b="0" i="0">
+                <a:solidFill>
+                  <a:srgbClr val="5B6B7A"/>
+                </a:solidFill>
+                <a:latin typeface="Calibri"/>
+              </a:rPr>
+              <a:t>Gradient x input token saliency — no extra library required</a:t>
+            </a:r>
+          </a:p>
+        </p:txBody>
+      </p:sp>
+      <p:sp>
+        <p:nvSpPr>
+          <p:cNvPr id="7" name="Oval 6"/>
           <p:cNvSpPr/>
           <p:nvPr/>
         </p:nvSpPr>
         <p:spPr>
           <a:xfrm>
-            <a:off x="6852920" y="1549400"/>
-            <a:ext cx="4216400" cy="4673600"/>
-          </a:xfrm>
-          <a:prstGeom prst="rect">
+            <a:off x="731520" y="3017520"/>
+            <a:ext cx="502920" cy="502920"/>
+          </a:xfrm>
+          <a:prstGeom prst="ellipse">
             <a:avLst/>
           </a:prstGeom>
           <a:solidFill>
-            <a:srgbClr val="FFFFFF"/>
+            <a:srgbClr val="EB6834"/>
           </a:solidFill>
-          <a:ln w="12700">
-            <a:solidFill>
-              <a:srgbClr val="DDE3EC"/>
-            </a:solidFill>
+          <a:ln>
+            <a:noFill/>
           </a:ln>
           <a:effectLst/>
         </p:spPr>
@@ -6987,37 +7313,22 @@
           </a:fontRef>
         </p:style>
         <p:txBody>
-          <a:bodyPr rtlCol="0" anchor="ctr"/>
+          <a:bodyPr rtlCol="0" anchor="ctr" lIns="0" rIns="0" tIns="0" bIns="0"/>
           <a:lstStyle/>
           <a:p>
             <a:pPr algn="ctr"/>
-          </a:p>
-        </p:txBody>
-      </p:sp>
-      <p:pic>
-        <p:nvPicPr>
-          <p:cNvPr id="7" name="Picture 6" descr="03_dashboard.png"/>
-          <p:cNvPicPr>
-            <a:picLocks noChangeAspect="1"/>
-          </p:cNvPicPr>
-          <p:nvPr/>
-        </p:nvPicPr>
-        <p:blipFill>
-          <a:blip r:embed="rId3"/>
-          <a:stretch>
-            <a:fillRect/>
-          </a:stretch>
-        </p:blipFill>
-        <p:spPr>
-          <a:xfrm>
-            <a:off x="6903720" y="1600200"/>
-            <a:ext cx="4114800" cy="4572000"/>
-          </a:xfrm>
-          <a:prstGeom prst="rect">
-            <a:avLst/>
-          </a:prstGeom>
-        </p:spPr>
-      </p:pic>
+            <a:r>
+              <a:rPr sz="1800" b="1">
+                <a:solidFill>
+                  <a:srgbClr val="FFFFFF"/>
+                </a:solidFill>
+                <a:latin typeface="Cambria"/>
+              </a:rPr>
+              <a:t>2</a:t>
+            </a:r>
+          </a:p>
+        </p:txBody>
+      </p:sp>
       <p:sp>
         <p:nvSpPr>
           <p:cNvPr id="8" name="TextBox 7"/>
@@ -7026,71 +7337,237 @@
         </p:nvSpPr>
         <p:spPr>
           <a:xfrm>
-            <a:off x="548640" y="6263640"/>
-            <a:ext cx="5394960" cy="320040"/>
-          </a:xfrm>
-          <a:prstGeom prst="rect">
-            <a:avLst/>
-          </a:prstGeom>
-          <a:noFill/>
-        </p:spPr>
-        <p:txBody>
-          <a:bodyPr wrap="square" anchor="t" lIns="0" rIns="0" tIns="0" bIns="0">
-            <a:spAutoFit/>
-          </a:bodyPr>
+            <a:off x="1444752" y="2999232"/>
+            <a:ext cx="9784080" cy="365760"/>
+          </a:xfrm>
+          <a:prstGeom prst="rect">
+            <a:avLst/>
+          </a:prstGeom>
+          <a:noFill/>
+        </p:spPr>
+        <p:txBody>
+          <a:bodyPr wrap="square" anchor="t" lIns="0" rIns="0" tIns="0" bIns="0">
+            <a:spAutoFit/>
+          </a:bodyPr>
+          <a:lstStyle/>
+          <a:p>
+            <a:pPr algn="l"/>
+            <a:r>
+              <a:rPr sz="1600" b="1" i="0">
+                <a:solidFill>
+                  <a:srgbClr val="1E2761"/>
+                </a:solidFill>
+                <a:latin typeface="Calibri"/>
+              </a:rPr>
+              <a:t>Image</a:t>
+            </a:r>
+          </a:p>
+        </p:txBody>
+      </p:sp>
+      <p:sp>
+        <p:nvSpPr>
+          <p:cNvPr id="9" name="TextBox 8"/>
+          <p:cNvSpPr txBox="1"/>
+          <p:nvPr/>
+        </p:nvSpPr>
+        <p:spPr>
+          <a:xfrm>
+            <a:off x="1444752" y="3346704"/>
+            <a:ext cx="9784080" cy="731520"/>
+          </a:xfrm>
+          <a:prstGeom prst="rect">
+            <a:avLst/>
+          </a:prstGeom>
+          <a:noFill/>
+        </p:spPr>
+        <p:txBody>
+          <a:bodyPr wrap="square" anchor="t" lIns="0" rIns="0" tIns="0" bIns="0">
+            <a:spAutoFit/>
+          </a:bodyPr>
+          <a:lstStyle/>
+          <a:p>
+            <a:pPr algn="l">
+              <a:lnSpc>
+                <a:spcPct val="110000"/>
+              </a:lnSpc>
+            </a:pPr>
+            <a:r>
+              <a:rPr sz="1250" b="0" i="0">
+                <a:solidFill>
+                  <a:srgbClr val="5B6B7A"/>
+                </a:solidFill>
+                <a:latin typeface="Calibri"/>
+              </a:rPr>
+              <a:t>Grad-CAM via forward/backward hooks on ResNet18's last conv block</a:t>
+            </a:r>
+          </a:p>
+        </p:txBody>
+      </p:sp>
+      <p:sp>
+        <p:nvSpPr>
+          <p:cNvPr id="10" name="Oval 9"/>
+          <p:cNvSpPr/>
+          <p:nvPr/>
+        </p:nvSpPr>
+        <p:spPr>
+          <a:xfrm>
+            <a:off x="731520" y="4206240"/>
+            <a:ext cx="502920" cy="502920"/>
+          </a:xfrm>
+          <a:prstGeom prst="ellipse">
+            <a:avLst/>
+          </a:prstGeom>
+          <a:solidFill>
+            <a:srgbClr val="EB6834"/>
+          </a:solidFill>
+          <a:ln>
+            <a:noFill/>
+          </a:ln>
+          <a:effectLst/>
+        </p:spPr>
+        <p:style>
+          <a:lnRef idx="1">
+            <a:schemeClr val="accent1"/>
+          </a:lnRef>
+          <a:fillRef idx="3">
+            <a:schemeClr val="accent1"/>
+          </a:fillRef>
+          <a:effectRef idx="2">
+            <a:schemeClr val="accent1"/>
+          </a:effectRef>
+          <a:fontRef idx="minor">
+            <a:schemeClr val="lt1"/>
+          </a:fontRef>
+        </p:style>
+        <p:txBody>
+          <a:bodyPr rtlCol="0" anchor="ctr" lIns="0" rIns="0" tIns="0" bIns="0"/>
           <a:lstStyle/>
           <a:p>
             <a:pPr algn="ctr"/>
             <a:r>
-              <a:rPr sz="1150" b="0" i="1">
+              <a:rPr sz="1800" b="1">
+                <a:solidFill>
+                  <a:srgbClr val="FFFFFF"/>
+                </a:solidFill>
+                <a:latin typeface="Cambria"/>
+              </a:rPr>
+              <a:t>3</a:t>
+            </a:r>
+          </a:p>
+        </p:txBody>
+      </p:sp>
+      <p:sp>
+        <p:nvSpPr>
+          <p:cNvPr id="11" name="TextBox 10"/>
+          <p:cNvSpPr txBox="1"/>
+          <p:nvPr/>
+        </p:nvSpPr>
+        <p:spPr>
+          <a:xfrm>
+            <a:off x="1444752" y="4187952"/>
+            <a:ext cx="9784080" cy="365760"/>
+          </a:xfrm>
+          <a:prstGeom prst="rect">
+            <a:avLst/>
+          </a:prstGeom>
+          <a:noFill/>
+        </p:spPr>
+        <p:txBody>
+          <a:bodyPr wrap="square" anchor="t" lIns="0" rIns="0" tIns="0" bIns="0">
+            <a:spAutoFit/>
+          </a:bodyPr>
+          <a:lstStyle/>
+          <a:p>
+            <a:pPr algn="l"/>
+            <a:r>
+              <a:rPr sz="1600" b="1" i="0">
+                <a:solidFill>
+                  <a:srgbClr val="1E2761"/>
+                </a:solidFill>
+                <a:latin typeface="Calibri"/>
+              </a:rPr>
+              <a:t>Multimodal</a:t>
+            </a:r>
+          </a:p>
+        </p:txBody>
+      </p:sp>
+      <p:sp>
+        <p:nvSpPr>
+          <p:cNvPr id="12" name="TextBox 11"/>
+          <p:cNvSpPr txBox="1"/>
+          <p:nvPr/>
+        </p:nvSpPr>
+        <p:spPr>
+          <a:xfrm>
+            <a:off x="1444752" y="4535424"/>
+            <a:ext cx="9784080" cy="731520"/>
+          </a:xfrm>
+          <a:prstGeom prst="rect">
+            <a:avLst/>
+          </a:prstGeom>
+          <a:noFill/>
+        </p:spPr>
+        <p:txBody>
+          <a:bodyPr wrap="square" anchor="t" lIns="0" rIns="0" tIns="0" bIns="0">
+            <a:spAutoFit/>
+          </a:bodyPr>
+          <a:lstStyle/>
+          <a:p>
+            <a:pPr algn="l">
+              <a:lnSpc>
+                <a:spcPct val="110000"/>
+              </a:lnSpc>
+            </a:pPr>
+            <a:r>
+              <a:rPr sz="1250" b="0" i="0">
                 <a:solidFill>
                   <a:srgbClr val="5B6B7A"/>
                 </a:solidFill>
                 <a:latin typeface="Calibri"/>
               </a:rPr>
-              <a:t>Predict page — real text + image analyzed live</a:t>
-            </a:r>
-          </a:p>
-        </p:txBody>
-      </p:sp>
-      <p:sp>
-        <p:nvSpPr>
-          <p:cNvPr id="9" name="TextBox 8"/>
-          <p:cNvSpPr txBox="1"/>
-          <p:nvPr/>
-        </p:nvSpPr>
-        <p:spPr>
-          <a:xfrm>
-            <a:off x="6263640" y="6263640"/>
-            <a:ext cx="5394960" cy="320040"/>
-          </a:xfrm>
-          <a:prstGeom prst="rect">
-            <a:avLst/>
-          </a:prstGeom>
-          <a:noFill/>
-        </p:spPr>
-        <p:txBody>
-          <a:bodyPr wrap="square" anchor="t" lIns="0" rIns="0" tIns="0" bIns="0">
-            <a:spAutoFit/>
-          </a:bodyPr>
-          <a:lstStyle/>
-          <a:p>
-            <a:pPr algn="ctr"/>
-            <a:r>
-              <a:rPr sz="1150" b="0" i="1">
+              <a:t>Modality-ablation: zero one branch, observe the prediction shift</a:t>
+            </a:r>
+          </a:p>
+        </p:txBody>
+      </p:sp>
+      <p:sp>
+        <p:nvSpPr>
+          <p:cNvPr id="13" name="TextBox 12"/>
+          <p:cNvSpPr txBox="1"/>
+          <p:nvPr/>
+        </p:nvSpPr>
+        <p:spPr>
+          <a:xfrm>
+            <a:off x="731520" y="5577840"/>
+            <a:ext cx="10515600" cy="457200"/>
+          </a:xfrm>
+          <a:prstGeom prst="rect">
+            <a:avLst/>
+          </a:prstGeom>
+          <a:noFill/>
+        </p:spPr>
+        <p:txBody>
+          <a:bodyPr wrap="square" anchor="t" lIns="0" rIns="0" tIns="0" bIns="0">
+            <a:spAutoFit/>
+          </a:bodyPr>
+          <a:lstStyle/>
+          <a:p>
+            <a:pPr algn="l"/>
+            <a:r>
+              <a:rPr sz="1300" b="0" i="1">
                 <a:solidFill>
                   <a:srgbClr val="5B6B7A"/>
                 </a:solidFill>
                 <a:latin typeface="Calibri"/>
               </a:rPr>
-              <a:t>Research dashboard — model comparison &amp; confusion matrices</a:t>
-            </a:r>
-          </a:p>
-        </p:txBody>
-      </p:sp>
-      <p:sp>
-        <p:nvSpPr>
-          <p:cNvPr id="10" name="TextBox 9"/>
+              <a:t>Exploratory — not a rigorously validated attribution method (documented limitation).</a:t>
+            </a:r>
+          </a:p>
+        </p:txBody>
+      </p:sp>
+      <p:sp>
+        <p:nvSpPr>
+          <p:cNvPr id="14" name="TextBox 13"/>
           <p:cNvSpPr txBox="1"/>
           <p:nvPr/>
         </p:nvSpPr>
@@ -7125,7 +7602,7 @@
       </p:sp>
       <p:sp>
         <p:nvSpPr>
-          <p:cNvPr id="11" name="TextBox 10"/>
+          <p:cNvPr id="15" name="TextBox 14"/>
           <p:cNvSpPr txBox="1"/>
           <p:nvPr/>
         </p:nvSpPr>
@@ -7214,7 +7691,7 @@
                 </a:solidFill>
                 <a:latin typeface="Calibri"/>
               </a:rPr>
-              <a:t>DISCUSSION</a:t>
+              <a:t>IMPLEMENTATION — LIVE DEMO</a:t>
             </a:r>
           </a:p>
         </p:txBody>
@@ -7249,33 +7726,31 @@
                 </a:solidFill>
                 <a:latin typeface="Cambria"/>
               </a:rPr>
-              <a:t>Contribution &amp; Limitations</a:t>
-            </a:r>
-          </a:p>
-        </p:txBody>
-      </p:sp>
-      <p:sp>
-        <p:nvSpPr>
-          <p:cNvPr id="4" name="Rounded Rectangle 3"/>
+              <a:t>Application &amp; Dashboard</a:t>
+            </a:r>
+          </a:p>
+        </p:txBody>
+      </p:sp>
+      <p:sp>
+        <p:nvSpPr>
+          <p:cNvPr id="4" name="Rectangle 3"/>
           <p:cNvSpPr/>
           <p:nvPr/>
         </p:nvSpPr>
         <p:spPr>
           <a:xfrm>
-            <a:off x="640080" y="1783080"/>
-            <a:ext cx="5394960" cy="4206240"/>
-          </a:xfrm>
-          <a:prstGeom prst="roundRect">
-            <a:avLst>
-              <a:gd name="adj" fmla="val 4000"/>
-            </a:avLst>
+            <a:off x="1137920" y="1549400"/>
+            <a:ext cx="4216400" cy="4673600"/>
+          </a:xfrm>
+          <a:prstGeom prst="rect">
+            <a:avLst/>
           </a:prstGeom>
           <a:solidFill>
             <a:srgbClr val="FFFFFF"/>
           </a:solidFill>
-          <a:ln w="15875">
+          <a:ln w="12700">
             <a:solidFill>
-              <a:srgbClr val="EB6834"/>
+              <a:srgbClr val="DDE3EC"/>
             </a:solidFill>
           </a:ln>
           <a:effectLst/>
@@ -7302,143 +7777,50 @@
           </a:p>
         </p:txBody>
       </p:sp>
-      <p:sp>
-        <p:nvSpPr>
-          <p:cNvPr id="5" name="TextBox 4"/>
-          <p:cNvSpPr txBox="1"/>
-          <p:nvPr/>
-        </p:nvSpPr>
-        <p:spPr>
-          <a:xfrm>
-            <a:off x="868680" y="1965960"/>
-            <a:ext cx="4937760" cy="457200"/>
-          </a:xfrm>
-          <a:prstGeom prst="rect">
-            <a:avLst/>
-          </a:prstGeom>
-          <a:noFill/>
-        </p:spPr>
-        <p:txBody>
-          <a:bodyPr wrap="square" anchor="t" lIns="0" rIns="0" tIns="0" bIns="0">
-            <a:spAutoFit/>
-          </a:bodyPr>
-          <a:lstStyle/>
-          <a:p>
-            <a:pPr algn="l"/>
-            <a:r>
-              <a:rPr sz="1700" b="1" i="0">
-                <a:solidFill>
-                  <a:srgbClr val="EB6834"/>
-                </a:solidFill>
-                <a:latin typeface="Cambria"/>
-              </a:rPr>
-              <a:t>Contribution</a:t>
-            </a:r>
-          </a:p>
-        </p:txBody>
-      </p:sp>
-      <p:sp>
-        <p:nvSpPr>
-          <p:cNvPr id="6" name="TextBox 5"/>
-          <p:cNvSpPr txBox="1"/>
-          <p:nvPr/>
-        </p:nvSpPr>
-        <p:spPr>
-          <a:xfrm>
-            <a:off x="868680" y="2468880"/>
-            <a:ext cx="4937760" cy="3291840"/>
-          </a:xfrm>
-          <a:prstGeom prst="rect">
-            <a:avLst/>
-          </a:prstGeom>
-          <a:noFill/>
-        </p:spPr>
-        <p:txBody>
-          <a:bodyPr wrap="square" lIns="0" rIns="0">
-            <a:spAutoFit/>
-          </a:bodyPr>
-          <a:lstStyle/>
-          <a:p>
-            <a:pPr algn="l">
-              <a:lnSpc>
-                <a:spcPct val="108000"/>
-              </a:lnSpc>
-              <a:spcAft>
-                <a:spcPts val="600"/>
-              </a:spcAft>
-            </a:pPr>
-            <a:r>
-              <a:rPr sz="1250">
-                <a:solidFill>
-                  <a:srgbClr val="16213E"/>
-                </a:solidFill>
-                <a:latin typeface="Calibri"/>
-              </a:rPr>
-              <a:t>•  Real, same-conditions unimodal-vs-multimodal comparison on adequately-sized social-media data</a:t>
-            </a:r>
-          </a:p>
-          <a:p>
-            <a:pPr algn="l">
-              <a:lnSpc>
-                <a:spcPct val="108000"/>
-              </a:lnSpc>
-              <a:spcAft>
-                <a:spcPts val="600"/>
-              </a:spcAft>
-            </a:pPr>
-            <a:r>
-              <a:rPr sz="1250">
-                <a:solidFill>
-                  <a:srgbClr val="16213E"/>
-                </a:solidFill>
-                <a:latin typeface="Calibri"/>
-              </a:rPr>
-              <a:t>•  Honest modality-conflict analysis, not a blanket “multimodal wins” claim</a:t>
-            </a:r>
-          </a:p>
-          <a:p>
-            <a:pPr algn="l">
-              <a:lnSpc>
-                <a:spcPct val="108000"/>
-              </a:lnSpc>
-              <a:spcAft>
-                <a:spcPts val="600"/>
-              </a:spcAft>
-            </a:pPr>
-            <a:r>
-              <a:rPr sz="1250">
-                <a:solidFill>
-                  <a:srgbClr val="16213E"/>
-                </a:solidFill>
-                <a:latin typeface="Calibri"/>
-              </a:rPr>
-              <a:t>•  Documented resource-constrained reproduction (CPU-only, 8GB RAM)</a:t>
-            </a:r>
-          </a:p>
-        </p:txBody>
-      </p:sp>
-      <p:sp>
-        <p:nvSpPr>
-          <p:cNvPr id="7" name="Rounded Rectangle 6"/>
+      <p:pic>
+        <p:nvPicPr>
+          <p:cNvPr id="5" name="Picture 4" descr="02_predict_result.png"/>
+          <p:cNvPicPr>
+            <a:picLocks noChangeAspect="1"/>
+          </p:cNvPicPr>
+          <p:nvPr/>
+        </p:nvPicPr>
+        <p:blipFill>
+          <a:blip r:embed="rId2"/>
+          <a:stretch>
+            <a:fillRect/>
+          </a:stretch>
+        </p:blipFill>
+        <p:spPr>
+          <a:xfrm>
+            <a:off x="1188720" y="1600200"/>
+            <a:ext cx="4114800" cy="4572000"/>
+          </a:xfrm>
+          <a:prstGeom prst="rect">
+            <a:avLst/>
+          </a:prstGeom>
+        </p:spPr>
+      </p:pic>
+      <p:sp>
+        <p:nvSpPr>
+          <p:cNvPr id="6" name="Rectangle 5"/>
           <p:cNvSpPr/>
           <p:nvPr/>
         </p:nvSpPr>
         <p:spPr>
           <a:xfrm>
-            <a:off x="6172200" y="1783080"/>
-            <a:ext cx="5394960" cy="4206240"/>
-          </a:xfrm>
-          <a:prstGeom prst="roundRect">
-            <a:avLst>
-              <a:gd name="adj" fmla="val 4000"/>
-            </a:avLst>
+            <a:off x="6852920" y="1549400"/>
+            <a:ext cx="4216400" cy="4673600"/>
+          </a:xfrm>
+          <a:prstGeom prst="rect">
+            <a:avLst/>
           </a:prstGeom>
           <a:solidFill>
             <a:srgbClr val="FFFFFF"/>
           </a:solidFill>
-          <a:ln w="15875">
+          <a:ln w="12700">
             <a:solidFill>
-              <a:srgbClr val="CADCFC"/>
+              <a:srgbClr val="DDE3EC"/>
             </a:solidFill>
           </a:ln>
           <a:effectLst/>
@@ -7465,6 +7847,30 @@
           </a:p>
         </p:txBody>
       </p:sp>
+      <p:pic>
+        <p:nvPicPr>
+          <p:cNvPr id="7" name="Picture 6" descr="03_dashboard.png"/>
+          <p:cNvPicPr>
+            <a:picLocks noChangeAspect="1"/>
+          </p:cNvPicPr>
+          <p:nvPr/>
+        </p:nvPicPr>
+        <p:blipFill>
+          <a:blip r:embed="rId3"/>
+          <a:stretch>
+            <a:fillRect/>
+          </a:stretch>
+        </p:blipFill>
+        <p:spPr>
+          <a:xfrm>
+            <a:off x="6903720" y="1600200"/>
+            <a:ext cx="4114800" cy="4572000"/>
+          </a:xfrm>
+          <a:prstGeom prst="rect">
+            <a:avLst/>
+          </a:prstGeom>
+        </p:spPr>
+      </p:pic>
       <p:sp>
         <p:nvSpPr>
           <p:cNvPr id="8" name="TextBox 7"/>
@@ -7473,29 +7879,29 @@
         </p:nvSpPr>
         <p:spPr>
           <a:xfrm>
-            <a:off x="6400800" y="1965960"/>
-            <a:ext cx="4937760" cy="457200"/>
-          </a:xfrm>
-          <a:prstGeom prst="rect">
-            <a:avLst/>
-          </a:prstGeom>
-          <a:noFill/>
-        </p:spPr>
-        <p:txBody>
-          <a:bodyPr wrap="square" anchor="t" lIns="0" rIns="0" tIns="0" bIns="0">
-            <a:spAutoFit/>
-          </a:bodyPr>
-          <a:lstStyle/>
-          <a:p>
-            <a:pPr algn="l"/>
-            <a:r>
-              <a:rPr sz="1700" b="1" i="0">
-                <a:solidFill>
-                  <a:srgbClr val="1E2761"/>
-                </a:solidFill>
-                <a:latin typeface="Cambria"/>
-              </a:rPr>
-              <a:t>Limitations</a:t>
+            <a:off x="548640" y="6263640"/>
+            <a:ext cx="5394960" cy="320040"/>
+          </a:xfrm>
+          <a:prstGeom prst="rect">
+            <a:avLst/>
+          </a:prstGeom>
+          <a:noFill/>
+        </p:spPr>
+        <p:txBody>
+          <a:bodyPr wrap="square" anchor="t" lIns="0" rIns="0" tIns="0" bIns="0">
+            <a:spAutoFit/>
+          </a:bodyPr>
+          <a:lstStyle/>
+          <a:p>
+            <a:pPr algn="ctr"/>
+            <a:r>
+              <a:rPr sz="1150" b="0" i="1">
+                <a:solidFill>
+                  <a:srgbClr val="5B6B7A"/>
+                </a:solidFill>
+                <a:latin typeface="Calibri"/>
+              </a:rPr>
+              <a:t>Predict page — real text + image analyzed live</a:t>
             </a:r>
           </a:p>
         </p:txBody>
@@ -7508,93 +7914,29 @@
         </p:nvSpPr>
         <p:spPr>
           <a:xfrm>
-            <a:off x="6400800" y="2468880"/>
-            <a:ext cx="4937760" cy="3291840"/>
-          </a:xfrm>
-          <a:prstGeom prst="rect">
-            <a:avLst/>
-          </a:prstGeom>
-          <a:noFill/>
-        </p:spPr>
-        <p:txBody>
-          <a:bodyPr wrap="square" lIns="0" rIns="0">
-            <a:spAutoFit/>
-          </a:bodyPr>
-          <a:lstStyle/>
-          <a:p>
-            <a:pPr algn="l">
-              <a:lnSpc>
-                <a:spcPct val="108000"/>
-              </a:lnSpc>
-              <a:spcAft>
-                <a:spcPts val="600"/>
-              </a:spcAft>
-            </a:pPr>
-            <a:r>
-              <a:rPr sz="1250">
-                <a:solidFill>
-                  <a:srgbClr val="16213E"/>
-                </a:solidFill>
-                <a:latin typeface="Calibri"/>
-              </a:rPr>
-              <a:t>•  Sentiment labels, not mental-health-specific labels (documented proxy)</a:t>
-            </a:r>
-          </a:p>
-          <a:p>
-            <a:pPr algn="l">
-              <a:lnSpc>
-                <a:spcPct val="108000"/>
-              </a:lnSpc>
-              <a:spcAft>
-                <a:spcPts val="600"/>
-              </a:spcAft>
-            </a:pPr>
-            <a:r>
-              <a:rPr sz="1250">
-                <a:solidFill>
-                  <a:srgbClr val="16213E"/>
-                </a:solidFill>
-                <a:latin typeface="Calibri"/>
-              </a:rPr>
-              <a:t>•  English-language, 2015–16-era Twitter data only</a:t>
-            </a:r>
-          </a:p>
-          <a:p>
-            <a:pPr algn="l">
-              <a:lnSpc>
-                <a:spcPct val="108000"/>
-              </a:lnSpc>
-              <a:spcAft>
-                <a:spcPts val="600"/>
-              </a:spcAft>
-            </a:pPr>
-            <a:r>
-              <a:rPr sz="1250">
-                <a:solidFill>
-                  <a:srgbClr val="16213E"/>
-                </a:solidFill>
-                <a:latin typeface="Calibri"/>
-              </a:rPr>
-              <a:t>•  Small (~1–2%) cross-split duplication in the published split used</a:t>
-            </a:r>
-          </a:p>
-          <a:p>
-            <a:pPr algn="l">
-              <a:lnSpc>
-                <a:spcPct val="108000"/>
-              </a:lnSpc>
-              <a:spcAft>
-                <a:spcPts val="600"/>
-              </a:spcAft>
-            </a:pPr>
-            <a:r>
-              <a:rPr sz="1250">
-                <a:solidFill>
-                  <a:srgbClr val="16213E"/>
-                </a:solidFill>
-                <a:latin typeface="Calibri"/>
-              </a:rPr>
-              <a:t>•  From-scratch CNN baseline was compute-constrained</a:t>
+            <a:off x="6263640" y="6263640"/>
+            <a:ext cx="5394960" cy="320040"/>
+          </a:xfrm>
+          <a:prstGeom prst="rect">
+            <a:avLst/>
+          </a:prstGeom>
+          <a:noFill/>
+        </p:spPr>
+        <p:txBody>
+          <a:bodyPr wrap="square" anchor="t" lIns="0" rIns="0" tIns="0" bIns="0">
+            <a:spAutoFit/>
+          </a:bodyPr>
+          <a:lstStyle/>
+          <a:p>
+            <a:pPr algn="ctr"/>
+            <a:r>
+              <a:rPr sz="1150" b="0" i="1">
+                <a:solidFill>
+                  <a:srgbClr val="5B6B7A"/>
+                </a:solidFill>
+                <a:latin typeface="Calibri"/>
+              </a:rPr>
+              <a:t>Research dashboard — model comparison &amp; confusion matrices</a:t>
             </a:r>
           </a:p>
         </p:txBody>
@@ -7683,7 +8025,7 @@
     <p:bg>
       <p:bgPr>
         <a:solidFill>
-          <a:srgbClr val="1E2761"/>
+          <a:srgbClr val="F4F7FC"/>
         </a:solidFill>
         <a:effectLst/>
       </p:bgPr>
@@ -7697,58 +8039,84 @@
       <p:grpSpPr/>
       <p:sp>
         <p:nvSpPr>
-          <p:cNvPr id="2" name="Oval 1"/>
+          <p:cNvPr id="2" name="TextBox 1"/>
+          <p:cNvSpPr txBox="1"/>
+          <p:nvPr/>
+        </p:nvSpPr>
+        <p:spPr>
+          <a:xfrm>
+            <a:off x="640080" y="320040"/>
+            <a:ext cx="7315200" cy="320040"/>
+          </a:xfrm>
+          <a:prstGeom prst="rect">
+            <a:avLst/>
+          </a:prstGeom>
+          <a:noFill/>
+        </p:spPr>
+        <p:txBody>
+          <a:bodyPr wrap="square" anchor="t" lIns="0" rIns="0" tIns="0" bIns="0">
+            <a:spAutoFit/>
+          </a:bodyPr>
+          <a:lstStyle/>
+          <a:p>
+            <a:pPr algn="l"/>
+            <a:r>
+              <a:rPr sz="1200" b="1" i="0">
+                <a:solidFill>
+                  <a:srgbClr val="EB6834"/>
+                </a:solidFill>
+                <a:latin typeface="Calibri"/>
+              </a:rPr>
+              <a:t>IMPLEMENTATION</a:t>
+            </a:r>
+          </a:p>
+        </p:txBody>
+      </p:sp>
+      <p:sp>
+        <p:nvSpPr>
+          <p:cNvPr id="3" name="TextBox 2"/>
+          <p:cNvSpPr txBox="1"/>
+          <p:nvPr/>
+        </p:nvSpPr>
+        <p:spPr>
+          <a:xfrm>
+            <a:off x="640080" y="566928"/>
+            <a:ext cx="10789920" cy="822960"/>
+          </a:xfrm>
+          <a:prstGeom prst="rect">
+            <a:avLst/>
+          </a:prstGeom>
+          <a:noFill/>
+        </p:spPr>
+        <p:txBody>
+          <a:bodyPr wrap="square" anchor="t" lIns="0" rIns="0" tIns="0" bIns="0">
+            <a:spAutoFit/>
+          </a:bodyPr>
+          <a:lstStyle/>
+          <a:p>
+            <a:pPr algn="l"/>
+            <a:r>
+              <a:rPr sz="3200" b="1" i="0">
+                <a:solidFill>
+                  <a:srgbClr val="1E2761"/>
+                </a:solidFill>
+                <a:latin typeface="Cambria"/>
+              </a:rPr>
+              <a:t>Technical Challenges &amp; Testing</a:t>
+            </a:r>
+          </a:p>
+        </p:txBody>
+      </p:sp>
+      <p:sp>
+        <p:nvSpPr>
+          <p:cNvPr id="4" name="Oval 3"/>
           <p:cNvSpPr/>
           <p:nvPr/>
         </p:nvSpPr>
         <p:spPr>
           <a:xfrm>
-            <a:off x="5617160" y="877824"/>
-            <a:ext cx="621792" cy="621792"/>
-          </a:xfrm>
-          <a:prstGeom prst="ellipse">
-            <a:avLst/>
-          </a:prstGeom>
-          <a:solidFill>
-            <a:srgbClr val="CADCFC"/>
-          </a:solidFill>
-          <a:ln>
-            <a:noFill/>
-          </a:ln>
-          <a:effectLst/>
-        </p:spPr>
-        <p:style>
-          <a:lnRef idx="1">
-            <a:schemeClr val="accent1"/>
-          </a:lnRef>
-          <a:fillRef idx="3">
-            <a:schemeClr val="accent1"/>
-          </a:fillRef>
-          <a:effectRef idx="2">
-            <a:schemeClr val="accent1"/>
-          </a:effectRef>
-          <a:fontRef idx="minor">
-            <a:schemeClr val="lt1"/>
-          </a:fontRef>
-        </p:style>
-        <p:txBody>
-          <a:bodyPr rtlCol="0" anchor="ctr"/>
-          <a:lstStyle/>
-          <a:p>
-            <a:pPr algn="ctr"/>
-          </a:p>
-        </p:txBody>
-      </p:sp>
-      <p:sp>
-        <p:nvSpPr>
-          <p:cNvPr id="3" name="Oval 2"/>
-          <p:cNvSpPr/>
-          <p:nvPr/>
-        </p:nvSpPr>
-        <p:spPr>
-          <a:xfrm>
-            <a:off x="5959144" y="877824"/>
-            <a:ext cx="621792" cy="621792"/>
+            <a:off x="731520" y="1737360"/>
+            <a:ext cx="502920" cy="502920"/>
           </a:xfrm>
           <a:prstGeom prst="ellipse">
             <a:avLst/>
@@ -7776,44 +8144,18 @@
           </a:fontRef>
         </p:style>
         <p:txBody>
-          <a:bodyPr rtlCol="0" anchor="ctr"/>
+          <a:bodyPr rtlCol="0" anchor="ctr" lIns="0" rIns="0" tIns="0" bIns="0"/>
           <a:lstStyle/>
           <a:p>
             <a:pPr algn="ctr"/>
-          </a:p>
-        </p:txBody>
-      </p:sp>
-      <p:sp>
-        <p:nvSpPr>
-          <p:cNvPr id="4" name="TextBox 3"/>
-          <p:cNvSpPr txBox="1"/>
-          <p:nvPr/>
-        </p:nvSpPr>
-        <p:spPr>
-          <a:xfrm>
-            <a:off x="914400" y="1737360"/>
-            <a:ext cx="10332720" cy="365760"/>
-          </a:xfrm>
-          <a:prstGeom prst="rect">
-            <a:avLst/>
-          </a:prstGeom>
-          <a:noFill/>
-        </p:spPr>
-        <p:txBody>
-          <a:bodyPr wrap="square" anchor="t" lIns="0" rIns="0" tIns="0" bIns="0">
-            <a:spAutoFit/>
-          </a:bodyPr>
-          <a:lstStyle/>
-          <a:p>
-            <a:pPr algn="ctr"/>
-            <a:r>
-              <a:rPr sz="1300" b="1" i="0">
-                <a:solidFill>
-                  <a:srgbClr val="EB6834"/>
-                </a:solidFill>
-                <a:latin typeface="Calibri"/>
-              </a:rPr>
-              <a:t>CONCLUSION</a:t>
+            <a:r>
+              <a:rPr sz="1800" b="1">
+                <a:solidFill>
+                  <a:srgbClr val="FFFFFF"/>
+                </a:solidFill>
+                <a:latin typeface="Cambria"/>
+              </a:rPr>
+              <a:t>1</a:t>
             </a:r>
           </a:p>
         </p:txBody>
@@ -7826,48 +8168,867 @@
         </p:nvSpPr>
         <p:spPr>
           <a:xfrm>
-            <a:off x="914400" y="2103120"/>
-            <a:ext cx="10332720" cy="1371600"/>
-          </a:xfrm>
-          <a:prstGeom prst="rect">
-            <a:avLst/>
-          </a:prstGeom>
-          <a:noFill/>
-        </p:spPr>
-        <p:txBody>
-          <a:bodyPr wrap="square" anchor="t" lIns="0" rIns="0" tIns="0" bIns="0">
-            <a:spAutoFit/>
-          </a:bodyPr>
-          <a:lstStyle/>
-          <a:p>
-            <a:pPr algn="ctr">
+            <a:off x="1444752" y="1719072"/>
+            <a:ext cx="6217920" cy="365760"/>
+          </a:xfrm>
+          <a:prstGeom prst="rect">
+            <a:avLst/>
+          </a:prstGeom>
+          <a:noFill/>
+        </p:spPr>
+        <p:txBody>
+          <a:bodyPr wrap="square" anchor="t" lIns="0" rIns="0" tIns="0" bIns="0">
+            <a:spAutoFit/>
+          </a:bodyPr>
+          <a:lstStyle/>
+          <a:p>
+            <a:pPr algn="l"/>
+            <a:r>
+              <a:rPr sz="1600" b="1" i="0">
+                <a:solidFill>
+                  <a:srgbClr val="1E2761"/>
+                </a:solidFill>
+                <a:latin typeface="Calibri"/>
+              </a:rPr>
+              <a:t>Dead dataset link</a:t>
+            </a:r>
+          </a:p>
+        </p:txBody>
+      </p:sp>
+      <p:sp>
+        <p:nvSpPr>
+          <p:cNvPr id="6" name="TextBox 5"/>
+          <p:cNvSpPr txBox="1"/>
+          <p:nvPr/>
+        </p:nvSpPr>
+        <p:spPr>
+          <a:xfrm>
+            <a:off x="1444752" y="2066544"/>
+            <a:ext cx="6217920" cy="640080"/>
+          </a:xfrm>
+          <a:prstGeom prst="rect">
+            <a:avLst/>
+          </a:prstGeom>
+          <a:noFill/>
+        </p:spPr>
+        <p:txBody>
+          <a:bodyPr wrap="square" anchor="t" lIns="0" rIns="0" tIns="0" bIns="0">
+            <a:spAutoFit/>
+          </a:bodyPr>
+          <a:lstStyle/>
+          <a:p>
+            <a:pPr algn="l">
               <a:lnSpc>
-                <a:spcPct val="115000"/>
+                <a:spcPct val="110000"/>
               </a:lnSpc>
             </a:pPr>
             <a:r>
-              <a:rPr sz="2400" b="1" i="0">
+              <a:rPr sz="1250" b="0" i="0">
+                <a:solidFill>
+                  <a:srgbClr val="5B6B7A"/>
+                </a:solidFill>
+                <a:latin typeface="Calibri"/>
+              </a:rPr>
+              <a:t>Official MVSA link returned 404, so we verified a Hugging Face mirror and used the published CLMLF split</a:t>
+            </a:r>
+          </a:p>
+        </p:txBody>
+      </p:sp>
+      <p:sp>
+        <p:nvSpPr>
+          <p:cNvPr id="7" name="Oval 6"/>
+          <p:cNvSpPr/>
+          <p:nvPr/>
+        </p:nvSpPr>
+        <p:spPr>
+          <a:xfrm>
+            <a:off x="731520" y="2788920"/>
+            <a:ext cx="502920" cy="502920"/>
+          </a:xfrm>
+          <a:prstGeom prst="ellipse">
+            <a:avLst/>
+          </a:prstGeom>
+          <a:solidFill>
+            <a:srgbClr val="EB6834"/>
+          </a:solidFill>
+          <a:ln>
+            <a:noFill/>
+          </a:ln>
+          <a:effectLst/>
+        </p:spPr>
+        <p:style>
+          <a:lnRef idx="1">
+            <a:schemeClr val="accent1"/>
+          </a:lnRef>
+          <a:fillRef idx="3">
+            <a:schemeClr val="accent1"/>
+          </a:fillRef>
+          <a:effectRef idx="2">
+            <a:schemeClr val="accent1"/>
+          </a:effectRef>
+          <a:fontRef idx="minor">
+            <a:schemeClr val="lt1"/>
+          </a:fontRef>
+        </p:style>
+        <p:txBody>
+          <a:bodyPr rtlCol="0" anchor="ctr" lIns="0" rIns="0" tIns="0" bIns="0"/>
+          <a:lstStyle/>
+          <a:p>
+            <a:pPr algn="ctr"/>
+            <a:r>
+              <a:rPr sz="1800" b="1">
                 <a:solidFill>
                   <a:srgbClr val="FFFFFF"/>
                 </a:solidFill>
                 <a:latin typeface="Cambria"/>
               </a:rPr>
-              <a:t>Multimodal fusion provides a real, measurable, but conditional
-improvement — concentrated where modalities disagree.</a:t>
-            </a:r>
-          </a:p>
-        </p:txBody>
-      </p:sp>
-      <p:sp>
-        <p:nvSpPr>
-          <p:cNvPr id="6" name="TextBox 5"/>
-          <p:cNvSpPr txBox="1"/>
-          <p:nvPr/>
-        </p:nvSpPr>
-        <p:spPr>
-          <a:xfrm>
-            <a:off x="2103120" y="3931920"/>
-            <a:ext cx="7955279" cy="1828800"/>
+              <a:t>2</a:t>
+            </a:r>
+          </a:p>
+        </p:txBody>
+      </p:sp>
+      <p:sp>
+        <p:nvSpPr>
+          <p:cNvPr id="8" name="TextBox 7"/>
+          <p:cNvSpPr txBox="1"/>
+          <p:nvPr/>
+        </p:nvSpPr>
+        <p:spPr>
+          <a:xfrm>
+            <a:off x="1444752" y="2770632"/>
+            <a:ext cx="6217920" cy="365760"/>
+          </a:xfrm>
+          <a:prstGeom prst="rect">
+            <a:avLst/>
+          </a:prstGeom>
+          <a:noFill/>
+        </p:spPr>
+        <p:txBody>
+          <a:bodyPr wrap="square" anchor="t" lIns="0" rIns="0" tIns="0" bIns="0">
+            <a:spAutoFit/>
+          </a:bodyPr>
+          <a:lstStyle/>
+          <a:p>
+            <a:pPr algn="l"/>
+            <a:r>
+              <a:rPr sz="1600" b="1" i="0">
+                <a:solidFill>
+                  <a:srgbClr val="1E2761"/>
+                </a:solidFill>
+                <a:latin typeface="Calibri"/>
+              </a:rPr>
+              <a:t>Out of memory / time limits</a:t>
+            </a:r>
+          </a:p>
+        </p:txBody>
+      </p:sp>
+      <p:sp>
+        <p:nvSpPr>
+          <p:cNvPr id="9" name="TextBox 8"/>
+          <p:cNvSpPr txBox="1"/>
+          <p:nvPr/>
+        </p:nvSpPr>
+        <p:spPr>
+          <a:xfrm>
+            <a:off x="1444752" y="3118104"/>
+            <a:ext cx="6217920" cy="640080"/>
+          </a:xfrm>
+          <a:prstGeom prst="rect">
+            <a:avLst/>
+          </a:prstGeom>
+          <a:noFill/>
+        </p:spPr>
+        <p:txBody>
+          <a:bodyPr wrap="square" anchor="t" lIns="0" rIns="0" tIns="0" bIns="0">
+            <a:spAutoFit/>
+          </a:bodyPr>
+          <a:lstStyle/>
+          <a:p>
+            <a:pPr algn="l">
+              <a:lnSpc>
+                <a:spcPct val="110000"/>
+              </a:lnSpc>
+            </a:pPr>
+            <a:r>
+              <a:rPr sz="1250" b="0" i="0">
+                <a:solidFill>
+                  <a:srgbClr val="5B6B7A"/>
+                </a:solidFill>
+                <a:latin typeface="Calibri"/>
+              </a:rPr>
+              <a:t>The from-scratch CNN was killed once for running out of memory and once exceeded the time budget. Fixed with a 96×96 pixel cache and 3 epochs</a:t>
+            </a:r>
+          </a:p>
+        </p:txBody>
+      </p:sp>
+      <p:sp>
+        <p:nvSpPr>
+          <p:cNvPr id="10" name="Oval 9"/>
+          <p:cNvSpPr/>
+          <p:nvPr/>
+        </p:nvSpPr>
+        <p:spPr>
+          <a:xfrm>
+            <a:off x="731520" y="3840479"/>
+            <a:ext cx="502920" cy="502920"/>
+          </a:xfrm>
+          <a:prstGeom prst="ellipse">
+            <a:avLst/>
+          </a:prstGeom>
+          <a:solidFill>
+            <a:srgbClr val="EB6834"/>
+          </a:solidFill>
+          <a:ln>
+            <a:noFill/>
+          </a:ln>
+          <a:effectLst/>
+        </p:spPr>
+        <p:style>
+          <a:lnRef idx="1">
+            <a:schemeClr val="accent1"/>
+          </a:lnRef>
+          <a:fillRef idx="3">
+            <a:schemeClr val="accent1"/>
+          </a:fillRef>
+          <a:effectRef idx="2">
+            <a:schemeClr val="accent1"/>
+          </a:effectRef>
+          <a:fontRef idx="minor">
+            <a:schemeClr val="lt1"/>
+          </a:fontRef>
+        </p:style>
+        <p:txBody>
+          <a:bodyPr rtlCol="0" anchor="ctr" lIns="0" rIns="0" tIns="0" bIns="0"/>
+          <a:lstStyle/>
+          <a:p>
+            <a:pPr algn="ctr"/>
+            <a:r>
+              <a:rPr sz="1800" b="1">
+                <a:solidFill>
+                  <a:srgbClr val="FFFFFF"/>
+                </a:solidFill>
+                <a:latin typeface="Cambria"/>
+              </a:rPr>
+              <a:t>3</a:t>
+            </a:r>
+          </a:p>
+        </p:txBody>
+      </p:sp>
+      <p:sp>
+        <p:nvSpPr>
+          <p:cNvPr id="11" name="TextBox 10"/>
+          <p:cNvSpPr txBox="1"/>
+          <p:nvPr/>
+        </p:nvSpPr>
+        <p:spPr>
+          <a:xfrm>
+            <a:off x="1444752" y="3822191"/>
+            <a:ext cx="6217920" cy="365760"/>
+          </a:xfrm>
+          <a:prstGeom prst="rect">
+            <a:avLst/>
+          </a:prstGeom>
+          <a:noFill/>
+        </p:spPr>
+        <p:txBody>
+          <a:bodyPr wrap="square" anchor="t" lIns="0" rIns="0" tIns="0" bIns="0">
+            <a:spAutoFit/>
+          </a:bodyPr>
+          <a:lstStyle/>
+          <a:p>
+            <a:pPr algn="l"/>
+            <a:r>
+              <a:rPr sz="1600" b="1" i="0">
+                <a:solidFill>
+                  <a:srgbClr val="1E2761"/>
+                </a:solidFill>
+                <a:latin typeface="Calibri"/>
+              </a:rPr>
+              <a:t>CPU-only compute</a:t>
+            </a:r>
+          </a:p>
+        </p:txBody>
+      </p:sp>
+      <p:sp>
+        <p:nvSpPr>
+          <p:cNvPr id="12" name="TextBox 11"/>
+          <p:cNvSpPr txBox="1"/>
+          <p:nvPr/>
+        </p:nvSpPr>
+        <p:spPr>
+          <a:xfrm>
+            <a:off x="1444752" y="4169663"/>
+            <a:ext cx="6217920" cy="640080"/>
+          </a:xfrm>
+          <a:prstGeom prst="rect">
+            <a:avLst/>
+          </a:prstGeom>
+          <a:noFill/>
+        </p:spPr>
+        <p:txBody>
+          <a:bodyPr wrap="square" anchor="t" lIns="0" rIns="0" tIns="0" bIns="0">
+            <a:spAutoFit/>
+          </a:bodyPr>
+          <a:lstStyle/>
+          <a:p>
+            <a:pPr algn="l">
+              <a:lnSpc>
+                <a:spcPct val="110000"/>
+              </a:lnSpc>
+            </a:pPr>
+            <a:r>
+              <a:rPr sz="1250" b="0" i="0">
+                <a:solidFill>
+                  <a:srgbClr val="5B6B7A"/>
+                </a:solidFill>
+                <a:latin typeface="Calibri"/>
+              </a:rPr>
+              <a:t>Frozen DistilBERT / ResNet18 with cached embeddings (46–71 ms/sample)</a:t>
+            </a:r>
+          </a:p>
+        </p:txBody>
+      </p:sp>
+      <p:sp>
+        <p:nvSpPr>
+          <p:cNvPr id="13" name="Oval 12"/>
+          <p:cNvSpPr/>
+          <p:nvPr/>
+        </p:nvSpPr>
+        <p:spPr>
+          <a:xfrm>
+            <a:off x="731520" y="4892040"/>
+            <a:ext cx="502920" cy="502920"/>
+          </a:xfrm>
+          <a:prstGeom prst="ellipse">
+            <a:avLst/>
+          </a:prstGeom>
+          <a:solidFill>
+            <a:srgbClr val="EB6834"/>
+          </a:solidFill>
+          <a:ln>
+            <a:noFill/>
+          </a:ln>
+          <a:effectLst/>
+        </p:spPr>
+        <p:style>
+          <a:lnRef idx="1">
+            <a:schemeClr val="accent1"/>
+          </a:lnRef>
+          <a:fillRef idx="3">
+            <a:schemeClr val="accent1"/>
+          </a:fillRef>
+          <a:effectRef idx="2">
+            <a:schemeClr val="accent1"/>
+          </a:effectRef>
+          <a:fontRef idx="minor">
+            <a:schemeClr val="lt1"/>
+          </a:fontRef>
+        </p:style>
+        <p:txBody>
+          <a:bodyPr rtlCol="0" anchor="ctr" lIns="0" rIns="0" tIns="0" bIns="0"/>
+          <a:lstStyle/>
+          <a:p>
+            <a:pPr algn="ctr"/>
+            <a:r>
+              <a:rPr sz="1800" b="1">
+                <a:solidFill>
+                  <a:srgbClr val="FFFFFF"/>
+                </a:solidFill>
+                <a:latin typeface="Cambria"/>
+              </a:rPr>
+              <a:t>4</a:t>
+            </a:r>
+          </a:p>
+        </p:txBody>
+      </p:sp>
+      <p:sp>
+        <p:nvSpPr>
+          <p:cNvPr id="14" name="TextBox 13"/>
+          <p:cNvSpPr txBox="1"/>
+          <p:nvPr/>
+        </p:nvSpPr>
+        <p:spPr>
+          <a:xfrm>
+            <a:off x="1444752" y="4873752"/>
+            <a:ext cx="6217920" cy="365760"/>
+          </a:xfrm>
+          <a:prstGeom prst="rect">
+            <a:avLst/>
+          </a:prstGeom>
+          <a:noFill/>
+        </p:spPr>
+        <p:txBody>
+          <a:bodyPr wrap="square" anchor="t" lIns="0" rIns="0" tIns="0" bIns="0">
+            <a:spAutoFit/>
+          </a:bodyPr>
+          <a:lstStyle/>
+          <a:p>
+            <a:pPr algn="l"/>
+            <a:r>
+              <a:rPr sz="1600" b="1" i="0">
+                <a:solidFill>
+                  <a:srgbClr val="1E2761"/>
+                </a:solidFill>
+                <a:latin typeface="Calibri"/>
+              </a:rPr>
+              <a:t>Class imbalance</a:t>
+            </a:r>
+          </a:p>
+        </p:txBody>
+      </p:sp>
+      <p:sp>
+        <p:nvSpPr>
+          <p:cNvPr id="15" name="TextBox 14"/>
+          <p:cNvSpPr txBox="1"/>
+          <p:nvPr/>
+        </p:nvSpPr>
+        <p:spPr>
+          <a:xfrm>
+            <a:off x="1444752" y="5221224"/>
+            <a:ext cx="6217920" cy="640080"/>
+          </a:xfrm>
+          <a:prstGeom prst="rect">
+            <a:avLst/>
+          </a:prstGeom>
+          <a:noFill/>
+        </p:spPr>
+        <p:txBody>
+          <a:bodyPr wrap="square" anchor="t" lIns="0" rIns="0" tIns="0" bIns="0">
+            <a:spAutoFit/>
+          </a:bodyPr>
+          <a:lstStyle/>
+          <a:p>
+            <a:pPr algn="l">
+              <a:lnSpc>
+                <a:spcPct val="110000"/>
+              </a:lnSpc>
+            </a:pPr>
+            <a:r>
+              <a:rPr sz="1250" b="0" i="0">
+                <a:solidFill>
+                  <a:srgbClr val="5B6B7A"/>
+                </a:solidFill>
+                <a:latin typeface="Calibri"/>
+              </a:rPr>
+              <a:t>Neutral class is only about 10%. Fixed with class-weighted losses and macro-F1 model selection</a:t>
+            </a:r>
+          </a:p>
+        </p:txBody>
+      </p:sp>
+      <p:sp>
+        <p:nvSpPr>
+          <p:cNvPr id="16" name="Rounded Rectangle 15"/>
+          <p:cNvSpPr/>
+          <p:nvPr/>
+        </p:nvSpPr>
+        <p:spPr>
+          <a:xfrm>
+            <a:off x="8138160" y="1783080"/>
+            <a:ext cx="3291840" cy="1737360"/>
+          </a:xfrm>
+          <a:prstGeom prst="roundRect">
+            <a:avLst>
+              <a:gd name="adj" fmla="val 8000"/>
+            </a:avLst>
+          </a:prstGeom>
+          <a:solidFill>
+            <a:srgbClr val="FFFFFF"/>
+          </a:solidFill>
+          <a:ln w="12700">
+            <a:solidFill>
+              <a:srgbClr val="E3E8F0"/>
+            </a:solidFill>
+          </a:ln>
+          <a:effectLst/>
+        </p:spPr>
+        <p:style>
+          <a:lnRef idx="1">
+            <a:schemeClr val="accent1"/>
+          </a:lnRef>
+          <a:fillRef idx="3">
+            <a:schemeClr val="accent1"/>
+          </a:fillRef>
+          <a:effectRef idx="2">
+            <a:schemeClr val="accent1"/>
+          </a:effectRef>
+          <a:fontRef idx="minor">
+            <a:schemeClr val="lt1"/>
+          </a:fontRef>
+        </p:style>
+        <p:txBody>
+          <a:bodyPr rtlCol="0" anchor="ctr"/>
+          <a:lstStyle/>
+          <a:p>
+            <a:pPr algn="ctr"/>
+          </a:p>
+        </p:txBody>
+      </p:sp>
+      <p:sp>
+        <p:nvSpPr>
+          <p:cNvPr id="17" name="TextBox 16"/>
+          <p:cNvSpPr txBox="1"/>
+          <p:nvPr/>
+        </p:nvSpPr>
+        <p:spPr>
+          <a:xfrm>
+            <a:off x="8275320" y="1947672"/>
+            <a:ext cx="3017520" cy="685800"/>
+          </a:xfrm>
+          <a:prstGeom prst="rect">
+            <a:avLst/>
+          </a:prstGeom>
+          <a:noFill/>
+        </p:spPr>
+        <p:txBody>
+          <a:bodyPr wrap="square" anchor="t" lIns="0" rIns="0" tIns="0" bIns="0">
+            <a:spAutoFit/>
+          </a:bodyPr>
+          <a:lstStyle/>
+          <a:p>
+            <a:pPr algn="ctr"/>
+            <a:r>
+              <a:rPr sz="3000" b="1" i="0">
+                <a:solidFill>
+                  <a:srgbClr val="EB6834"/>
+                </a:solidFill>
+                <a:latin typeface="Cambria"/>
+              </a:rPr>
+              <a:t>32 / 32</a:t>
+            </a:r>
+          </a:p>
+        </p:txBody>
+      </p:sp>
+      <p:sp>
+        <p:nvSpPr>
+          <p:cNvPr id="18" name="TextBox 17"/>
+          <p:cNvSpPr txBox="1"/>
+          <p:nvPr/>
+        </p:nvSpPr>
+        <p:spPr>
+          <a:xfrm>
+            <a:off x="8275320" y="2953512"/>
+            <a:ext cx="3017520" cy="457200"/>
+          </a:xfrm>
+          <a:prstGeom prst="rect">
+            <a:avLst/>
+          </a:prstGeom>
+          <a:noFill/>
+        </p:spPr>
+        <p:txBody>
+          <a:bodyPr wrap="square" anchor="t" lIns="0" rIns="0" tIns="0" bIns="0">
+            <a:spAutoFit/>
+          </a:bodyPr>
+          <a:lstStyle/>
+          <a:p>
+            <a:pPr algn="ctr"/>
+            <a:r>
+              <a:rPr sz="1150" b="0" i="0">
+                <a:solidFill>
+                  <a:srgbClr val="5B6B7A"/>
+                </a:solidFill>
+                <a:latin typeface="Calibri"/>
+              </a:rPr>
+              <a:t>automated tests passing
+(pytest)</a:t>
+            </a:r>
+          </a:p>
+        </p:txBody>
+      </p:sp>
+      <p:sp>
+        <p:nvSpPr>
+          <p:cNvPr id="19" name="Rounded Rectangle 18"/>
+          <p:cNvSpPr/>
+          <p:nvPr/>
+        </p:nvSpPr>
+        <p:spPr>
+          <a:xfrm>
+            <a:off x="8138160" y="3749039"/>
+            <a:ext cx="3291840" cy="1737360"/>
+          </a:xfrm>
+          <a:prstGeom prst="roundRect">
+            <a:avLst>
+              <a:gd name="adj" fmla="val 8000"/>
+            </a:avLst>
+          </a:prstGeom>
+          <a:solidFill>
+            <a:srgbClr val="FFFFFF"/>
+          </a:solidFill>
+          <a:ln w="12700">
+            <a:solidFill>
+              <a:srgbClr val="E3E8F0"/>
+            </a:solidFill>
+          </a:ln>
+          <a:effectLst/>
+        </p:spPr>
+        <p:style>
+          <a:lnRef idx="1">
+            <a:schemeClr val="accent1"/>
+          </a:lnRef>
+          <a:fillRef idx="3">
+            <a:schemeClr val="accent1"/>
+          </a:fillRef>
+          <a:effectRef idx="2">
+            <a:schemeClr val="accent1"/>
+          </a:effectRef>
+          <a:fontRef idx="minor">
+            <a:schemeClr val="lt1"/>
+          </a:fontRef>
+        </p:style>
+        <p:txBody>
+          <a:bodyPr rtlCol="0" anchor="ctr"/>
+          <a:lstStyle/>
+          <a:p>
+            <a:pPr algn="ctr"/>
+          </a:p>
+        </p:txBody>
+      </p:sp>
+      <p:sp>
+        <p:nvSpPr>
+          <p:cNvPr id="20" name="TextBox 19"/>
+          <p:cNvSpPr txBox="1"/>
+          <p:nvPr/>
+        </p:nvSpPr>
+        <p:spPr>
+          <a:xfrm>
+            <a:off x="8275320" y="3913631"/>
+            <a:ext cx="3017520" cy="685800"/>
+          </a:xfrm>
+          <a:prstGeom prst="rect">
+            <a:avLst/>
+          </a:prstGeom>
+          <a:noFill/>
+        </p:spPr>
+        <p:txBody>
+          <a:bodyPr wrap="square" anchor="t" lIns="0" rIns="0" tIns="0" bIns="0">
+            <a:spAutoFit/>
+          </a:bodyPr>
+          <a:lstStyle/>
+          <a:p>
+            <a:pPr algn="ctr"/>
+            <a:r>
+              <a:rPr sz="3000" b="1" i="0">
+                <a:solidFill>
+                  <a:srgbClr val="1E2761"/>
+                </a:solidFill>
+                <a:latin typeface="Cambria"/>
+              </a:rPr>
+              <a:t>2 studies</a:t>
+            </a:r>
+          </a:p>
+        </p:txBody>
+      </p:sp>
+      <p:sp>
+        <p:nvSpPr>
+          <p:cNvPr id="21" name="TextBox 20"/>
+          <p:cNvSpPr txBox="1"/>
+          <p:nvPr/>
+        </p:nvSpPr>
+        <p:spPr>
+          <a:xfrm>
+            <a:off x="8275320" y="4919471"/>
+            <a:ext cx="3017520" cy="457200"/>
+          </a:xfrm>
+          <a:prstGeom prst="rect">
+            <a:avLst/>
+          </a:prstGeom>
+          <a:noFill/>
+        </p:spPr>
+        <p:txBody>
+          <a:bodyPr wrap="square" anchor="t" lIns="0" rIns="0" tIns="0" bIns="0">
+            <a:spAutoFit/>
+          </a:bodyPr>
+          <a:lstStyle/>
+          <a:p>
+            <a:pPr algn="ctr"/>
+            <a:r>
+              <a:rPr sz="1150" b="0" i="0">
+                <a:solidFill>
+                  <a:srgbClr val="5B6B7A"/>
+                </a:solidFill>
+                <a:latin typeface="Calibri"/>
+              </a:rPr>
+              <a:t>MVSA-Single (4,511 tweets)
++ Memotion (3,500 memes)</a:t>
+            </a:r>
+          </a:p>
+        </p:txBody>
+      </p:sp>
+      <p:sp>
+        <p:nvSpPr>
+          <p:cNvPr id="22" name="TextBox 21"/>
+          <p:cNvSpPr txBox="1"/>
+          <p:nvPr/>
+        </p:nvSpPr>
+        <p:spPr>
+          <a:xfrm>
+            <a:off x="640080" y="6473952"/>
+            <a:ext cx="5486400" cy="274320"/>
+          </a:xfrm>
+          <a:prstGeom prst="rect">
+            <a:avLst/>
+          </a:prstGeom>
+          <a:noFill/>
+        </p:spPr>
+        <p:txBody>
+          <a:bodyPr wrap="square" anchor="t" lIns="0" rIns="0" tIns="0" bIns="0">
+            <a:spAutoFit/>
+          </a:bodyPr>
+          <a:lstStyle/>
+          <a:p>
+            <a:pPr algn="l"/>
+            <a:r>
+              <a:rPr sz="900" b="0" i="0">
+                <a:solidFill>
+                  <a:srgbClr val="5B6B7A"/>
+                </a:solidFill>
+                <a:latin typeface="Calibri"/>
+              </a:rPr>
+              <a:t>AI-Driven Multimodal Sentiment Analysis for Mental Health Monitoring</a:t>
+            </a:r>
+          </a:p>
+        </p:txBody>
+      </p:sp>
+      <p:sp>
+        <p:nvSpPr>
+          <p:cNvPr id="23" name="TextBox 22"/>
+          <p:cNvSpPr txBox="1"/>
+          <p:nvPr/>
+        </p:nvSpPr>
+        <p:spPr>
+          <a:xfrm>
+            <a:off x="11521440" y="6473952"/>
+            <a:ext cx="457200" cy="274320"/>
+          </a:xfrm>
+          <a:prstGeom prst="rect">
+            <a:avLst/>
+          </a:prstGeom>
+          <a:noFill/>
+        </p:spPr>
+        <p:txBody>
+          <a:bodyPr wrap="square" anchor="t" lIns="0" rIns="0" tIns="0" bIns="0">
+            <a:spAutoFit/>
+          </a:bodyPr>
+          <a:lstStyle/>
+          <a:p>
+            <a:pPr algn="r"/>
+            <a:r>
+              <a:rPr sz="900" b="0" i="0">
+                <a:solidFill>
+                  <a:srgbClr val="5B6B7A"/>
+                </a:solidFill>
+                <a:latin typeface="Calibri"/>
+              </a:rPr>
+              <a:t>18</a:t>
+            </a:r>
+          </a:p>
+        </p:txBody>
+      </p:sp>
+    </p:spTree>
+  </p:cSld>
+  <p:clrMapOvr>
+    <a:masterClrMapping/>
+  </p:clrMapOvr>
+</p:sld>
+</file>
+
+<file path=ppt/slides/slide19.xml><?xml version="1.0" encoding="utf-8"?>
+<p:sld xmlns:a="http://schemas.openxmlformats.org/drawingml/2006/main" xmlns:p="http://schemas.openxmlformats.org/presentationml/2006/main" xmlns:r="http://schemas.openxmlformats.org/officeDocument/2006/relationships">
+  <p:cSld>
+    <p:bg>
+      <p:bgPr>
+        <a:solidFill>
+          <a:srgbClr val="F4F7FC"/>
+        </a:solidFill>
+        <a:effectLst/>
+      </p:bgPr>
+    </p:bg>
+    <p:spTree>
+      <p:nvGrpSpPr>
+        <p:cNvPr id="1" name=""/>
+        <p:cNvGrpSpPr/>
+        <p:nvPr/>
+      </p:nvGrpSpPr>
+      <p:grpSpPr/>
+      <p:sp>
+        <p:nvSpPr>
+          <p:cNvPr id="2" name="TextBox 1"/>
+          <p:cNvSpPr txBox="1"/>
+          <p:nvPr/>
+        </p:nvSpPr>
+        <p:spPr>
+          <a:xfrm>
+            <a:off x="640080" y="320040"/>
+            <a:ext cx="7315200" cy="320040"/>
+          </a:xfrm>
+          <a:prstGeom prst="rect">
+            <a:avLst/>
+          </a:prstGeom>
+          <a:noFill/>
+        </p:spPr>
+        <p:txBody>
+          <a:bodyPr wrap="square" anchor="t" lIns="0" rIns="0" tIns="0" bIns="0">
+            <a:spAutoFit/>
+          </a:bodyPr>
+          <a:lstStyle/>
+          <a:p>
+            <a:pPr algn="l"/>
+            <a:r>
+              <a:rPr sz="1200" b="1" i="0">
+                <a:solidFill>
+                  <a:srgbClr val="EB6834"/>
+                </a:solidFill>
+                <a:latin typeface="Calibri"/>
+              </a:rPr>
+              <a:t>EXTENSION — RESEARCH DESIGN</a:t>
+            </a:r>
+          </a:p>
+        </p:txBody>
+      </p:sp>
+      <p:sp>
+        <p:nvSpPr>
+          <p:cNvPr id="3" name="TextBox 2"/>
+          <p:cNvSpPr txBox="1"/>
+          <p:nvPr/>
+        </p:nvSpPr>
+        <p:spPr>
+          <a:xfrm>
+            <a:off x="640080" y="566928"/>
+            <a:ext cx="10789920" cy="822960"/>
+          </a:xfrm>
+          <a:prstGeom prst="rect">
+            <a:avLst/>
+          </a:prstGeom>
+          <a:noFill/>
+        </p:spPr>
+        <p:txBody>
+          <a:bodyPr wrap="square" anchor="t" lIns="0" rIns="0" tIns="0" bIns="0">
+            <a:spAutoFit/>
+          </a:bodyPr>
+          <a:lstStyle/>
+          <a:p>
+            <a:pPr algn="l"/>
+            <a:r>
+              <a:rPr sz="3200" b="1" i="0">
+                <a:solidFill>
+                  <a:srgbClr val="1E2761"/>
+                </a:solidFill>
+                <a:latin typeface="Cambria"/>
+              </a:rPr>
+              <a:t>Study 2: Do Memes Leak Text into the Image?</a:t>
+            </a:r>
+          </a:p>
+        </p:txBody>
+      </p:sp>
+      <p:sp>
+        <p:nvSpPr>
+          <p:cNvPr id="4" name="TextBox 3"/>
+          <p:cNvSpPr txBox="1"/>
+          <p:nvPr/>
+        </p:nvSpPr>
+        <p:spPr>
+          <a:xfrm>
+            <a:off x="640080" y="1783080"/>
+            <a:ext cx="6035040" cy="4389120"/>
           </a:xfrm>
           <a:prstGeom prst="rect">
             <a:avLst/>
@@ -7885,17 +9046,17 @@
                 <a:spcPct val="108000"/>
               </a:lnSpc>
               <a:spcAft>
-                <a:spcPts val="1000"/>
+                <a:spcPts val="1400"/>
               </a:spcAft>
             </a:pPr>
             <a:r>
               <a:rPr sz="1400">
                 <a:solidFill>
-                  <a:srgbClr val="CADCFC"/>
-                </a:solidFill>
-                <a:latin typeface="Calibri"/>
-              </a:rPr>
-              <a:t>•  Future work: multilingual extension</a:t>
+                  <a:srgbClr val="16213E"/>
+                </a:solidFill>
+                <a:latin typeface="Calibri"/>
+              </a:rPr>
+              <a:t>•  Memes print their text directly onto the image, so an "image-only" model may simply be reading the text</a:t>
             </a:r>
           </a:p>
           <a:p>
@@ -7904,17 +9065,17 @@
                 <a:spcPct val="108000"/>
               </a:lnSpc>
               <a:spcAft>
-                <a:spcPts val="1000"/>
+                <a:spcPts val="1400"/>
               </a:spcAft>
             </a:pPr>
             <a:r>
               <a:rPr sz="1400">
                 <a:solidFill>
-                  <a:srgbClr val="CADCFC"/>
-                </a:solidFill>
-                <a:latin typeface="Calibri"/>
-              </a:rPr>
-              <a:t>•  Future work: cross-modal attention fusion at scale</a:t>
+                  <a:srgbClr val="16213E"/>
+                </a:solidFill>
+                <a:latin typeface="Calibri"/>
+              </a:rPr>
+              <a:t>•  Dataset: Memotion (SemEval-2020 Task 8), stratified 3,500-meme subset (2,800 / 350 / 350), 3-class sentiment</a:t>
             </a:r>
           </a:p>
           <a:p>
@@ -7923,52 +9084,417 @@
                 <a:spcPct val="108000"/>
               </a:lnSpc>
               <a:spcAft>
-                <a:spcPts val="1000"/>
+                <a:spcPts val="1400"/>
               </a:spcAft>
             </a:pPr>
             <a:r>
               <a:rPr sz="1400">
                 <a:solidFill>
-                  <a:srgbClr val="CADCFC"/>
-                </a:solidFill>
-                <a:latin typeface="Calibri"/>
-              </a:rPr>
-              <a:t>•  Future work: validation against a genuinely mental-health-labeled multimodal dataset, if one becomes openly available</a:t>
-            </a:r>
-          </a:p>
-        </p:txBody>
-      </p:sp>
-      <p:sp>
-        <p:nvSpPr>
-          <p:cNvPr id="7" name="TextBox 6"/>
+                  <a:srgbClr val="16213E"/>
+                </a:solidFill>
+                <a:latin typeface="Calibri"/>
+              </a:rPr>
+              <a:t>•  Same pipeline as Study 1 (A1, A2, B1, B2, C), with every image model trained twice: sharp vs. Gaussian-blurred (r = 14 px)</a:t>
+            </a:r>
+          </a:p>
+          <a:p>
+            <a:pPr algn="l">
+              <a:lnSpc>
+                <a:spcPct val="108000"/>
+              </a:lnSpc>
+              <a:spcAft>
+                <a:spcPts val="1400"/>
+              </a:spcAft>
+            </a:pPr>
+            <a:r>
+              <a:rPr sz="1400">
+                <a:solidFill>
+                  <a:srgbClr val="16213E"/>
+                </a:solidFill>
+                <a:latin typeface="Calibri"/>
+              </a:rPr>
+              <a:t>•  Blur validated objectively: mean Laplacian variance 2022 → 1.5 (99.9% drop), so the text strokes are gone while colour and layout remain</a:t>
+            </a:r>
+          </a:p>
+        </p:txBody>
+      </p:sp>
+      <p:sp>
+        <p:nvSpPr>
+          <p:cNvPr id="5" name="Rounded Rectangle 4"/>
+          <p:cNvSpPr/>
+          <p:nvPr/>
+        </p:nvSpPr>
+        <p:spPr>
+          <a:xfrm>
+            <a:off x="7132320" y="1828800"/>
+            <a:ext cx="4297680" cy="731520"/>
+          </a:xfrm>
+          <a:prstGeom prst="roundRect">
+            <a:avLst>
+              <a:gd name="adj" fmla="val 15000"/>
+            </a:avLst>
+          </a:prstGeom>
+          <a:solidFill>
+            <a:srgbClr val="1E2761"/>
+          </a:solidFill>
+          <a:ln>
+            <a:noFill/>
+          </a:ln>
+          <a:effectLst/>
+        </p:spPr>
+        <p:style>
+          <a:lnRef idx="1">
+            <a:schemeClr val="accent1"/>
+          </a:lnRef>
+          <a:fillRef idx="3">
+            <a:schemeClr val="accent1"/>
+          </a:fillRef>
+          <a:effectRef idx="2">
+            <a:schemeClr val="accent1"/>
+          </a:effectRef>
+          <a:fontRef idx="minor">
+            <a:schemeClr val="lt1"/>
+          </a:fontRef>
+        </p:style>
+        <p:txBody>
+          <a:bodyPr rtlCol="0" anchor="ctr" wrap="square" lIns="50800" rIns="50800"/>
+          <a:lstStyle/>
+          <a:p>
+            <a:pPr algn="ctr"/>
+            <a:r>
+              <a:rPr sz="1250" b="1">
+                <a:solidFill>
+                  <a:srgbClr val="FFFFFF"/>
+                </a:solidFill>
+                <a:latin typeface="Calibri"/>
+              </a:rPr>
+              <a:t>Meme image (text printed on it)</a:t>
+            </a:r>
+          </a:p>
+        </p:txBody>
+      </p:sp>
+      <p:sp>
+        <p:nvSpPr>
+          <p:cNvPr id="6" name="Right Arrow 5"/>
+          <p:cNvSpPr/>
+          <p:nvPr/>
+        </p:nvSpPr>
+        <p:spPr>
+          <a:xfrm>
+            <a:off x="9052560" y="2651760"/>
+            <a:ext cx="457200" cy="411480"/>
+          </a:xfrm>
+          <a:prstGeom prst="rightArrow">
+            <a:avLst/>
+          </a:prstGeom>
+          <a:solidFill>
+            <a:srgbClr val="EB6834"/>
+          </a:solidFill>
+          <a:ln>
+            <a:noFill/>
+          </a:ln>
+          <a:effectLst/>
+        </p:spPr>
+        <p:style>
+          <a:lnRef idx="1">
+            <a:schemeClr val="accent1"/>
+          </a:lnRef>
+          <a:fillRef idx="3">
+            <a:schemeClr val="accent1"/>
+          </a:fillRef>
+          <a:effectRef idx="2">
+            <a:schemeClr val="accent1"/>
+          </a:effectRef>
+          <a:fontRef idx="minor">
+            <a:schemeClr val="lt1"/>
+          </a:fontRef>
+        </p:style>
+        <p:txBody>
+          <a:bodyPr rtlCol="0" anchor="ctr"/>
+          <a:lstStyle/>
+          <a:p>
+            <a:pPr algn="ctr"/>
+          </a:p>
+        </p:txBody>
+      </p:sp>
+      <p:sp>
+        <p:nvSpPr>
+          <p:cNvPr id="7" name="Rounded Rectangle 6"/>
+          <p:cNvSpPr/>
+          <p:nvPr/>
+        </p:nvSpPr>
+        <p:spPr>
+          <a:xfrm>
+            <a:off x="7132320" y="3154680"/>
+            <a:ext cx="2011680" cy="822960"/>
+          </a:xfrm>
+          <a:prstGeom prst="roundRect">
+            <a:avLst>
+              <a:gd name="adj" fmla="val 15000"/>
+            </a:avLst>
+          </a:prstGeom>
+          <a:solidFill>
+            <a:srgbClr val="1E2761"/>
+          </a:solidFill>
+          <a:ln>
+            <a:noFill/>
+          </a:ln>
+          <a:effectLst/>
+        </p:spPr>
+        <p:style>
+          <a:lnRef idx="1">
+            <a:schemeClr val="accent1"/>
+          </a:lnRef>
+          <a:fillRef idx="3">
+            <a:schemeClr val="accent1"/>
+          </a:fillRef>
+          <a:effectRef idx="2">
+            <a:schemeClr val="accent1"/>
+          </a:effectRef>
+          <a:fontRef idx="minor">
+            <a:schemeClr val="lt1"/>
+          </a:fontRef>
+        </p:style>
+        <p:txBody>
+          <a:bodyPr rtlCol="0" anchor="ctr" wrap="square" lIns="50800" rIns="50800"/>
+          <a:lstStyle/>
+          <a:p>
+            <a:pPr algn="ctr"/>
+            <a:r>
+              <a:rPr sz="1250" b="1">
+                <a:solidFill>
+                  <a:srgbClr val="FFFFFF"/>
+                </a:solidFill>
+                <a:latin typeface="Calibri"/>
+              </a:rPr>
+              <a:t>Sharp
+→ ResNet18</a:t>
+            </a:r>
+          </a:p>
+        </p:txBody>
+      </p:sp>
+      <p:sp>
+        <p:nvSpPr>
+          <p:cNvPr id="8" name="Rounded Rectangle 7"/>
+          <p:cNvSpPr/>
+          <p:nvPr/>
+        </p:nvSpPr>
+        <p:spPr>
+          <a:xfrm>
+            <a:off x="9418320" y="3154680"/>
+            <a:ext cx="2011680" cy="822960"/>
+          </a:xfrm>
+          <a:prstGeom prst="roundRect">
+            <a:avLst>
+              <a:gd name="adj" fmla="val 15000"/>
+            </a:avLst>
+          </a:prstGeom>
+          <a:solidFill>
+            <a:srgbClr val="EB6834"/>
+          </a:solidFill>
+          <a:ln>
+            <a:noFill/>
+          </a:ln>
+          <a:effectLst/>
+        </p:spPr>
+        <p:style>
+          <a:lnRef idx="1">
+            <a:schemeClr val="accent1"/>
+          </a:lnRef>
+          <a:fillRef idx="3">
+            <a:schemeClr val="accent1"/>
+          </a:fillRef>
+          <a:effectRef idx="2">
+            <a:schemeClr val="accent1"/>
+          </a:effectRef>
+          <a:fontRef idx="minor">
+            <a:schemeClr val="lt1"/>
+          </a:fontRef>
+        </p:style>
+        <p:txBody>
+          <a:bodyPr rtlCol="0" anchor="ctr" wrap="square" lIns="50800" rIns="50800"/>
+          <a:lstStyle/>
+          <a:p>
+            <a:pPr algn="ctr"/>
+            <a:r>
+              <a:rPr sz="1250" b="1">
+                <a:solidFill>
+                  <a:srgbClr val="FFFFFF"/>
+                </a:solidFill>
+                <a:latin typeface="Calibri"/>
+              </a:rPr>
+              <a:t>Blurred
+→ ResNet18</a:t>
+            </a:r>
+          </a:p>
+        </p:txBody>
+      </p:sp>
+      <p:sp>
+        <p:nvSpPr>
+          <p:cNvPr id="9" name="Right Arrow 8"/>
+          <p:cNvSpPr/>
+          <p:nvPr/>
+        </p:nvSpPr>
+        <p:spPr>
+          <a:xfrm>
+            <a:off x="9052560" y="4069080"/>
+            <a:ext cx="457200" cy="411480"/>
+          </a:xfrm>
+          <a:prstGeom prst="rightArrow">
+            <a:avLst/>
+          </a:prstGeom>
+          <a:solidFill>
+            <a:srgbClr val="EB6834"/>
+          </a:solidFill>
+          <a:ln>
+            <a:noFill/>
+          </a:ln>
+          <a:effectLst/>
+        </p:spPr>
+        <p:style>
+          <a:lnRef idx="1">
+            <a:schemeClr val="accent1"/>
+          </a:lnRef>
+          <a:fillRef idx="3">
+            <a:schemeClr val="accent1"/>
+          </a:fillRef>
+          <a:effectRef idx="2">
+            <a:schemeClr val="accent1"/>
+          </a:effectRef>
+          <a:fontRef idx="minor">
+            <a:schemeClr val="lt1"/>
+          </a:fontRef>
+        </p:style>
+        <p:txBody>
+          <a:bodyPr rtlCol="0" anchor="ctr"/>
+          <a:lstStyle/>
+          <a:p>
+            <a:pPr algn="ctr"/>
+          </a:p>
+        </p:txBody>
+      </p:sp>
+      <p:sp>
+        <p:nvSpPr>
+          <p:cNvPr id="10" name="Rounded Rectangle 9"/>
+          <p:cNvSpPr/>
+          <p:nvPr/>
+        </p:nvSpPr>
+        <p:spPr>
+          <a:xfrm>
+            <a:off x="7132320" y="4572000"/>
+            <a:ext cx="4297680" cy="822960"/>
+          </a:xfrm>
+          <a:prstGeom prst="roundRect">
+            <a:avLst>
+              <a:gd name="adj" fmla="val 15000"/>
+            </a:avLst>
+          </a:prstGeom>
+          <a:solidFill>
+            <a:srgbClr val="141B46"/>
+          </a:solidFill>
+          <a:ln>
+            <a:noFill/>
+          </a:ln>
+          <a:effectLst/>
+        </p:spPr>
+        <p:style>
+          <a:lnRef idx="1">
+            <a:schemeClr val="accent1"/>
+          </a:lnRef>
+          <a:fillRef idx="3">
+            <a:schemeClr val="accent1"/>
+          </a:fillRef>
+          <a:effectRef idx="2">
+            <a:schemeClr val="accent1"/>
+          </a:effectRef>
+          <a:fontRef idx="minor">
+            <a:schemeClr val="lt1"/>
+          </a:fontRef>
+        </p:style>
+        <p:txBody>
+          <a:bodyPr rtlCol="0" anchor="ctr" wrap="square" lIns="50800" rIns="50800"/>
+          <a:lstStyle/>
+          <a:p>
+            <a:pPr algn="ctr"/>
+            <a:r>
+              <a:rPr sz="1250" b="1">
+                <a:solidFill>
+                  <a:srgbClr val="FFFFFF"/>
+                </a:solidFill>
+                <a:latin typeface="Calibri"/>
+              </a:rPr>
+              <a:t>Compare image-only and fusion
+sharp vs. blurred</a:t>
+            </a:r>
+          </a:p>
+        </p:txBody>
+      </p:sp>
+      <p:sp>
+        <p:nvSpPr>
+          <p:cNvPr id="11" name="TextBox 10"/>
           <p:cNvSpPr txBox="1"/>
           <p:nvPr/>
         </p:nvSpPr>
         <p:spPr>
           <a:xfrm>
             <a:off x="640080" y="6473952"/>
-            <a:ext cx="10972800" cy="274320"/>
-          </a:xfrm>
-          <a:prstGeom prst="rect">
-            <a:avLst/>
-          </a:prstGeom>
-          <a:noFill/>
-        </p:spPr>
-        <p:txBody>
-          <a:bodyPr wrap="square" anchor="t" lIns="0" rIns="0" tIns="0" bIns="0">
-            <a:spAutoFit/>
-          </a:bodyPr>
-          <a:lstStyle/>
-          <a:p>
-            <a:pPr algn="ctr"/>
+            <a:ext cx="5486400" cy="274320"/>
+          </a:xfrm>
+          <a:prstGeom prst="rect">
+            <a:avLst/>
+          </a:prstGeom>
+          <a:noFill/>
+        </p:spPr>
+        <p:txBody>
+          <a:bodyPr wrap="square" anchor="t" lIns="0" rIns="0" tIns="0" bIns="0">
+            <a:spAutoFit/>
+          </a:bodyPr>
+          <a:lstStyle/>
+          <a:p>
+            <a:pPr algn="l"/>
             <a:r>
               <a:rPr sz="900" b="0" i="0">
                 <a:solidFill>
-                  <a:srgbClr val="CADCFC"/>
-                </a:solidFill>
-                <a:latin typeface="Calibri"/>
-              </a:rPr>
-              <a:t>AI-Driven Multimodal Sentiment Analysis for Mental Health Monitoring  |  Group 15  |  18</a:t>
+                  <a:srgbClr val="5B6B7A"/>
+                </a:solidFill>
+                <a:latin typeface="Calibri"/>
+              </a:rPr>
+              <a:t>AI-Driven Multimodal Sentiment Analysis for Mental Health Monitoring</a:t>
+            </a:r>
+          </a:p>
+        </p:txBody>
+      </p:sp>
+      <p:sp>
+        <p:nvSpPr>
+          <p:cNvPr id="12" name="TextBox 11"/>
+          <p:cNvSpPr txBox="1"/>
+          <p:nvPr/>
+        </p:nvSpPr>
+        <p:spPr>
+          <a:xfrm>
+            <a:off x="11521440" y="6473952"/>
+            <a:ext cx="457200" cy="274320"/>
+          </a:xfrm>
+          <a:prstGeom prst="rect">
+            <a:avLst/>
+          </a:prstGeom>
+          <a:noFill/>
+        </p:spPr>
+        <p:txBody>
+          <a:bodyPr wrap="square" anchor="t" lIns="0" rIns="0" tIns="0" bIns="0">
+            <a:spAutoFit/>
+          </a:bodyPr>
+          <a:lstStyle/>
+          <a:p>
+            <a:pPr algn="r"/>
+            <a:r>
+              <a:rPr sz="900" b="0" i="0">
+                <a:solidFill>
+                  <a:srgbClr val="5B6B7A"/>
+                </a:solidFill>
+                <a:latin typeface="Calibri"/>
+              </a:rPr>
+              <a:t>19</a:t>
             </a:r>
           </a:p>
         </p:txBody>
@@ -8768,6 +10294,1548 @@
 </p:sld>
 </file>
 
+<file path=ppt/slides/slide20.xml><?xml version="1.0" encoding="utf-8"?>
+<p:sld xmlns:a="http://schemas.openxmlformats.org/drawingml/2006/main" xmlns:p="http://schemas.openxmlformats.org/presentationml/2006/main" xmlns:r="http://schemas.openxmlformats.org/officeDocument/2006/relationships">
+  <p:cSld>
+    <p:bg>
+      <p:bgPr>
+        <a:solidFill>
+          <a:srgbClr val="F4F7FC"/>
+        </a:solidFill>
+        <a:effectLst/>
+      </p:bgPr>
+    </p:bg>
+    <p:spTree>
+      <p:nvGrpSpPr>
+        <p:cNvPr id="1" name=""/>
+        <p:cNvGrpSpPr/>
+        <p:nvPr/>
+      </p:nvGrpSpPr>
+      <p:grpSpPr/>
+      <p:sp>
+        <p:nvSpPr>
+          <p:cNvPr id="2" name="TextBox 1"/>
+          <p:cNvSpPr txBox="1"/>
+          <p:nvPr/>
+        </p:nvSpPr>
+        <p:spPr>
+          <a:xfrm>
+            <a:off x="640080" y="320040"/>
+            <a:ext cx="7315200" cy="320040"/>
+          </a:xfrm>
+          <a:prstGeom prst="rect">
+            <a:avLst/>
+          </a:prstGeom>
+          <a:noFill/>
+        </p:spPr>
+        <p:txBody>
+          <a:bodyPr wrap="square" anchor="t" lIns="0" rIns="0" tIns="0" bIns="0">
+            <a:spAutoFit/>
+          </a:bodyPr>
+          <a:lstStyle/>
+          <a:p>
+            <a:pPr algn="l"/>
+            <a:r>
+              <a:rPr sz="1200" b="1" i="0">
+                <a:solidFill>
+                  <a:srgbClr val="EB6834"/>
+                </a:solidFill>
+                <a:latin typeface="Calibri"/>
+              </a:rPr>
+              <a:t>RESULTS &amp; VALIDATION</a:t>
+            </a:r>
+          </a:p>
+        </p:txBody>
+      </p:sp>
+      <p:sp>
+        <p:nvSpPr>
+          <p:cNvPr id="3" name="TextBox 2"/>
+          <p:cNvSpPr txBox="1"/>
+          <p:nvPr/>
+        </p:nvSpPr>
+        <p:spPr>
+          <a:xfrm>
+            <a:off x="640080" y="566928"/>
+            <a:ext cx="10789920" cy="822960"/>
+          </a:xfrm>
+          <a:prstGeom prst="rect">
+            <a:avLst/>
+          </a:prstGeom>
+          <a:noFill/>
+        </p:spPr>
+        <p:txBody>
+          <a:bodyPr wrap="square" anchor="t" lIns="0" rIns="0" tIns="0" bIns="0">
+            <a:spAutoFit/>
+          </a:bodyPr>
+          <a:lstStyle/>
+          <a:p>
+            <a:pPr algn="l"/>
+            <a:r>
+              <a:rPr sz="3200" b="1" i="0">
+                <a:solidFill>
+                  <a:srgbClr val="1E2761"/>
+                </a:solidFill>
+                <a:latin typeface="Cambria"/>
+              </a:rPr>
+              <a:t>Study 2 Results: Gain Comes from Embedded Text</a:t>
+            </a:r>
+          </a:p>
+        </p:txBody>
+      </p:sp>
+      <p:sp>
+        <p:nvSpPr>
+          <p:cNvPr id="4" name="Rectangle 3"/>
+          <p:cNvSpPr/>
+          <p:nvPr/>
+        </p:nvSpPr>
+        <p:spPr>
+          <a:xfrm>
+            <a:off x="589280" y="2422300"/>
+            <a:ext cx="6410960" cy="3110679"/>
+          </a:xfrm>
+          <a:prstGeom prst="rect">
+            <a:avLst/>
+          </a:prstGeom>
+          <a:solidFill>
+            <a:srgbClr val="FFFFFF"/>
+          </a:solidFill>
+          <a:ln w="12700">
+            <a:solidFill>
+              <a:srgbClr val="DDE3EC"/>
+            </a:solidFill>
+          </a:ln>
+          <a:effectLst/>
+        </p:spPr>
+        <p:style>
+          <a:lnRef idx="1">
+            <a:schemeClr val="accent1"/>
+          </a:lnRef>
+          <a:fillRef idx="3">
+            <a:schemeClr val="accent1"/>
+          </a:fillRef>
+          <a:effectRef idx="2">
+            <a:schemeClr val="accent1"/>
+          </a:effectRef>
+          <a:fontRef idx="minor">
+            <a:schemeClr val="lt1"/>
+          </a:fontRef>
+        </p:style>
+        <p:txBody>
+          <a:bodyPr rtlCol="0" anchor="ctr"/>
+          <a:lstStyle/>
+          <a:p>
+            <a:pPr algn="ctr"/>
+          </a:p>
+        </p:txBody>
+      </p:sp>
+      <p:pic>
+        <p:nvPicPr>
+          <p:cNvPr id="5" name="Picture 4" descr="sharp_vs_blur.png"/>
+          <p:cNvPicPr>
+            <a:picLocks noChangeAspect="1"/>
+          </p:cNvPicPr>
+          <p:nvPr/>
+        </p:nvPicPr>
+        <p:blipFill>
+          <a:blip r:embed="rId2"/>
+          <a:stretch>
+            <a:fillRect/>
+          </a:stretch>
+        </p:blipFill>
+        <p:spPr>
+          <a:xfrm>
+            <a:off x="640080" y="2473100"/>
+            <a:ext cx="6309360" cy="3009079"/>
+          </a:xfrm>
+          <a:prstGeom prst="rect">
+            <a:avLst/>
+          </a:prstGeom>
+        </p:spPr>
+      </p:pic>
+      <p:sp>
+        <p:nvSpPr>
+          <p:cNvPr id="6" name="TextBox 5"/>
+          <p:cNvSpPr txBox="1"/>
+          <p:nvPr/>
+        </p:nvSpPr>
+        <p:spPr>
+          <a:xfrm>
+            <a:off x="7223760" y="1783080"/>
+            <a:ext cx="4297680" cy="4480560"/>
+          </a:xfrm>
+          <a:prstGeom prst="rect">
+            <a:avLst/>
+          </a:prstGeom>
+          <a:noFill/>
+        </p:spPr>
+        <p:txBody>
+          <a:bodyPr wrap="square" lIns="0" rIns="0">
+            <a:spAutoFit/>
+          </a:bodyPr>
+          <a:lstStyle/>
+          <a:p>
+            <a:pPr algn="l">
+              <a:lnSpc>
+                <a:spcPct val="108000"/>
+              </a:lnSpc>
+              <a:spcAft>
+                <a:spcPts val="1100"/>
+              </a:spcAft>
+            </a:pPr>
+            <a:r>
+              <a:rPr sz="1300">
+                <a:solidFill>
+                  <a:srgbClr val="16213E"/>
+                </a:solidFill>
+                <a:latin typeface="Calibri"/>
+              </a:rPr>
+              <a:t>•  Sharp memes: fusion reaches 52.6% accuracy / 36.6% macro-F1, beating every unimodal model</a:t>
+            </a:r>
+          </a:p>
+          <a:p>
+            <a:pPr algn="l">
+              <a:lnSpc>
+                <a:spcPct val="108000"/>
+              </a:lnSpc>
+              <a:spcAft>
+                <a:spcPts val="1100"/>
+              </a:spcAft>
+            </a:pPr>
+            <a:r>
+              <a:rPr sz="1300">
+                <a:solidFill>
+                  <a:srgbClr val="16213E"/>
+                </a:solidFill>
+                <a:latin typeface="Calibri"/>
+              </a:rPr>
+              <a:t>•  Blurring barely affects image-only (−1.4 pp accuracy)…</a:t>
+            </a:r>
+          </a:p>
+          <a:p>
+            <a:pPr algn="l">
+              <a:lnSpc>
+                <a:spcPct val="108000"/>
+              </a:lnSpc>
+              <a:spcAft>
+                <a:spcPts val="1100"/>
+              </a:spcAft>
+            </a:pPr>
+            <a:r>
+              <a:rPr sz="1300">
+                <a:solidFill>
+                  <a:srgbClr val="16213E"/>
+                </a:solidFill>
+                <a:latin typeface="Calibri"/>
+              </a:rPr>
+              <a:t>•  …but removes most of the fusion gain (−10.9 pp accuracy, −3.6 pp macro-F1)</a:t>
+            </a:r>
+          </a:p>
+          <a:p>
+            <a:pPr algn="l">
+              <a:lnSpc>
+                <a:spcPct val="108000"/>
+              </a:lnSpc>
+              <a:spcAft>
+                <a:spcPts val="1100"/>
+              </a:spcAft>
+            </a:pPr>
+            <a:r>
+              <a:rPr sz="1300">
+                <a:solidFill>
+                  <a:srgbClr val="16213E"/>
+                </a:solidFill>
+                <a:latin typeface="Calibri"/>
+              </a:rPr>
+              <a:t>•  Blurred fusion is within 2.3 pp of text-only accuracy</a:t>
+            </a:r>
+          </a:p>
+          <a:p>
+            <a:pPr algn="l">
+              <a:lnSpc>
+                <a:spcPct val="108000"/>
+              </a:lnSpc>
+              <a:spcAft>
+                <a:spcPts val="1100"/>
+              </a:spcAft>
+            </a:pPr>
+            <a:r>
+              <a:rPr sz="1300">
+                <a:solidFill>
+                  <a:srgbClr val="16213E"/>
+                </a:solidFill>
+                <a:latin typeface="Calibri"/>
+              </a:rPr>
+              <a:t>•  Takeaway: on memes, "image" and "text" are not independent evidence. Fusion benefit depends on the data</a:t>
+            </a:r>
+          </a:p>
+        </p:txBody>
+      </p:sp>
+      <p:sp>
+        <p:nvSpPr>
+          <p:cNvPr id="7" name="TextBox 6"/>
+          <p:cNvSpPr txBox="1"/>
+          <p:nvPr/>
+        </p:nvSpPr>
+        <p:spPr>
+          <a:xfrm>
+            <a:off x="640080" y="6473952"/>
+            <a:ext cx="5486400" cy="274320"/>
+          </a:xfrm>
+          <a:prstGeom prst="rect">
+            <a:avLst/>
+          </a:prstGeom>
+          <a:noFill/>
+        </p:spPr>
+        <p:txBody>
+          <a:bodyPr wrap="square" anchor="t" lIns="0" rIns="0" tIns="0" bIns="0">
+            <a:spAutoFit/>
+          </a:bodyPr>
+          <a:lstStyle/>
+          <a:p>
+            <a:pPr algn="l"/>
+            <a:r>
+              <a:rPr sz="900" b="0" i="0">
+                <a:solidFill>
+                  <a:srgbClr val="5B6B7A"/>
+                </a:solidFill>
+                <a:latin typeface="Calibri"/>
+              </a:rPr>
+              <a:t>AI-Driven Multimodal Sentiment Analysis for Mental Health Monitoring</a:t>
+            </a:r>
+          </a:p>
+        </p:txBody>
+      </p:sp>
+      <p:sp>
+        <p:nvSpPr>
+          <p:cNvPr id="8" name="TextBox 7"/>
+          <p:cNvSpPr txBox="1"/>
+          <p:nvPr/>
+        </p:nvSpPr>
+        <p:spPr>
+          <a:xfrm>
+            <a:off x="11521440" y="6473952"/>
+            <a:ext cx="457200" cy="274320"/>
+          </a:xfrm>
+          <a:prstGeom prst="rect">
+            <a:avLst/>
+          </a:prstGeom>
+          <a:noFill/>
+        </p:spPr>
+        <p:txBody>
+          <a:bodyPr wrap="square" anchor="t" lIns="0" rIns="0" tIns="0" bIns="0">
+            <a:spAutoFit/>
+          </a:bodyPr>
+          <a:lstStyle/>
+          <a:p>
+            <a:pPr algn="r"/>
+            <a:r>
+              <a:rPr sz="900" b="0" i="0">
+                <a:solidFill>
+                  <a:srgbClr val="5B6B7A"/>
+                </a:solidFill>
+                <a:latin typeface="Calibri"/>
+              </a:rPr>
+              <a:t>20</a:t>
+            </a:r>
+          </a:p>
+        </p:txBody>
+      </p:sp>
+    </p:spTree>
+  </p:cSld>
+  <p:clrMapOvr>
+    <a:masterClrMapping/>
+  </p:clrMapOvr>
+</p:sld>
+</file>
+
+<file path=ppt/slides/slide21.xml><?xml version="1.0" encoding="utf-8"?>
+<p:sld xmlns:a="http://schemas.openxmlformats.org/drawingml/2006/main" xmlns:p="http://schemas.openxmlformats.org/presentationml/2006/main" xmlns:r="http://schemas.openxmlformats.org/officeDocument/2006/relationships">
+  <p:cSld>
+    <p:bg>
+      <p:bgPr>
+        <a:solidFill>
+          <a:srgbClr val="F4F7FC"/>
+        </a:solidFill>
+        <a:effectLst/>
+      </p:bgPr>
+    </p:bg>
+    <p:spTree>
+      <p:nvGrpSpPr>
+        <p:cNvPr id="1" name=""/>
+        <p:cNvGrpSpPr/>
+        <p:nvPr/>
+      </p:nvGrpSpPr>
+      <p:grpSpPr/>
+      <p:sp>
+        <p:nvSpPr>
+          <p:cNvPr id="2" name="TextBox 1"/>
+          <p:cNvSpPr txBox="1"/>
+          <p:nvPr/>
+        </p:nvSpPr>
+        <p:spPr>
+          <a:xfrm>
+            <a:off x="640080" y="320040"/>
+            <a:ext cx="7315200" cy="320040"/>
+          </a:xfrm>
+          <a:prstGeom prst="rect">
+            <a:avLst/>
+          </a:prstGeom>
+          <a:noFill/>
+        </p:spPr>
+        <p:txBody>
+          <a:bodyPr wrap="square" anchor="t" lIns="0" rIns="0" tIns="0" bIns="0">
+            <a:spAutoFit/>
+          </a:bodyPr>
+          <a:lstStyle/>
+          <a:p>
+            <a:pPr algn="l"/>
+            <a:r>
+              <a:rPr sz="1200" b="1" i="0">
+                <a:solidFill>
+                  <a:srgbClr val="EB6834"/>
+                </a:solidFill>
+                <a:latin typeface="Calibri"/>
+              </a:rPr>
+              <a:t>DISCUSSION</a:t>
+            </a:r>
+          </a:p>
+        </p:txBody>
+      </p:sp>
+      <p:sp>
+        <p:nvSpPr>
+          <p:cNvPr id="3" name="TextBox 2"/>
+          <p:cNvSpPr txBox="1"/>
+          <p:nvPr/>
+        </p:nvSpPr>
+        <p:spPr>
+          <a:xfrm>
+            <a:off x="640080" y="566928"/>
+            <a:ext cx="10789920" cy="822960"/>
+          </a:xfrm>
+          <a:prstGeom prst="rect">
+            <a:avLst/>
+          </a:prstGeom>
+          <a:noFill/>
+        </p:spPr>
+        <p:txBody>
+          <a:bodyPr wrap="square" anchor="t" lIns="0" rIns="0" tIns="0" bIns="0">
+            <a:spAutoFit/>
+          </a:bodyPr>
+          <a:lstStyle/>
+          <a:p>
+            <a:pPr algn="l"/>
+            <a:r>
+              <a:rPr sz="3200" b="1" i="0">
+                <a:solidFill>
+                  <a:srgbClr val="1E2761"/>
+                </a:solidFill>
+                <a:latin typeface="Cambria"/>
+              </a:rPr>
+              <a:t>Contribution &amp; Limitations</a:t>
+            </a:r>
+          </a:p>
+        </p:txBody>
+      </p:sp>
+      <p:sp>
+        <p:nvSpPr>
+          <p:cNvPr id="4" name="Rounded Rectangle 3"/>
+          <p:cNvSpPr/>
+          <p:nvPr/>
+        </p:nvSpPr>
+        <p:spPr>
+          <a:xfrm>
+            <a:off x="640080" y="1783080"/>
+            <a:ext cx="5394960" cy="4206240"/>
+          </a:xfrm>
+          <a:prstGeom prst="roundRect">
+            <a:avLst>
+              <a:gd name="adj" fmla="val 4000"/>
+            </a:avLst>
+          </a:prstGeom>
+          <a:solidFill>
+            <a:srgbClr val="FFFFFF"/>
+          </a:solidFill>
+          <a:ln w="15875">
+            <a:solidFill>
+              <a:srgbClr val="EB6834"/>
+            </a:solidFill>
+          </a:ln>
+          <a:effectLst/>
+        </p:spPr>
+        <p:style>
+          <a:lnRef idx="1">
+            <a:schemeClr val="accent1"/>
+          </a:lnRef>
+          <a:fillRef idx="3">
+            <a:schemeClr val="accent1"/>
+          </a:fillRef>
+          <a:effectRef idx="2">
+            <a:schemeClr val="accent1"/>
+          </a:effectRef>
+          <a:fontRef idx="minor">
+            <a:schemeClr val="lt1"/>
+          </a:fontRef>
+        </p:style>
+        <p:txBody>
+          <a:bodyPr rtlCol="0" anchor="ctr"/>
+          <a:lstStyle/>
+          <a:p>
+            <a:pPr algn="ctr"/>
+          </a:p>
+        </p:txBody>
+      </p:sp>
+      <p:sp>
+        <p:nvSpPr>
+          <p:cNvPr id="5" name="TextBox 4"/>
+          <p:cNvSpPr txBox="1"/>
+          <p:nvPr/>
+        </p:nvSpPr>
+        <p:spPr>
+          <a:xfrm>
+            <a:off x="868680" y="1965960"/>
+            <a:ext cx="4937760" cy="457200"/>
+          </a:xfrm>
+          <a:prstGeom prst="rect">
+            <a:avLst/>
+          </a:prstGeom>
+          <a:noFill/>
+        </p:spPr>
+        <p:txBody>
+          <a:bodyPr wrap="square" anchor="t" lIns="0" rIns="0" tIns="0" bIns="0">
+            <a:spAutoFit/>
+          </a:bodyPr>
+          <a:lstStyle/>
+          <a:p>
+            <a:pPr algn="l"/>
+            <a:r>
+              <a:rPr sz="1700" b="1" i="0">
+                <a:solidFill>
+                  <a:srgbClr val="EB6834"/>
+                </a:solidFill>
+                <a:latin typeface="Cambria"/>
+              </a:rPr>
+              <a:t>Contribution</a:t>
+            </a:r>
+          </a:p>
+        </p:txBody>
+      </p:sp>
+      <p:sp>
+        <p:nvSpPr>
+          <p:cNvPr id="6" name="TextBox 5"/>
+          <p:cNvSpPr txBox="1"/>
+          <p:nvPr/>
+        </p:nvSpPr>
+        <p:spPr>
+          <a:xfrm>
+            <a:off x="868680" y="2468880"/>
+            <a:ext cx="4937760" cy="3291840"/>
+          </a:xfrm>
+          <a:prstGeom prst="rect">
+            <a:avLst/>
+          </a:prstGeom>
+          <a:noFill/>
+        </p:spPr>
+        <p:txBody>
+          <a:bodyPr wrap="square" lIns="0" rIns="0">
+            <a:spAutoFit/>
+          </a:bodyPr>
+          <a:lstStyle/>
+          <a:p>
+            <a:pPr algn="l">
+              <a:lnSpc>
+                <a:spcPct val="108000"/>
+              </a:lnSpc>
+              <a:spcAft>
+                <a:spcPts val="600"/>
+              </a:spcAft>
+            </a:pPr>
+            <a:r>
+              <a:rPr sz="1250">
+                <a:solidFill>
+                  <a:srgbClr val="16213E"/>
+                </a:solidFill>
+                <a:latin typeface="Calibri"/>
+              </a:rPr>
+              <a:t>•  Real, same-conditions unimodal-vs-multimodal comparison on adequately-sized social-media data</a:t>
+            </a:r>
+          </a:p>
+          <a:p>
+            <a:pPr algn="l">
+              <a:lnSpc>
+                <a:spcPct val="108000"/>
+              </a:lnSpc>
+              <a:spcAft>
+                <a:spcPts val="600"/>
+              </a:spcAft>
+            </a:pPr>
+            <a:r>
+              <a:rPr sz="1250">
+                <a:solidFill>
+                  <a:srgbClr val="16213E"/>
+                </a:solidFill>
+                <a:latin typeface="Calibri"/>
+              </a:rPr>
+              <a:t>•  Honest modality-conflict analysis, not a blanket “multimodal wins” claim</a:t>
+            </a:r>
+          </a:p>
+          <a:p>
+            <a:pPr algn="l">
+              <a:lnSpc>
+                <a:spcPct val="108000"/>
+              </a:lnSpc>
+              <a:spcAft>
+                <a:spcPts val="600"/>
+              </a:spcAft>
+            </a:pPr>
+            <a:r>
+              <a:rPr sz="1250">
+                <a:solidFill>
+                  <a:srgbClr val="16213E"/>
+                </a:solidFill>
+                <a:latin typeface="Calibri"/>
+              </a:rPr>
+              <a:t>•  Documented resource-constrained reproduction (CPU-only, 8GB RAM)</a:t>
+            </a:r>
+          </a:p>
+        </p:txBody>
+      </p:sp>
+      <p:sp>
+        <p:nvSpPr>
+          <p:cNvPr id="7" name="Rounded Rectangle 6"/>
+          <p:cNvSpPr/>
+          <p:nvPr/>
+        </p:nvSpPr>
+        <p:spPr>
+          <a:xfrm>
+            <a:off x="6172200" y="1783080"/>
+            <a:ext cx="5394960" cy="4206240"/>
+          </a:xfrm>
+          <a:prstGeom prst="roundRect">
+            <a:avLst>
+              <a:gd name="adj" fmla="val 4000"/>
+            </a:avLst>
+          </a:prstGeom>
+          <a:solidFill>
+            <a:srgbClr val="FFFFFF"/>
+          </a:solidFill>
+          <a:ln w="15875">
+            <a:solidFill>
+              <a:srgbClr val="CADCFC"/>
+            </a:solidFill>
+          </a:ln>
+          <a:effectLst/>
+        </p:spPr>
+        <p:style>
+          <a:lnRef idx="1">
+            <a:schemeClr val="accent1"/>
+          </a:lnRef>
+          <a:fillRef idx="3">
+            <a:schemeClr val="accent1"/>
+          </a:fillRef>
+          <a:effectRef idx="2">
+            <a:schemeClr val="accent1"/>
+          </a:effectRef>
+          <a:fontRef idx="minor">
+            <a:schemeClr val="lt1"/>
+          </a:fontRef>
+        </p:style>
+        <p:txBody>
+          <a:bodyPr rtlCol="0" anchor="ctr"/>
+          <a:lstStyle/>
+          <a:p>
+            <a:pPr algn="ctr"/>
+          </a:p>
+        </p:txBody>
+      </p:sp>
+      <p:sp>
+        <p:nvSpPr>
+          <p:cNvPr id="8" name="TextBox 7"/>
+          <p:cNvSpPr txBox="1"/>
+          <p:nvPr/>
+        </p:nvSpPr>
+        <p:spPr>
+          <a:xfrm>
+            <a:off x="6400800" y="1965960"/>
+            <a:ext cx="4937760" cy="457200"/>
+          </a:xfrm>
+          <a:prstGeom prst="rect">
+            <a:avLst/>
+          </a:prstGeom>
+          <a:noFill/>
+        </p:spPr>
+        <p:txBody>
+          <a:bodyPr wrap="square" anchor="t" lIns="0" rIns="0" tIns="0" bIns="0">
+            <a:spAutoFit/>
+          </a:bodyPr>
+          <a:lstStyle/>
+          <a:p>
+            <a:pPr algn="l"/>
+            <a:r>
+              <a:rPr sz="1700" b="1" i="0">
+                <a:solidFill>
+                  <a:srgbClr val="1E2761"/>
+                </a:solidFill>
+                <a:latin typeface="Cambria"/>
+              </a:rPr>
+              <a:t>Limitations</a:t>
+            </a:r>
+          </a:p>
+        </p:txBody>
+      </p:sp>
+      <p:sp>
+        <p:nvSpPr>
+          <p:cNvPr id="9" name="TextBox 8"/>
+          <p:cNvSpPr txBox="1"/>
+          <p:nvPr/>
+        </p:nvSpPr>
+        <p:spPr>
+          <a:xfrm>
+            <a:off x="6400800" y="2468880"/>
+            <a:ext cx="4937760" cy="3291840"/>
+          </a:xfrm>
+          <a:prstGeom prst="rect">
+            <a:avLst/>
+          </a:prstGeom>
+          <a:noFill/>
+        </p:spPr>
+        <p:txBody>
+          <a:bodyPr wrap="square" lIns="0" rIns="0">
+            <a:spAutoFit/>
+          </a:bodyPr>
+          <a:lstStyle/>
+          <a:p>
+            <a:pPr algn="l">
+              <a:lnSpc>
+                <a:spcPct val="108000"/>
+              </a:lnSpc>
+              <a:spcAft>
+                <a:spcPts val="600"/>
+              </a:spcAft>
+            </a:pPr>
+            <a:r>
+              <a:rPr sz="1250">
+                <a:solidFill>
+                  <a:srgbClr val="16213E"/>
+                </a:solidFill>
+                <a:latin typeface="Calibri"/>
+              </a:rPr>
+              <a:t>•  Sentiment labels, not mental-health-specific labels (documented proxy)</a:t>
+            </a:r>
+          </a:p>
+          <a:p>
+            <a:pPr algn="l">
+              <a:lnSpc>
+                <a:spcPct val="108000"/>
+              </a:lnSpc>
+              <a:spcAft>
+                <a:spcPts val="600"/>
+              </a:spcAft>
+            </a:pPr>
+            <a:r>
+              <a:rPr sz="1250">
+                <a:solidFill>
+                  <a:srgbClr val="16213E"/>
+                </a:solidFill>
+                <a:latin typeface="Calibri"/>
+              </a:rPr>
+              <a:t>•  English-language, 2015–16-era Twitter data only</a:t>
+            </a:r>
+          </a:p>
+          <a:p>
+            <a:pPr algn="l">
+              <a:lnSpc>
+                <a:spcPct val="108000"/>
+              </a:lnSpc>
+              <a:spcAft>
+                <a:spcPts val="600"/>
+              </a:spcAft>
+            </a:pPr>
+            <a:r>
+              <a:rPr sz="1250">
+                <a:solidFill>
+                  <a:srgbClr val="16213E"/>
+                </a:solidFill>
+                <a:latin typeface="Calibri"/>
+              </a:rPr>
+              <a:t>•  Small (~1–2%) cross-split duplication in the published split used</a:t>
+            </a:r>
+          </a:p>
+          <a:p>
+            <a:pPr algn="l">
+              <a:lnSpc>
+                <a:spcPct val="108000"/>
+              </a:lnSpc>
+              <a:spcAft>
+                <a:spcPts val="600"/>
+              </a:spcAft>
+            </a:pPr>
+            <a:r>
+              <a:rPr sz="1250">
+                <a:solidFill>
+                  <a:srgbClr val="16213E"/>
+                </a:solidFill>
+                <a:latin typeface="Calibri"/>
+              </a:rPr>
+              <a:t>•  From-scratch CNN baseline was compute-constrained</a:t>
+            </a:r>
+          </a:p>
+        </p:txBody>
+      </p:sp>
+      <p:sp>
+        <p:nvSpPr>
+          <p:cNvPr id="10" name="TextBox 9"/>
+          <p:cNvSpPr txBox="1"/>
+          <p:nvPr/>
+        </p:nvSpPr>
+        <p:spPr>
+          <a:xfrm>
+            <a:off x="640080" y="6473952"/>
+            <a:ext cx="5486400" cy="274320"/>
+          </a:xfrm>
+          <a:prstGeom prst="rect">
+            <a:avLst/>
+          </a:prstGeom>
+          <a:noFill/>
+        </p:spPr>
+        <p:txBody>
+          <a:bodyPr wrap="square" anchor="t" lIns="0" rIns="0" tIns="0" bIns="0">
+            <a:spAutoFit/>
+          </a:bodyPr>
+          <a:lstStyle/>
+          <a:p>
+            <a:pPr algn="l"/>
+            <a:r>
+              <a:rPr sz="900" b="0" i="0">
+                <a:solidFill>
+                  <a:srgbClr val="5B6B7A"/>
+                </a:solidFill>
+                <a:latin typeface="Calibri"/>
+              </a:rPr>
+              <a:t>AI-Driven Multimodal Sentiment Analysis for Mental Health Monitoring</a:t>
+            </a:r>
+          </a:p>
+        </p:txBody>
+      </p:sp>
+      <p:sp>
+        <p:nvSpPr>
+          <p:cNvPr id="11" name="TextBox 10"/>
+          <p:cNvSpPr txBox="1"/>
+          <p:nvPr/>
+        </p:nvSpPr>
+        <p:spPr>
+          <a:xfrm>
+            <a:off x="11521440" y="6473952"/>
+            <a:ext cx="457200" cy="274320"/>
+          </a:xfrm>
+          <a:prstGeom prst="rect">
+            <a:avLst/>
+          </a:prstGeom>
+          <a:noFill/>
+        </p:spPr>
+        <p:txBody>
+          <a:bodyPr wrap="square" anchor="t" lIns="0" rIns="0" tIns="0" bIns="0">
+            <a:spAutoFit/>
+          </a:bodyPr>
+          <a:lstStyle/>
+          <a:p>
+            <a:pPr algn="r"/>
+            <a:r>
+              <a:rPr sz="900" b="0" i="0">
+                <a:solidFill>
+                  <a:srgbClr val="5B6B7A"/>
+                </a:solidFill>
+                <a:latin typeface="Calibri"/>
+              </a:rPr>
+              <a:t>21</a:t>
+            </a:r>
+          </a:p>
+        </p:txBody>
+      </p:sp>
+    </p:spTree>
+  </p:cSld>
+  <p:clrMapOvr>
+    <a:masterClrMapping/>
+  </p:clrMapOvr>
+</p:sld>
+</file>
+
+<file path=ppt/slides/slide22.xml><?xml version="1.0" encoding="utf-8"?>
+<p:sld xmlns:a="http://schemas.openxmlformats.org/drawingml/2006/main" xmlns:p="http://schemas.openxmlformats.org/presentationml/2006/main" xmlns:r="http://schemas.openxmlformats.org/officeDocument/2006/relationships">
+  <p:cSld>
+    <p:bg>
+      <p:bgPr>
+        <a:solidFill>
+          <a:srgbClr val="F4F7FC"/>
+        </a:solidFill>
+        <a:effectLst/>
+      </p:bgPr>
+    </p:bg>
+    <p:spTree>
+      <p:nvGrpSpPr>
+        <p:cNvPr id="1" name=""/>
+        <p:cNvGrpSpPr/>
+        <p:nvPr/>
+      </p:nvGrpSpPr>
+      <p:grpSpPr/>
+      <p:sp>
+        <p:nvSpPr>
+          <p:cNvPr id="2" name="TextBox 1"/>
+          <p:cNvSpPr txBox="1"/>
+          <p:nvPr/>
+        </p:nvSpPr>
+        <p:spPr>
+          <a:xfrm>
+            <a:off x="640080" y="320040"/>
+            <a:ext cx="7315200" cy="320040"/>
+          </a:xfrm>
+          <a:prstGeom prst="rect">
+            <a:avLst/>
+          </a:prstGeom>
+          <a:noFill/>
+        </p:spPr>
+        <p:txBody>
+          <a:bodyPr wrap="square" anchor="t" lIns="0" rIns="0" tIns="0" bIns="0">
+            <a:spAutoFit/>
+          </a:bodyPr>
+          <a:lstStyle/>
+          <a:p>
+            <a:pPr algn="l"/>
+            <a:r>
+              <a:rPr sz="1200" b="1" i="0">
+                <a:solidFill>
+                  <a:srgbClr val="EB6834"/>
+                </a:solidFill>
+                <a:latin typeface="Calibri"/>
+              </a:rPr>
+              <a:t>WHAT REMAINS</a:t>
+            </a:r>
+          </a:p>
+        </p:txBody>
+      </p:sp>
+      <p:sp>
+        <p:nvSpPr>
+          <p:cNvPr id="3" name="TextBox 2"/>
+          <p:cNvSpPr txBox="1"/>
+          <p:nvPr/>
+        </p:nvSpPr>
+        <p:spPr>
+          <a:xfrm>
+            <a:off x="640080" y="566928"/>
+            <a:ext cx="10789920" cy="822960"/>
+          </a:xfrm>
+          <a:prstGeom prst="rect">
+            <a:avLst/>
+          </a:prstGeom>
+          <a:noFill/>
+        </p:spPr>
+        <p:txBody>
+          <a:bodyPr wrap="square" anchor="t" lIns="0" rIns="0" tIns="0" bIns="0">
+            <a:spAutoFit/>
+          </a:bodyPr>
+          <a:lstStyle/>
+          <a:p>
+            <a:pPr algn="l"/>
+            <a:r>
+              <a:rPr sz="3200" b="1" i="0">
+                <a:solidFill>
+                  <a:srgbClr val="1E2761"/>
+                </a:solidFill>
+                <a:latin typeface="Cambria"/>
+              </a:rPr>
+              <a:t>Next Plan &amp; Timeline</a:t>
+            </a:r>
+          </a:p>
+        </p:txBody>
+      </p:sp>
+      <p:sp>
+        <p:nvSpPr>
+          <p:cNvPr id="4" name="Rectangle 3"/>
+          <p:cNvSpPr/>
+          <p:nvPr/>
+        </p:nvSpPr>
+        <p:spPr>
+          <a:xfrm>
+            <a:off x="497840" y="2479040"/>
+            <a:ext cx="6410960" cy="2905760"/>
+          </a:xfrm>
+          <a:prstGeom prst="rect">
+            <a:avLst/>
+          </a:prstGeom>
+          <a:solidFill>
+            <a:srgbClr val="FFFFFF"/>
+          </a:solidFill>
+          <a:ln w="12700">
+            <a:solidFill>
+              <a:srgbClr val="DDE3EC"/>
+            </a:solidFill>
+          </a:ln>
+          <a:effectLst/>
+        </p:spPr>
+        <p:style>
+          <a:lnRef idx="1">
+            <a:schemeClr val="accent1"/>
+          </a:lnRef>
+          <a:fillRef idx="3">
+            <a:schemeClr val="accent1"/>
+          </a:fillRef>
+          <a:effectRef idx="2">
+            <a:schemeClr val="accent1"/>
+          </a:effectRef>
+          <a:fontRef idx="minor">
+            <a:schemeClr val="lt1"/>
+          </a:fontRef>
+        </p:style>
+        <p:txBody>
+          <a:bodyPr rtlCol="0" anchor="ctr"/>
+          <a:lstStyle/>
+          <a:p>
+            <a:pPr algn="ctr"/>
+          </a:p>
+        </p:txBody>
+      </p:sp>
+      <p:pic>
+        <p:nvPicPr>
+          <p:cNvPr id="5" name="Picture 4" descr="gantt_viva2.png"/>
+          <p:cNvPicPr>
+            <a:picLocks noChangeAspect="1"/>
+          </p:cNvPicPr>
+          <p:nvPr/>
+        </p:nvPicPr>
+        <p:blipFill>
+          <a:blip r:embed="rId2"/>
+          <a:stretch>
+            <a:fillRect/>
+          </a:stretch>
+        </p:blipFill>
+        <p:spPr>
+          <a:xfrm>
+            <a:off x="548640" y="2529840"/>
+            <a:ext cx="6309360" cy="2804160"/>
+          </a:xfrm>
+          <a:prstGeom prst="rect">
+            <a:avLst/>
+          </a:prstGeom>
+        </p:spPr>
+      </p:pic>
+      <p:sp>
+        <p:nvSpPr>
+          <p:cNvPr id="6" name="TextBox 5"/>
+          <p:cNvSpPr txBox="1"/>
+          <p:nvPr/>
+        </p:nvSpPr>
+        <p:spPr>
+          <a:xfrm>
+            <a:off x="7132320" y="1783080"/>
+            <a:ext cx="4389120" cy="4480560"/>
+          </a:xfrm>
+          <a:prstGeom prst="rect">
+            <a:avLst/>
+          </a:prstGeom>
+          <a:noFill/>
+        </p:spPr>
+        <p:txBody>
+          <a:bodyPr wrap="square" lIns="0" rIns="0">
+            <a:spAutoFit/>
+          </a:bodyPr>
+          <a:lstStyle/>
+          <a:p>
+            <a:pPr algn="l">
+              <a:lnSpc>
+                <a:spcPct val="108000"/>
+              </a:lnSpc>
+              <a:spcAft>
+                <a:spcPts val="1000"/>
+              </a:spcAft>
+            </a:pPr>
+            <a:r>
+              <a:rPr sz="1300">
+                <a:solidFill>
+                  <a:srgbClr val="16213E"/>
+                </a:solidFill>
+                <a:latin typeface="Calibri"/>
+              </a:rPr>
+              <a:t>•  Oct 2026: re-run fusion/CNN over 5 seeds (mean ± std) + McNemar / bootstrap significance tests</a:t>
+            </a:r>
+          </a:p>
+          <a:p>
+            <a:pPr algn="l">
+              <a:lnSpc>
+                <a:spcPct val="108000"/>
+              </a:lnSpc>
+              <a:spcAft>
+                <a:spcPts val="1000"/>
+              </a:spcAft>
+            </a:pPr>
+            <a:r>
+              <a:rPr sz="1300">
+                <a:solidFill>
+                  <a:srgbClr val="16213E"/>
+                </a:solidFill>
+                <a:latin typeface="Calibri"/>
+              </a:rPr>
+              <a:t>•  Nov 2026: OCR-based text-masking ablation; full 6,992-meme Memotion run</a:t>
+            </a:r>
+          </a:p>
+          <a:p>
+            <a:pPr algn="l">
+              <a:lnSpc>
+                <a:spcPct val="108000"/>
+              </a:lnSpc>
+              <a:spcAft>
+                <a:spcPts val="1000"/>
+              </a:spcAft>
+            </a:pPr>
+            <a:r>
+              <a:rPr sz="1300">
+                <a:solidFill>
+                  <a:srgbClr val="16213E"/>
+                </a:solidFill>
+                <a:latin typeface="Calibri"/>
+              </a:rPr>
+              <a:t>•  Nov–Dec 2026: cross-modal attention fusion (stretch goal)</a:t>
+            </a:r>
+          </a:p>
+          <a:p>
+            <a:pPr algn="l">
+              <a:lnSpc>
+                <a:spcPct val="108000"/>
+              </a:lnSpc>
+              <a:spcAft>
+                <a:spcPts val="1000"/>
+              </a:spcAft>
+            </a:pPr>
+            <a:r>
+              <a:rPr sz="1300">
+                <a:solidFill>
+                  <a:srgbClr val="16213E"/>
+                </a:solidFill>
+                <a:latin typeface="Calibri"/>
+              </a:rPr>
+              <a:t>•  Dec 2026: merge both studies into one self-contained manuscript</a:t>
+            </a:r>
+          </a:p>
+          <a:p>
+            <a:pPr algn="l">
+              <a:lnSpc>
+                <a:spcPct val="108000"/>
+              </a:lnSpc>
+              <a:spcAft>
+                <a:spcPts val="1000"/>
+              </a:spcAft>
+            </a:pPr>
+            <a:r>
+              <a:rPr sz="1300">
+                <a:solidFill>
+                  <a:srgbClr val="16213E"/>
+                </a:solidFill>
+                <a:latin typeface="Calibri"/>
+              </a:rPr>
+              <a:t>•  Jan 2027: submit to target venue (e.g. IEEE ICCCNT), chosen with the guide</a:t>
+            </a:r>
+          </a:p>
+          <a:p>
+            <a:pPr algn="l">
+              <a:lnSpc>
+                <a:spcPct val="108000"/>
+              </a:lnSpc>
+              <a:spcAft>
+                <a:spcPts val="1000"/>
+              </a:spcAft>
+            </a:pPr>
+            <a:r>
+              <a:rPr sz="1300">
+                <a:solidFill>
+                  <a:srgbClr val="16213E"/>
+                </a:solidFill>
+                <a:latin typeface="Calibri"/>
+              </a:rPr>
+              <a:t>•  Feb–Mar 2027: revisions, final report, final demo</a:t>
+            </a:r>
+          </a:p>
+        </p:txBody>
+      </p:sp>
+      <p:sp>
+        <p:nvSpPr>
+          <p:cNvPr id="7" name="TextBox 6"/>
+          <p:cNvSpPr txBox="1"/>
+          <p:nvPr/>
+        </p:nvSpPr>
+        <p:spPr>
+          <a:xfrm>
+            <a:off x="640080" y="6473952"/>
+            <a:ext cx="5486400" cy="274320"/>
+          </a:xfrm>
+          <a:prstGeom prst="rect">
+            <a:avLst/>
+          </a:prstGeom>
+          <a:noFill/>
+        </p:spPr>
+        <p:txBody>
+          <a:bodyPr wrap="square" anchor="t" lIns="0" rIns="0" tIns="0" bIns="0">
+            <a:spAutoFit/>
+          </a:bodyPr>
+          <a:lstStyle/>
+          <a:p>
+            <a:pPr algn="l"/>
+            <a:r>
+              <a:rPr sz="900" b="0" i="0">
+                <a:solidFill>
+                  <a:srgbClr val="5B6B7A"/>
+                </a:solidFill>
+                <a:latin typeface="Calibri"/>
+              </a:rPr>
+              <a:t>AI-Driven Multimodal Sentiment Analysis for Mental Health Monitoring</a:t>
+            </a:r>
+          </a:p>
+        </p:txBody>
+      </p:sp>
+      <p:sp>
+        <p:nvSpPr>
+          <p:cNvPr id="8" name="TextBox 7"/>
+          <p:cNvSpPr txBox="1"/>
+          <p:nvPr/>
+        </p:nvSpPr>
+        <p:spPr>
+          <a:xfrm>
+            <a:off x="11521440" y="6473952"/>
+            <a:ext cx="457200" cy="274320"/>
+          </a:xfrm>
+          <a:prstGeom prst="rect">
+            <a:avLst/>
+          </a:prstGeom>
+          <a:noFill/>
+        </p:spPr>
+        <p:txBody>
+          <a:bodyPr wrap="square" anchor="t" lIns="0" rIns="0" tIns="0" bIns="0">
+            <a:spAutoFit/>
+          </a:bodyPr>
+          <a:lstStyle/>
+          <a:p>
+            <a:pPr algn="r"/>
+            <a:r>
+              <a:rPr sz="900" b="0" i="0">
+                <a:solidFill>
+                  <a:srgbClr val="5B6B7A"/>
+                </a:solidFill>
+                <a:latin typeface="Calibri"/>
+              </a:rPr>
+              <a:t>22</a:t>
+            </a:r>
+          </a:p>
+        </p:txBody>
+      </p:sp>
+    </p:spTree>
+  </p:cSld>
+  <p:clrMapOvr>
+    <a:masterClrMapping/>
+  </p:clrMapOvr>
+</p:sld>
+</file>
+
+<file path=ppt/slides/slide23.xml><?xml version="1.0" encoding="utf-8"?>
+<p:sld xmlns:a="http://schemas.openxmlformats.org/drawingml/2006/main" xmlns:p="http://schemas.openxmlformats.org/presentationml/2006/main" xmlns:r="http://schemas.openxmlformats.org/officeDocument/2006/relationships">
+  <p:cSld>
+    <p:bg>
+      <p:bgPr>
+        <a:solidFill>
+          <a:srgbClr val="1E2761"/>
+        </a:solidFill>
+        <a:effectLst/>
+      </p:bgPr>
+    </p:bg>
+    <p:spTree>
+      <p:nvGrpSpPr>
+        <p:cNvPr id="1" name=""/>
+        <p:cNvGrpSpPr/>
+        <p:nvPr/>
+      </p:nvGrpSpPr>
+      <p:grpSpPr/>
+      <p:sp>
+        <p:nvSpPr>
+          <p:cNvPr id="2" name="Oval 1"/>
+          <p:cNvSpPr/>
+          <p:nvPr/>
+        </p:nvSpPr>
+        <p:spPr>
+          <a:xfrm>
+            <a:off x="5617160" y="877824"/>
+            <a:ext cx="621792" cy="621792"/>
+          </a:xfrm>
+          <a:prstGeom prst="ellipse">
+            <a:avLst/>
+          </a:prstGeom>
+          <a:solidFill>
+            <a:srgbClr val="CADCFC"/>
+          </a:solidFill>
+          <a:ln>
+            <a:noFill/>
+          </a:ln>
+          <a:effectLst/>
+        </p:spPr>
+        <p:style>
+          <a:lnRef idx="1">
+            <a:schemeClr val="accent1"/>
+          </a:lnRef>
+          <a:fillRef idx="3">
+            <a:schemeClr val="accent1"/>
+          </a:fillRef>
+          <a:effectRef idx="2">
+            <a:schemeClr val="accent1"/>
+          </a:effectRef>
+          <a:fontRef idx="minor">
+            <a:schemeClr val="lt1"/>
+          </a:fontRef>
+        </p:style>
+        <p:txBody>
+          <a:bodyPr rtlCol="0" anchor="ctr"/>
+          <a:lstStyle/>
+          <a:p>
+            <a:pPr algn="ctr"/>
+          </a:p>
+        </p:txBody>
+      </p:sp>
+      <p:sp>
+        <p:nvSpPr>
+          <p:cNvPr id="3" name="Oval 2"/>
+          <p:cNvSpPr/>
+          <p:nvPr/>
+        </p:nvSpPr>
+        <p:spPr>
+          <a:xfrm>
+            <a:off x="5959144" y="877824"/>
+            <a:ext cx="621792" cy="621792"/>
+          </a:xfrm>
+          <a:prstGeom prst="ellipse">
+            <a:avLst/>
+          </a:prstGeom>
+          <a:solidFill>
+            <a:srgbClr val="EB6834"/>
+          </a:solidFill>
+          <a:ln>
+            <a:noFill/>
+          </a:ln>
+          <a:effectLst/>
+        </p:spPr>
+        <p:style>
+          <a:lnRef idx="1">
+            <a:schemeClr val="accent1"/>
+          </a:lnRef>
+          <a:fillRef idx="3">
+            <a:schemeClr val="accent1"/>
+          </a:fillRef>
+          <a:effectRef idx="2">
+            <a:schemeClr val="accent1"/>
+          </a:effectRef>
+          <a:fontRef idx="minor">
+            <a:schemeClr val="lt1"/>
+          </a:fontRef>
+        </p:style>
+        <p:txBody>
+          <a:bodyPr rtlCol="0" anchor="ctr"/>
+          <a:lstStyle/>
+          <a:p>
+            <a:pPr algn="ctr"/>
+          </a:p>
+        </p:txBody>
+      </p:sp>
+      <p:sp>
+        <p:nvSpPr>
+          <p:cNvPr id="4" name="TextBox 3"/>
+          <p:cNvSpPr txBox="1"/>
+          <p:nvPr/>
+        </p:nvSpPr>
+        <p:spPr>
+          <a:xfrm>
+            <a:off x="914400" y="1737360"/>
+            <a:ext cx="10332720" cy="365760"/>
+          </a:xfrm>
+          <a:prstGeom prst="rect">
+            <a:avLst/>
+          </a:prstGeom>
+          <a:noFill/>
+        </p:spPr>
+        <p:txBody>
+          <a:bodyPr wrap="square" anchor="t" lIns="0" rIns="0" tIns="0" bIns="0">
+            <a:spAutoFit/>
+          </a:bodyPr>
+          <a:lstStyle/>
+          <a:p>
+            <a:pPr algn="ctr"/>
+            <a:r>
+              <a:rPr sz="1300" b="1" i="0">
+                <a:solidFill>
+                  <a:srgbClr val="EB6834"/>
+                </a:solidFill>
+                <a:latin typeface="Calibri"/>
+              </a:rPr>
+              <a:t>CONCLUSION</a:t>
+            </a:r>
+          </a:p>
+        </p:txBody>
+      </p:sp>
+      <p:sp>
+        <p:nvSpPr>
+          <p:cNvPr id="5" name="TextBox 4"/>
+          <p:cNvSpPr txBox="1"/>
+          <p:nvPr/>
+        </p:nvSpPr>
+        <p:spPr>
+          <a:xfrm>
+            <a:off x="914400" y="2103120"/>
+            <a:ext cx="10332720" cy="1371600"/>
+          </a:xfrm>
+          <a:prstGeom prst="rect">
+            <a:avLst/>
+          </a:prstGeom>
+          <a:noFill/>
+        </p:spPr>
+        <p:txBody>
+          <a:bodyPr wrap="square" anchor="t" lIns="0" rIns="0" tIns="0" bIns="0">
+            <a:spAutoFit/>
+          </a:bodyPr>
+          <a:lstStyle/>
+          <a:p>
+            <a:pPr algn="ctr">
+              <a:lnSpc>
+                <a:spcPct val="115000"/>
+              </a:lnSpc>
+            </a:pPr>
+            <a:r>
+              <a:rPr sz="2400" b="1" i="0">
+                <a:solidFill>
+                  <a:srgbClr val="FFFFFF"/>
+                </a:solidFill>
+                <a:latin typeface="Cambria"/>
+              </a:rPr>
+              <a:t>Multimodal fusion provides a real, measurable, but conditional
+improvement — concentrated where modalities disagree.</a:t>
+            </a:r>
+          </a:p>
+        </p:txBody>
+      </p:sp>
+      <p:sp>
+        <p:nvSpPr>
+          <p:cNvPr id="6" name="TextBox 5"/>
+          <p:cNvSpPr txBox="1"/>
+          <p:nvPr/>
+        </p:nvSpPr>
+        <p:spPr>
+          <a:xfrm>
+            <a:off x="2103120" y="3931920"/>
+            <a:ext cx="7955279" cy="1828800"/>
+          </a:xfrm>
+          <a:prstGeom prst="rect">
+            <a:avLst/>
+          </a:prstGeom>
+          <a:noFill/>
+        </p:spPr>
+        <p:txBody>
+          <a:bodyPr wrap="square" lIns="0" rIns="0">
+            <a:spAutoFit/>
+          </a:bodyPr>
+          <a:lstStyle/>
+          <a:p>
+            <a:pPr algn="l">
+              <a:lnSpc>
+                <a:spcPct val="108000"/>
+              </a:lnSpc>
+              <a:spcAft>
+                <a:spcPts val="1000"/>
+              </a:spcAft>
+            </a:pPr>
+            <a:r>
+              <a:rPr sz="1400">
+                <a:solidFill>
+                  <a:srgbClr val="CADCFC"/>
+                </a:solidFill>
+                <a:latin typeface="Calibri"/>
+              </a:rPr>
+              <a:t>•  Tweets (Study 1): fusion 64.4% accuracy / 56.3% macro-F1 vs. best unimodal 61.6% / 54.6%</a:t>
+            </a:r>
+          </a:p>
+          <a:p>
+            <a:pPr algn="l">
+              <a:lnSpc>
+                <a:spcPct val="108000"/>
+              </a:lnSpc>
+              <a:spcAft>
+                <a:spcPts val="1000"/>
+              </a:spcAft>
+            </a:pPr>
+            <a:r>
+              <a:rPr sz="1400">
+                <a:solidFill>
+                  <a:srgbClr val="CADCFC"/>
+                </a:solidFill>
+                <a:latin typeface="Calibri"/>
+              </a:rPr>
+              <a:t>•  Memes (Study 2): most of the fusion gain disappears once embedded text is blurred away</a:t>
+            </a:r>
+          </a:p>
+          <a:p>
+            <a:pPr algn="l">
+              <a:lnSpc>
+                <a:spcPct val="108000"/>
+              </a:lnSpc>
+              <a:spcAft>
+                <a:spcPts val="1000"/>
+              </a:spcAft>
+            </a:pPr>
+            <a:r>
+              <a:rPr sz="1400">
+                <a:solidFill>
+                  <a:srgbClr val="CADCFC"/>
+                </a:solidFill>
+                <a:latin typeface="Calibri"/>
+              </a:rPr>
+              <a:t>•  Future work: multilingual data, attention fusion, mental-health-labelled multimodal data when available</a:t>
+            </a:r>
+          </a:p>
+        </p:txBody>
+      </p:sp>
+      <p:sp>
+        <p:nvSpPr>
+          <p:cNvPr id="7" name="TextBox 6"/>
+          <p:cNvSpPr txBox="1"/>
+          <p:nvPr/>
+        </p:nvSpPr>
+        <p:spPr>
+          <a:xfrm>
+            <a:off x="640080" y="6473952"/>
+            <a:ext cx="10972800" cy="274320"/>
+          </a:xfrm>
+          <a:prstGeom prst="rect">
+            <a:avLst/>
+          </a:prstGeom>
+          <a:noFill/>
+        </p:spPr>
+        <p:txBody>
+          <a:bodyPr wrap="square" anchor="t" lIns="0" rIns="0" tIns="0" bIns="0">
+            <a:spAutoFit/>
+          </a:bodyPr>
+          <a:lstStyle/>
+          <a:p>
+            <a:pPr algn="ctr"/>
+            <a:r>
+              <a:rPr sz="900" b="0" i="0">
+                <a:solidFill>
+                  <a:srgbClr val="CADCFC"/>
+                </a:solidFill>
+                <a:latin typeface="Calibri"/>
+              </a:rPr>
+              <a:t>AI-Driven Multimodal Sentiment Analysis for Mental Health Monitoring  |  Group 15  |  23</a:t>
+            </a:r>
+          </a:p>
+        </p:txBody>
+      </p:sp>
+    </p:spTree>
+  </p:cSld>
+  <p:clrMapOvr>
+    <a:masterClrMapping/>
+  </p:clrMapOvr>
+</p:sld>
+</file>
+
 <file path=ppt/slides/slide3.xml><?xml version="1.0" encoding="utf-8"?>
 <p:sld xmlns:a="http://schemas.openxmlformats.org/drawingml/2006/main" xmlns:p="http://schemas.openxmlformats.org/presentationml/2006/main" xmlns:r="http://schemas.openxmlformats.org/officeDocument/2006/relationships">
   <p:cSld>
@@ -11311,21 +14379,104 @@
                 </a:solidFill>
                 <a:latin typeface="Cambria"/>
               </a:rPr>
-              <a:t>Dataset — MVSA-Single</a:t>
-            </a:r>
-          </a:p>
-        </p:txBody>
-      </p:sp>
-      <p:sp>
-        <p:nvSpPr>
-          <p:cNvPr id="4" name="TextBox 3"/>
-          <p:cNvSpPr txBox="1"/>
-          <p:nvPr/>
-        </p:nvSpPr>
-        <p:spPr>
-          <a:xfrm>
-            <a:off x="640080" y="1828800"/>
-            <a:ext cx="5394960" cy="4114800"/>
+              <a:t>Research Questions</a:t>
+            </a:r>
+          </a:p>
+        </p:txBody>
+      </p:sp>
+      <p:sp>
+        <p:nvSpPr>
+          <p:cNvPr id="4" name="Rounded Rectangle 3"/>
+          <p:cNvSpPr/>
+          <p:nvPr/>
+        </p:nvSpPr>
+        <p:spPr>
+          <a:xfrm>
+            <a:off x="640080" y="1737360"/>
+            <a:ext cx="10881360" cy="1188720"/>
+          </a:xfrm>
+          <a:prstGeom prst="roundRect">
+            <a:avLst>
+              <a:gd name="adj" fmla="val 4000"/>
+            </a:avLst>
+          </a:prstGeom>
+          <a:solidFill>
+            <a:srgbClr val="FFFFFF"/>
+          </a:solidFill>
+          <a:ln w="15875">
+            <a:solidFill>
+              <a:srgbClr val="EB6834"/>
+            </a:solidFill>
+          </a:ln>
+          <a:effectLst/>
+        </p:spPr>
+        <p:style>
+          <a:lnRef idx="1">
+            <a:schemeClr val="accent1"/>
+          </a:lnRef>
+          <a:fillRef idx="3">
+            <a:schemeClr val="accent1"/>
+          </a:fillRef>
+          <a:effectRef idx="2">
+            <a:schemeClr val="accent1"/>
+          </a:effectRef>
+          <a:fontRef idx="minor">
+            <a:schemeClr val="lt1"/>
+          </a:fontRef>
+        </p:style>
+        <p:txBody>
+          <a:bodyPr rtlCol="0" anchor="ctr"/>
+          <a:lstStyle/>
+          <a:p>
+            <a:pPr algn="ctr"/>
+          </a:p>
+        </p:txBody>
+      </p:sp>
+      <p:sp>
+        <p:nvSpPr>
+          <p:cNvPr id="5" name="TextBox 4"/>
+          <p:cNvSpPr txBox="1"/>
+          <p:nvPr/>
+        </p:nvSpPr>
+        <p:spPr>
+          <a:xfrm>
+            <a:off x="868680" y="1920240"/>
+            <a:ext cx="10424160" cy="457200"/>
+          </a:xfrm>
+          <a:prstGeom prst="rect">
+            <a:avLst/>
+          </a:prstGeom>
+          <a:noFill/>
+        </p:spPr>
+        <p:txBody>
+          <a:bodyPr wrap="square" anchor="t" lIns="0" rIns="0" tIns="0" bIns="0">
+            <a:spAutoFit/>
+          </a:bodyPr>
+          <a:lstStyle/>
+          <a:p>
+            <a:pPr algn="l"/>
+            <a:r>
+              <a:rPr sz="1700" b="1" i="0">
+                <a:solidFill>
+                  <a:srgbClr val="EB6834"/>
+                </a:solidFill>
+                <a:latin typeface="Cambria"/>
+              </a:rPr>
+              <a:t>Primary RQ</a:t>
+            </a:r>
+          </a:p>
+        </p:txBody>
+      </p:sp>
+      <p:sp>
+        <p:nvSpPr>
+          <p:cNvPr id="6" name="TextBox 5"/>
+          <p:cNvSpPr txBox="1"/>
+          <p:nvPr/>
+        </p:nvSpPr>
+        <p:spPr>
+          <a:xfrm>
+            <a:off x="868680" y="2423160"/>
+            <a:ext cx="10424160" cy="274320"/>
           </a:xfrm>
           <a:prstGeom prst="rect">
             <a:avLst/>
@@ -11343,99 +14494,40 @@
                 <a:spcPct val="108000"/>
               </a:lnSpc>
               <a:spcAft>
-                <a:spcPts val="1600"/>
+                <a:spcPts val="600"/>
               </a:spcAft>
             </a:pPr>
             <a:r>
-              <a:rPr sz="1450">
+              <a:rPr sz="1250">
                 <a:solidFill>
                   <a:srgbClr val="16213E"/>
                 </a:solidFill>
                 <a:latin typeface="Calibri"/>
               </a:rPr>
-              <a:t>•  4,511 real Twitter image+text pairs (after standard cleaning), 3-class sentiment</a:t>
-            </a:r>
-          </a:p>
-          <a:p>
-            <a:pPr algn="l">
-              <a:lnSpc>
-                <a:spcPct val="108000"/>
-              </a:lnSpc>
-              <a:spcAft>
-                <a:spcPts val="1600"/>
-              </a:spcAft>
-            </a:pPr>
-            <a:r>
-              <a:rPr sz="1450">
-                <a:solidFill>
-                  <a:srgbClr val="16213E"/>
-                </a:solidFill>
-                <a:latin typeface="Calibri"/>
-              </a:rPr>
-              <a:t>•  Published train/dev/test split (3,611 / 450 / 450) from CLMLF (NAACL 2022) for comparability</a:t>
-            </a:r>
-          </a:p>
-          <a:p>
-            <a:pPr algn="l">
-              <a:lnSpc>
-                <a:spcPct val="108000"/>
-              </a:lnSpc>
-              <a:spcAft>
-                <a:spcPts val="1600"/>
-              </a:spcAft>
-            </a:pPr>
-            <a:r>
-              <a:rPr sz="1450">
-                <a:solidFill>
-                  <a:srgbClr val="16213E"/>
-                </a:solidFill>
-                <a:latin typeface="Calibri"/>
-              </a:rPr>
-              <a:t>•  Real acquisition challenge: the official distribution link was dead (404) — we found and content-verified a HuggingFace mirror instead</a:t>
-            </a:r>
-          </a:p>
-          <a:p>
-            <a:pPr algn="l">
-              <a:lnSpc>
-                <a:spcPct val="108000"/>
-              </a:lnSpc>
-              <a:spcAft>
-                <a:spcPts val="1600"/>
-              </a:spcAft>
-            </a:pPr>
-            <a:r>
-              <a:rPr sz="1450">
-                <a:solidFill>
-                  <a:srgbClr val="16213E"/>
-                </a:solidFill>
-                <a:latin typeface="Calibri"/>
-              </a:rPr>
-              <a:t>•  Class imbalance motivates macro-F1 as the primary metric</a:t>
-            </a:r>
-          </a:p>
-        </p:txBody>
-      </p:sp>
-      <p:sp>
-        <p:nvSpPr>
-          <p:cNvPr id="5" name="Rectangle 4"/>
+              <a:t>•  Can combining text and image improve sentiment classification of social-media posts over text-only and image-only models?</a:t>
+            </a:r>
+          </a:p>
+        </p:txBody>
+      </p:sp>
+      <p:sp>
+        <p:nvSpPr>
+          <p:cNvPr id="7" name="Oval 6"/>
           <p:cNvSpPr/>
           <p:nvPr/>
         </p:nvSpPr>
         <p:spPr>
           <a:xfrm>
-            <a:off x="6258560" y="1880870"/>
-            <a:ext cx="5313680" cy="4010660"/>
-          </a:xfrm>
-          <a:prstGeom prst="rect">
+            <a:off x="731520" y="3246120"/>
+            <a:ext cx="502920" cy="502920"/>
+          </a:xfrm>
+          <a:prstGeom prst="ellipse">
             <a:avLst/>
           </a:prstGeom>
           <a:solidFill>
-            <a:srgbClr val="FFFFFF"/>
+            <a:srgbClr val="EB6834"/>
           </a:solidFill>
-          <a:ln w="12700">
-            <a:solidFill>
-              <a:srgbClr val="DDE3EC"/>
-            </a:solidFill>
+          <a:ln>
+            <a:noFill/>
           </a:ln>
           <a:effectLst/>
         </p:spPr>
@@ -11454,40 +14546,480 @@
           </a:fontRef>
         </p:style>
         <p:txBody>
-          <a:bodyPr rtlCol="0" anchor="ctr"/>
+          <a:bodyPr rtlCol="0" anchor="ctr" lIns="0" rIns="0" tIns="0" bIns="0"/>
           <a:lstStyle/>
           <a:p>
             <a:pPr algn="ctr"/>
-          </a:p>
-        </p:txBody>
-      </p:sp>
-      <p:pic>
-        <p:nvPicPr>
-          <p:cNvPr id="6" name="Picture 5" descr="class_distribution.png"/>
-          <p:cNvPicPr>
-            <a:picLocks noChangeAspect="1"/>
-          </p:cNvPicPr>
-          <p:nvPr/>
-        </p:nvPicPr>
-        <p:blipFill>
-          <a:blip r:embed="rId2"/>
-          <a:stretch>
-            <a:fillRect/>
-          </a:stretch>
-        </p:blipFill>
-        <p:spPr>
-          <a:xfrm>
-            <a:off x="6309360" y="1931670"/>
-            <a:ext cx="5212080" cy="3909060"/>
-          </a:xfrm>
-          <a:prstGeom prst="rect">
-            <a:avLst/>
-          </a:prstGeom>
-        </p:spPr>
-      </p:pic>
-      <p:sp>
-        <p:nvSpPr>
-          <p:cNvPr id="7" name="TextBox 6"/>
+            <a:r>
+              <a:rPr sz="1800" b="1">
+                <a:solidFill>
+                  <a:srgbClr val="FFFFFF"/>
+                </a:solidFill>
+                <a:latin typeface="Cambria"/>
+              </a:rPr>
+              <a:t>1</a:t>
+            </a:r>
+          </a:p>
+        </p:txBody>
+      </p:sp>
+      <p:sp>
+        <p:nvSpPr>
+          <p:cNvPr id="8" name="TextBox 7"/>
+          <p:cNvSpPr txBox="1"/>
+          <p:nvPr/>
+        </p:nvSpPr>
+        <p:spPr>
+          <a:xfrm>
+            <a:off x="1444752" y="3227832"/>
+            <a:ext cx="4480560" cy="365760"/>
+          </a:xfrm>
+          <a:prstGeom prst="rect">
+            <a:avLst/>
+          </a:prstGeom>
+          <a:noFill/>
+        </p:spPr>
+        <p:txBody>
+          <a:bodyPr wrap="square" anchor="t" lIns="0" rIns="0" tIns="0" bIns="0">
+            <a:spAutoFit/>
+          </a:bodyPr>
+          <a:lstStyle/>
+          <a:p>
+            <a:pPr algn="l"/>
+            <a:r>
+              <a:rPr sz="1600" b="1" i="0">
+                <a:solidFill>
+                  <a:srgbClr val="1E2761"/>
+                </a:solidFill>
+                <a:latin typeface="Calibri"/>
+              </a:rPr>
+              <a:t>RQ-a  Text</a:t>
+            </a:r>
+          </a:p>
+        </p:txBody>
+      </p:sp>
+      <p:sp>
+        <p:nvSpPr>
+          <p:cNvPr id="9" name="TextBox 8"/>
+          <p:cNvSpPr txBox="1"/>
+          <p:nvPr/>
+        </p:nvSpPr>
+        <p:spPr>
+          <a:xfrm>
+            <a:off x="1444752" y="3575304"/>
+            <a:ext cx="4480560" cy="914400"/>
+          </a:xfrm>
+          <a:prstGeom prst="rect">
+            <a:avLst/>
+          </a:prstGeom>
+          <a:noFill/>
+        </p:spPr>
+        <p:txBody>
+          <a:bodyPr wrap="square" anchor="t" lIns="0" rIns="0" tIns="0" bIns="0">
+            <a:spAutoFit/>
+          </a:bodyPr>
+          <a:lstStyle/>
+          <a:p>
+            <a:pPr algn="l">
+              <a:lnSpc>
+                <a:spcPct val="110000"/>
+              </a:lnSpc>
+            </a:pPr>
+            <a:r>
+              <a:rPr sz="1250" b="0" i="0">
+                <a:solidFill>
+                  <a:srgbClr val="5B6B7A"/>
+                </a:solidFill>
+                <a:latin typeface="Calibri"/>
+              </a:rPr>
+              <a:t>How well does text alone do: traditional TF-IDF vs. transformer (DistilBERT)?</a:t>
+            </a:r>
+          </a:p>
+        </p:txBody>
+      </p:sp>
+      <p:sp>
+        <p:nvSpPr>
+          <p:cNvPr id="10" name="Oval 9"/>
+          <p:cNvSpPr/>
+          <p:nvPr/>
+        </p:nvSpPr>
+        <p:spPr>
+          <a:xfrm>
+            <a:off x="6217920" y="3246120"/>
+            <a:ext cx="502920" cy="502920"/>
+          </a:xfrm>
+          <a:prstGeom prst="ellipse">
+            <a:avLst/>
+          </a:prstGeom>
+          <a:solidFill>
+            <a:srgbClr val="EB6834"/>
+          </a:solidFill>
+          <a:ln>
+            <a:noFill/>
+          </a:ln>
+          <a:effectLst/>
+        </p:spPr>
+        <p:style>
+          <a:lnRef idx="1">
+            <a:schemeClr val="accent1"/>
+          </a:lnRef>
+          <a:fillRef idx="3">
+            <a:schemeClr val="accent1"/>
+          </a:fillRef>
+          <a:effectRef idx="2">
+            <a:schemeClr val="accent1"/>
+          </a:effectRef>
+          <a:fontRef idx="minor">
+            <a:schemeClr val="lt1"/>
+          </a:fontRef>
+        </p:style>
+        <p:txBody>
+          <a:bodyPr rtlCol="0" anchor="ctr" lIns="0" rIns="0" tIns="0" bIns="0"/>
+          <a:lstStyle/>
+          <a:p>
+            <a:pPr algn="ctr"/>
+            <a:r>
+              <a:rPr sz="1800" b="1">
+                <a:solidFill>
+                  <a:srgbClr val="FFFFFF"/>
+                </a:solidFill>
+                <a:latin typeface="Cambria"/>
+              </a:rPr>
+              <a:t>2</a:t>
+            </a:r>
+          </a:p>
+        </p:txBody>
+      </p:sp>
+      <p:sp>
+        <p:nvSpPr>
+          <p:cNvPr id="11" name="TextBox 10"/>
+          <p:cNvSpPr txBox="1"/>
+          <p:nvPr/>
+        </p:nvSpPr>
+        <p:spPr>
+          <a:xfrm>
+            <a:off x="6931152" y="3227832"/>
+            <a:ext cx="4480560" cy="365760"/>
+          </a:xfrm>
+          <a:prstGeom prst="rect">
+            <a:avLst/>
+          </a:prstGeom>
+          <a:noFill/>
+        </p:spPr>
+        <p:txBody>
+          <a:bodyPr wrap="square" anchor="t" lIns="0" rIns="0" tIns="0" bIns="0">
+            <a:spAutoFit/>
+          </a:bodyPr>
+          <a:lstStyle/>
+          <a:p>
+            <a:pPr algn="l"/>
+            <a:r>
+              <a:rPr sz="1600" b="1" i="0">
+                <a:solidFill>
+                  <a:srgbClr val="1E2761"/>
+                </a:solidFill>
+                <a:latin typeface="Calibri"/>
+              </a:rPr>
+              <a:t>RQ-b  Image</a:t>
+            </a:r>
+          </a:p>
+        </p:txBody>
+      </p:sp>
+      <p:sp>
+        <p:nvSpPr>
+          <p:cNvPr id="12" name="TextBox 11"/>
+          <p:cNvSpPr txBox="1"/>
+          <p:nvPr/>
+        </p:nvSpPr>
+        <p:spPr>
+          <a:xfrm>
+            <a:off x="6931152" y="3575304"/>
+            <a:ext cx="4480560" cy="914400"/>
+          </a:xfrm>
+          <a:prstGeom prst="rect">
+            <a:avLst/>
+          </a:prstGeom>
+          <a:noFill/>
+        </p:spPr>
+        <p:txBody>
+          <a:bodyPr wrap="square" anchor="t" lIns="0" rIns="0" tIns="0" bIns="0">
+            <a:spAutoFit/>
+          </a:bodyPr>
+          <a:lstStyle/>
+          <a:p>
+            <a:pPr algn="l">
+              <a:lnSpc>
+                <a:spcPct val="110000"/>
+              </a:lnSpc>
+            </a:pPr>
+            <a:r>
+              <a:rPr sz="1250" b="0" i="0">
+                <a:solidFill>
+                  <a:srgbClr val="5B6B7A"/>
+                </a:solidFill>
+                <a:latin typeface="Calibri"/>
+              </a:rPr>
+              <a:t>What does the image add: CNN from scratch vs. pretrained ResNet18?</a:t>
+            </a:r>
+          </a:p>
+        </p:txBody>
+      </p:sp>
+      <p:sp>
+        <p:nvSpPr>
+          <p:cNvPr id="13" name="Oval 12"/>
+          <p:cNvSpPr/>
+          <p:nvPr/>
+        </p:nvSpPr>
+        <p:spPr>
+          <a:xfrm>
+            <a:off x="731520" y="4663440"/>
+            <a:ext cx="502920" cy="502920"/>
+          </a:xfrm>
+          <a:prstGeom prst="ellipse">
+            <a:avLst/>
+          </a:prstGeom>
+          <a:solidFill>
+            <a:srgbClr val="EB6834"/>
+          </a:solidFill>
+          <a:ln>
+            <a:noFill/>
+          </a:ln>
+          <a:effectLst/>
+        </p:spPr>
+        <p:style>
+          <a:lnRef idx="1">
+            <a:schemeClr val="accent1"/>
+          </a:lnRef>
+          <a:fillRef idx="3">
+            <a:schemeClr val="accent1"/>
+          </a:fillRef>
+          <a:effectRef idx="2">
+            <a:schemeClr val="accent1"/>
+          </a:effectRef>
+          <a:fontRef idx="minor">
+            <a:schemeClr val="lt1"/>
+          </a:fontRef>
+        </p:style>
+        <p:txBody>
+          <a:bodyPr rtlCol="0" anchor="ctr" lIns="0" rIns="0" tIns="0" bIns="0"/>
+          <a:lstStyle/>
+          <a:p>
+            <a:pPr algn="ctr"/>
+            <a:r>
+              <a:rPr sz="1800" b="1">
+                <a:solidFill>
+                  <a:srgbClr val="FFFFFF"/>
+                </a:solidFill>
+                <a:latin typeface="Cambria"/>
+              </a:rPr>
+              <a:t>3</a:t>
+            </a:r>
+          </a:p>
+        </p:txBody>
+      </p:sp>
+      <p:sp>
+        <p:nvSpPr>
+          <p:cNvPr id="14" name="TextBox 13"/>
+          <p:cNvSpPr txBox="1"/>
+          <p:nvPr/>
+        </p:nvSpPr>
+        <p:spPr>
+          <a:xfrm>
+            <a:off x="1444752" y="4645152"/>
+            <a:ext cx="4480560" cy="365760"/>
+          </a:xfrm>
+          <a:prstGeom prst="rect">
+            <a:avLst/>
+          </a:prstGeom>
+          <a:noFill/>
+        </p:spPr>
+        <p:txBody>
+          <a:bodyPr wrap="square" anchor="t" lIns="0" rIns="0" tIns="0" bIns="0">
+            <a:spAutoFit/>
+          </a:bodyPr>
+          <a:lstStyle/>
+          <a:p>
+            <a:pPr algn="l"/>
+            <a:r>
+              <a:rPr sz="1600" b="1" i="0">
+                <a:solidFill>
+                  <a:srgbClr val="1E2761"/>
+                </a:solidFill>
+                <a:latin typeface="Calibri"/>
+              </a:rPr>
+              <a:t>RQ-c  Conflict</a:t>
+            </a:r>
+          </a:p>
+        </p:txBody>
+      </p:sp>
+      <p:sp>
+        <p:nvSpPr>
+          <p:cNvPr id="15" name="TextBox 14"/>
+          <p:cNvSpPr txBox="1"/>
+          <p:nvPr/>
+        </p:nvSpPr>
+        <p:spPr>
+          <a:xfrm>
+            <a:off x="1444752" y="4992624"/>
+            <a:ext cx="4480560" cy="914400"/>
+          </a:xfrm>
+          <a:prstGeom prst="rect">
+            <a:avLst/>
+          </a:prstGeom>
+          <a:noFill/>
+        </p:spPr>
+        <p:txBody>
+          <a:bodyPr wrap="square" anchor="t" lIns="0" rIns="0" tIns="0" bIns="0">
+            <a:spAutoFit/>
+          </a:bodyPr>
+          <a:lstStyle/>
+          <a:p>
+            <a:pPr algn="l">
+              <a:lnSpc>
+                <a:spcPct val="110000"/>
+              </a:lnSpc>
+            </a:pPr>
+            <a:r>
+              <a:rPr sz="1250" b="0" i="0">
+                <a:solidFill>
+                  <a:srgbClr val="5B6B7A"/>
+                </a:solidFill>
+                <a:latin typeface="Calibri"/>
+              </a:rPr>
+              <a:t>Does fusion help uniformly, or mainly where text and image disagree?</a:t>
+            </a:r>
+          </a:p>
+        </p:txBody>
+      </p:sp>
+      <p:sp>
+        <p:nvSpPr>
+          <p:cNvPr id="16" name="Oval 15"/>
+          <p:cNvSpPr/>
+          <p:nvPr/>
+        </p:nvSpPr>
+        <p:spPr>
+          <a:xfrm>
+            <a:off x="6217920" y="4663440"/>
+            <a:ext cx="502920" cy="502920"/>
+          </a:xfrm>
+          <a:prstGeom prst="ellipse">
+            <a:avLst/>
+          </a:prstGeom>
+          <a:solidFill>
+            <a:srgbClr val="EB6834"/>
+          </a:solidFill>
+          <a:ln>
+            <a:noFill/>
+          </a:ln>
+          <a:effectLst/>
+        </p:spPr>
+        <p:style>
+          <a:lnRef idx="1">
+            <a:schemeClr val="accent1"/>
+          </a:lnRef>
+          <a:fillRef idx="3">
+            <a:schemeClr val="accent1"/>
+          </a:fillRef>
+          <a:effectRef idx="2">
+            <a:schemeClr val="accent1"/>
+          </a:effectRef>
+          <a:fontRef idx="minor">
+            <a:schemeClr val="lt1"/>
+          </a:fontRef>
+        </p:style>
+        <p:txBody>
+          <a:bodyPr rtlCol="0" anchor="ctr" lIns="0" rIns="0" tIns="0" bIns="0"/>
+          <a:lstStyle/>
+          <a:p>
+            <a:pPr algn="ctr"/>
+            <a:r>
+              <a:rPr sz="1800" b="1">
+                <a:solidFill>
+                  <a:srgbClr val="FFFFFF"/>
+                </a:solidFill>
+                <a:latin typeface="Cambria"/>
+              </a:rPr>
+              <a:t>4</a:t>
+            </a:r>
+          </a:p>
+        </p:txBody>
+      </p:sp>
+      <p:sp>
+        <p:nvSpPr>
+          <p:cNvPr id="17" name="TextBox 16"/>
+          <p:cNvSpPr txBox="1"/>
+          <p:nvPr/>
+        </p:nvSpPr>
+        <p:spPr>
+          <a:xfrm>
+            <a:off x="6931152" y="4645152"/>
+            <a:ext cx="4480560" cy="365760"/>
+          </a:xfrm>
+          <a:prstGeom prst="rect">
+            <a:avLst/>
+          </a:prstGeom>
+          <a:noFill/>
+        </p:spPr>
+        <p:txBody>
+          <a:bodyPr wrap="square" anchor="t" lIns="0" rIns="0" tIns="0" bIns="0">
+            <a:spAutoFit/>
+          </a:bodyPr>
+          <a:lstStyle/>
+          <a:p>
+            <a:pPr algn="l"/>
+            <a:r>
+              <a:rPr sz="1600" b="1" i="0">
+                <a:solidFill>
+                  <a:srgbClr val="1E2761"/>
+                </a:solidFill>
+                <a:latin typeface="Calibri"/>
+              </a:rPr>
+              <a:t>RQ-d  Memes (new)</a:t>
+            </a:r>
+          </a:p>
+        </p:txBody>
+      </p:sp>
+      <p:sp>
+        <p:nvSpPr>
+          <p:cNvPr id="18" name="TextBox 17"/>
+          <p:cNvSpPr txBox="1"/>
+          <p:nvPr/>
+        </p:nvSpPr>
+        <p:spPr>
+          <a:xfrm>
+            <a:off x="6931152" y="4992624"/>
+            <a:ext cx="4480560" cy="914400"/>
+          </a:xfrm>
+          <a:prstGeom prst="rect">
+            <a:avLst/>
+          </a:prstGeom>
+          <a:noFill/>
+        </p:spPr>
+        <p:txBody>
+          <a:bodyPr wrap="square" anchor="t" lIns="0" rIns="0" tIns="0" bIns="0">
+            <a:spAutoFit/>
+          </a:bodyPr>
+          <a:lstStyle/>
+          <a:p>
+            <a:pPr algn="l">
+              <a:lnSpc>
+                <a:spcPct val="110000"/>
+              </a:lnSpc>
+            </a:pPr>
+            <a:r>
+              <a:rPr sz="1250" b="0" i="0">
+                <a:solidFill>
+                  <a:srgbClr val="5B6B7A"/>
+                </a:solidFill>
+                <a:latin typeface="Calibri"/>
+              </a:rPr>
+              <a:t>When the text is printed inside the image, is the fusion gain real visual signal, or the image re-reading the text?</a:t>
+            </a:r>
+          </a:p>
+        </p:txBody>
+      </p:sp>
+      <p:sp>
+        <p:nvSpPr>
+          <p:cNvPr id="19" name="TextBox 18"/>
           <p:cNvSpPr txBox="1"/>
           <p:nvPr/>
         </p:nvSpPr>
@@ -11522,7 +15054,7 @@
       </p:sp>
       <p:sp>
         <p:nvSpPr>
-          <p:cNvPr id="8" name="TextBox 7"/>
+          <p:cNvPr id="20" name="TextBox 19"/>
           <p:cNvSpPr txBox="1"/>
           <p:nvPr/>
         </p:nvSpPr>
@@ -11611,7 +15143,7 @@
                 </a:solidFill>
                 <a:latin typeface="Calibri"/>
               </a:rPr>
-              <a:t>RESEARCH DESIGN</a:t>
+              <a:t>RESEARCH PROGRESS</a:t>
             </a:r>
           </a:p>
         </p:txBody>
@@ -11646,32 +15178,131 @@
                 </a:solidFill>
                 <a:latin typeface="Cambria"/>
               </a:rPr>
-              <a:t>Proposed Architecture</a:t>
-            </a:r>
-          </a:p>
-        </p:txBody>
-      </p:sp>
-      <p:sp>
-        <p:nvSpPr>
-          <p:cNvPr id="4" name="Rounded Rectangle 3"/>
+              <a:t>Dataset — MVSA-Single</a:t>
+            </a:r>
+          </a:p>
+        </p:txBody>
+      </p:sp>
+      <p:sp>
+        <p:nvSpPr>
+          <p:cNvPr id="4" name="TextBox 3"/>
+          <p:cNvSpPr txBox="1"/>
+          <p:nvPr/>
+        </p:nvSpPr>
+        <p:spPr>
+          <a:xfrm>
+            <a:off x="640080" y="1828800"/>
+            <a:ext cx="5394960" cy="4114800"/>
+          </a:xfrm>
+          <a:prstGeom prst="rect">
+            <a:avLst/>
+          </a:prstGeom>
+          <a:noFill/>
+        </p:spPr>
+        <p:txBody>
+          <a:bodyPr wrap="square" lIns="0" rIns="0">
+            <a:spAutoFit/>
+          </a:bodyPr>
+          <a:lstStyle/>
+          <a:p>
+            <a:pPr algn="l">
+              <a:lnSpc>
+                <a:spcPct val="108000"/>
+              </a:lnSpc>
+              <a:spcAft>
+                <a:spcPts val="1600"/>
+              </a:spcAft>
+            </a:pPr>
+            <a:r>
+              <a:rPr sz="1450">
+                <a:solidFill>
+                  <a:srgbClr val="16213E"/>
+                </a:solidFill>
+                <a:latin typeface="Calibri"/>
+              </a:rPr>
+              <a:t>•  4,511 real Twitter image+text pairs (after standard cleaning), 3-class sentiment</a:t>
+            </a:r>
+          </a:p>
+          <a:p>
+            <a:pPr algn="l">
+              <a:lnSpc>
+                <a:spcPct val="108000"/>
+              </a:lnSpc>
+              <a:spcAft>
+                <a:spcPts val="1600"/>
+              </a:spcAft>
+            </a:pPr>
+            <a:r>
+              <a:rPr sz="1450">
+                <a:solidFill>
+                  <a:srgbClr val="16213E"/>
+                </a:solidFill>
+                <a:latin typeface="Calibri"/>
+              </a:rPr>
+              <a:t>•  Published train/dev/test split (3,611 / 450 / 450) from CLMLF (NAACL 2022) for comparability</a:t>
+            </a:r>
+          </a:p>
+          <a:p>
+            <a:pPr algn="l">
+              <a:lnSpc>
+                <a:spcPct val="108000"/>
+              </a:lnSpc>
+              <a:spcAft>
+                <a:spcPts val="1600"/>
+              </a:spcAft>
+            </a:pPr>
+            <a:r>
+              <a:rPr sz="1450">
+                <a:solidFill>
+                  <a:srgbClr val="16213E"/>
+                </a:solidFill>
+                <a:latin typeface="Calibri"/>
+              </a:rPr>
+              <a:t>•  Real acquisition challenge: the official distribution link was dead (404) — we found and content-verified a HuggingFace mirror instead</a:t>
+            </a:r>
+          </a:p>
+          <a:p>
+            <a:pPr algn="l">
+              <a:lnSpc>
+                <a:spcPct val="108000"/>
+              </a:lnSpc>
+              <a:spcAft>
+                <a:spcPts val="1600"/>
+              </a:spcAft>
+            </a:pPr>
+            <a:r>
+              <a:rPr sz="1450">
+                <a:solidFill>
+                  <a:srgbClr val="16213E"/>
+                </a:solidFill>
+                <a:latin typeface="Calibri"/>
+              </a:rPr>
+              <a:t>•  Class imbalance motivates macro-F1 as the primary metric</a:t>
+            </a:r>
+          </a:p>
+        </p:txBody>
+      </p:sp>
+      <p:sp>
+        <p:nvSpPr>
+          <p:cNvPr id="5" name="Rectangle 4"/>
           <p:cNvSpPr/>
           <p:nvPr/>
         </p:nvSpPr>
         <p:spPr>
           <a:xfrm>
-            <a:off x="731520" y="2011680"/>
-            <a:ext cx="2834640" cy="777240"/>
-          </a:xfrm>
-          <a:prstGeom prst="roundRect">
-            <a:avLst>
-              <a:gd name="adj" fmla="val 15000"/>
-            </a:avLst>
+            <a:off x="6258560" y="1880870"/>
+            <a:ext cx="5313680" cy="4010660"/>
+          </a:xfrm>
+          <a:prstGeom prst="rect">
+            <a:avLst/>
           </a:prstGeom>
           <a:solidFill>
-            <a:srgbClr val="1E2761"/>
+            <a:srgbClr val="FFFFFF"/>
           </a:solidFill>
-          <a:ln>
-            <a:noFill/>
+          <a:ln w="12700">
+            <a:solidFill>
+              <a:srgbClr val="DDE3EC"/>
+            </a:solidFill>
           </a:ln>
           <a:effectLst/>
         </p:spPr>
@@ -11690,533 +15321,40 @@
           </a:fontRef>
         </p:style>
         <p:txBody>
-          <a:bodyPr rtlCol="0" anchor="ctr" wrap="square" lIns="50800" rIns="50800"/>
+          <a:bodyPr rtlCol="0" anchor="ctr"/>
           <a:lstStyle/>
           <a:p>
             <a:pPr algn="ctr"/>
-            <a:r>
-              <a:rPr sz="1250" b="1">
-                <a:solidFill>
-                  <a:srgbClr val="FFFFFF"/>
-                </a:solidFill>
-                <a:latin typeface="Calibri"/>
-              </a:rPr>
-              <a:t>Text Pipeline
-(cleaning -&gt; embedding)</a:t>
-            </a:r>
-          </a:p>
-        </p:txBody>
-      </p:sp>
-      <p:sp>
-        <p:nvSpPr>
-          <p:cNvPr id="5" name="Rounded Rectangle 4"/>
-          <p:cNvSpPr/>
-          <p:nvPr/>
-        </p:nvSpPr>
-        <p:spPr>
-          <a:xfrm>
-            <a:off x="8595360" y="2011680"/>
-            <a:ext cx="2834640" cy="777240"/>
-          </a:xfrm>
-          <a:prstGeom prst="roundRect">
-            <a:avLst>
-              <a:gd name="adj" fmla="val 15000"/>
-            </a:avLst>
-          </a:prstGeom>
-          <a:solidFill>
-            <a:srgbClr val="1E2761"/>
-          </a:solidFill>
-          <a:ln>
-            <a:noFill/>
-          </a:ln>
-          <a:effectLst/>
-        </p:spPr>
-        <p:style>
-          <a:lnRef idx="1">
-            <a:schemeClr val="accent1"/>
-          </a:lnRef>
-          <a:fillRef idx="3">
-            <a:schemeClr val="accent1"/>
-          </a:fillRef>
-          <a:effectRef idx="2">
-            <a:schemeClr val="accent1"/>
-          </a:effectRef>
-          <a:fontRef idx="minor">
-            <a:schemeClr val="lt1"/>
-          </a:fontRef>
-        </p:style>
-        <p:txBody>
-          <a:bodyPr rtlCol="0" anchor="ctr" wrap="square" lIns="50800" rIns="50800"/>
-          <a:lstStyle/>
-          <a:p>
-            <a:pPr algn="ctr"/>
-            <a:r>
-              <a:rPr sz="1250" b="1">
-                <a:solidFill>
-                  <a:srgbClr val="FFFFFF"/>
-                </a:solidFill>
-                <a:latin typeface="Calibri"/>
-              </a:rPr>
-              <a:t>Image Pipeline
-(resize -&gt; embedding)</a:t>
-            </a:r>
-          </a:p>
-        </p:txBody>
-      </p:sp>
-      <p:sp>
-        <p:nvSpPr>
-          <p:cNvPr id="6" name="Right Arrow 5"/>
-          <p:cNvSpPr/>
-          <p:nvPr/>
-        </p:nvSpPr>
-        <p:spPr>
-          <a:xfrm>
-            <a:off x="3657600" y="2212848"/>
-            <a:ext cx="822960" cy="365760"/>
-          </a:xfrm>
-          <a:prstGeom prst="rightArrow">
-            <a:avLst/>
-          </a:prstGeom>
-          <a:solidFill>
-            <a:srgbClr val="EB6834"/>
-          </a:solidFill>
-          <a:ln>
-            <a:noFill/>
-          </a:ln>
-          <a:effectLst/>
-        </p:spPr>
-        <p:style>
-          <a:lnRef idx="1">
-            <a:schemeClr val="accent1"/>
-          </a:lnRef>
-          <a:fillRef idx="3">
-            <a:schemeClr val="accent1"/>
-          </a:fillRef>
-          <a:effectRef idx="2">
-            <a:schemeClr val="accent1"/>
-          </a:effectRef>
-          <a:fontRef idx="minor">
-            <a:schemeClr val="lt1"/>
-          </a:fontRef>
-        </p:style>
-        <p:txBody>
-          <a:bodyPr rtlCol="0" anchor="ctr"/>
-          <a:lstStyle/>
-          <a:p>
-            <a:pPr algn="ctr"/>
-          </a:p>
-        </p:txBody>
-      </p:sp>
-      <p:sp>
-        <p:nvSpPr>
-          <p:cNvPr id="7" name="Right Arrow 6"/>
-          <p:cNvSpPr/>
-          <p:nvPr/>
-        </p:nvSpPr>
-        <p:spPr>
-          <a:xfrm>
-            <a:off x="7680960" y="2212848"/>
-            <a:ext cx="822960" cy="365760"/>
-          </a:xfrm>
-          <a:prstGeom prst="rightArrow">
-            <a:avLst/>
-          </a:prstGeom>
-          <a:solidFill>
-            <a:srgbClr val="EB6834"/>
-          </a:solidFill>
-          <a:ln>
-            <a:noFill/>
-          </a:ln>
-          <a:effectLst/>
-        </p:spPr>
-        <p:style>
-          <a:lnRef idx="1">
-            <a:schemeClr val="accent1"/>
-          </a:lnRef>
-          <a:fillRef idx="3">
-            <a:schemeClr val="accent1"/>
-          </a:fillRef>
-          <a:effectRef idx="2">
-            <a:schemeClr val="accent1"/>
-          </a:effectRef>
-          <a:fontRef idx="minor">
-            <a:schemeClr val="lt1"/>
-          </a:fontRef>
-        </p:style>
-        <p:txBody>
-          <a:bodyPr rtlCol="0" anchor="ctr"/>
-          <a:lstStyle/>
-          <a:p>
-            <a:pPr algn="ctr"/>
-          </a:p>
-        </p:txBody>
-      </p:sp>
-      <p:sp>
-        <p:nvSpPr>
-          <p:cNvPr id="8" name="Rounded Rectangle 7"/>
-          <p:cNvSpPr/>
-          <p:nvPr/>
-        </p:nvSpPr>
-        <p:spPr>
-          <a:xfrm>
-            <a:off x="4572000" y="3246120"/>
-            <a:ext cx="3017520" cy="777240"/>
-          </a:xfrm>
-          <a:prstGeom prst="roundRect">
-            <a:avLst>
-              <a:gd name="adj" fmla="val 15000"/>
-            </a:avLst>
-          </a:prstGeom>
-          <a:solidFill>
-            <a:srgbClr val="EB6834"/>
-          </a:solidFill>
-          <a:ln>
-            <a:noFill/>
-          </a:ln>
-          <a:effectLst/>
-        </p:spPr>
-        <p:style>
-          <a:lnRef idx="1">
-            <a:schemeClr val="accent1"/>
-          </a:lnRef>
-          <a:fillRef idx="3">
-            <a:schemeClr val="accent1"/>
-          </a:fillRef>
-          <a:effectRef idx="2">
-            <a:schemeClr val="accent1"/>
-          </a:effectRef>
-          <a:fontRef idx="minor">
-            <a:schemeClr val="lt1"/>
-          </a:fontRef>
-        </p:style>
-        <p:txBody>
-          <a:bodyPr rtlCol="0" anchor="ctr" wrap="square" lIns="50800" rIns="50800"/>
-          <a:lstStyle/>
-          <a:p>
-            <a:pPr algn="ctr"/>
-            <a:r>
-              <a:rPr sz="1250" b="1">
-                <a:solidFill>
-                  <a:srgbClr val="FFFFFF"/>
-                </a:solidFill>
-                <a:latin typeface="Calibri"/>
-              </a:rPr>
-              <a:t>Fusion
-(feature concatenation)</a:t>
-            </a:r>
-          </a:p>
-        </p:txBody>
-      </p:sp>
-      <p:cxnSp>
-        <p:nvCxnSpPr>
-          <p:cNvPr id="9" name="Connector 8"/>
-          <p:cNvCxnSpPr/>
-          <p:nvPr/>
-        </p:nvCxnSpPr>
-        <p:spPr>
-          <a:xfrm>
-            <a:off x="2148840" y="2788920"/>
-            <a:ext cx="3337560" cy="457200"/>
-          </a:xfrm>
-          <a:prstGeom prst="line">
-            <a:avLst/>
-          </a:prstGeom>
-          <a:ln w="25400">
-            <a:solidFill>
-              <a:srgbClr val="5B6B7A"/>
-            </a:solidFill>
-          </a:ln>
-          <a:effectLst/>
-        </p:spPr>
-        <p:style>
-          <a:lnRef idx="2">
-            <a:schemeClr val="accent1"/>
-          </a:lnRef>
-          <a:fillRef idx="0">
-            <a:schemeClr val="accent1"/>
-          </a:fillRef>
-          <a:effectRef idx="1">
-            <a:schemeClr val="accent1"/>
-          </a:effectRef>
-          <a:fontRef idx="minor">
-            <a:schemeClr val="tx1"/>
-          </a:fontRef>
-        </p:style>
-      </p:cxnSp>
-      <p:cxnSp>
-        <p:nvCxnSpPr>
-          <p:cNvPr id="10" name="Connector 9"/>
-          <p:cNvCxnSpPr/>
-          <p:nvPr/>
-        </p:nvCxnSpPr>
-        <p:spPr>
-          <a:xfrm flipH="1">
-            <a:off x="6400800" y="2788920"/>
-            <a:ext cx="3611880" cy="457200"/>
-          </a:xfrm>
-          <a:prstGeom prst="line">
-            <a:avLst/>
-          </a:prstGeom>
-          <a:ln w="25400">
-            <a:solidFill>
-              <a:srgbClr val="5B6B7A"/>
-            </a:solidFill>
-          </a:ln>
-          <a:effectLst/>
-        </p:spPr>
-        <p:style>
-          <a:lnRef idx="2">
-            <a:schemeClr val="accent1"/>
-          </a:lnRef>
-          <a:fillRef idx="0">
-            <a:schemeClr val="accent1"/>
-          </a:fillRef>
-          <a:effectRef idx="1">
-            <a:schemeClr val="accent1"/>
-          </a:effectRef>
-          <a:fontRef idx="minor">
-            <a:schemeClr val="tx1"/>
-          </a:fontRef>
-        </p:style>
-      </p:cxnSp>
-      <p:sp>
-        <p:nvSpPr>
-          <p:cNvPr id="11" name="Right Arrow 10"/>
-          <p:cNvSpPr/>
-          <p:nvPr/>
-        </p:nvSpPr>
-        <p:spPr>
-          <a:xfrm>
-            <a:off x="5806440" y="4224528"/>
-            <a:ext cx="594360" cy="365760"/>
-          </a:xfrm>
-          <a:prstGeom prst="rightArrow">
-            <a:avLst/>
-          </a:prstGeom>
-          <a:solidFill>
-            <a:srgbClr val="EB6834"/>
-          </a:solidFill>
-          <a:ln>
-            <a:noFill/>
-          </a:ln>
-          <a:effectLst/>
-        </p:spPr>
-        <p:style>
-          <a:lnRef idx="1">
-            <a:schemeClr val="accent1"/>
-          </a:lnRef>
-          <a:fillRef idx="3">
-            <a:schemeClr val="accent1"/>
-          </a:fillRef>
-          <a:effectRef idx="2">
-            <a:schemeClr val="accent1"/>
-          </a:effectRef>
-          <a:fontRef idx="minor">
-            <a:schemeClr val="lt1"/>
-          </a:fontRef>
-        </p:style>
-        <p:txBody>
-          <a:bodyPr rtlCol="0" anchor="ctr"/>
-          <a:lstStyle/>
-          <a:p>
-            <a:pPr algn="ctr"/>
-          </a:p>
-        </p:txBody>
-      </p:sp>
-      <p:sp>
-        <p:nvSpPr>
-          <p:cNvPr id="12" name="Rounded Rectangle 11"/>
-          <p:cNvSpPr/>
-          <p:nvPr/>
-        </p:nvSpPr>
-        <p:spPr>
-          <a:xfrm>
-            <a:off x="4572000" y="4526280"/>
-            <a:ext cx="3017520" cy="777240"/>
-          </a:xfrm>
-          <a:prstGeom prst="roundRect">
-            <a:avLst>
-              <a:gd name="adj" fmla="val 15000"/>
-            </a:avLst>
-          </a:prstGeom>
-          <a:solidFill>
-            <a:srgbClr val="1E2761"/>
-          </a:solidFill>
-          <a:ln>
-            <a:noFill/>
-          </a:ln>
-          <a:effectLst/>
-        </p:spPr>
-        <p:style>
-          <a:lnRef idx="1">
-            <a:schemeClr val="accent1"/>
-          </a:lnRef>
-          <a:fillRef idx="3">
-            <a:schemeClr val="accent1"/>
-          </a:fillRef>
-          <a:effectRef idx="2">
-            <a:schemeClr val="accent1"/>
-          </a:effectRef>
-          <a:fontRef idx="minor">
-            <a:schemeClr val="lt1"/>
-          </a:fontRef>
-        </p:style>
-        <p:txBody>
-          <a:bodyPr rtlCol="0" anchor="ctr" wrap="square" lIns="50800" rIns="50800"/>
-          <a:lstStyle/>
-          <a:p>
-            <a:pPr algn="ctr"/>
-            <a:r>
-              <a:rPr sz="1250" b="1">
-                <a:solidFill>
-                  <a:srgbClr val="FFFFFF"/>
-                </a:solidFill>
-                <a:latin typeface="Calibri"/>
-              </a:rPr>
-              <a:t>Classification Head
-(MLP, 3-class softmax)</a:t>
-            </a:r>
-          </a:p>
-        </p:txBody>
-      </p:sp>
-      <p:sp>
-        <p:nvSpPr>
-          <p:cNvPr id="13" name="Right Arrow 12"/>
-          <p:cNvSpPr/>
-          <p:nvPr/>
-        </p:nvSpPr>
-        <p:spPr>
-          <a:xfrm>
-            <a:off x="5806440" y="5504688"/>
-            <a:ext cx="594360" cy="365760"/>
-          </a:xfrm>
-          <a:prstGeom prst="rightArrow">
-            <a:avLst/>
-          </a:prstGeom>
-          <a:solidFill>
-            <a:srgbClr val="EB6834"/>
-          </a:solidFill>
-          <a:ln>
-            <a:noFill/>
-          </a:ln>
-          <a:effectLst/>
-        </p:spPr>
-        <p:style>
-          <a:lnRef idx="1">
-            <a:schemeClr val="accent1"/>
-          </a:lnRef>
-          <a:fillRef idx="3">
-            <a:schemeClr val="accent1"/>
-          </a:fillRef>
-          <a:effectRef idx="2">
-            <a:schemeClr val="accent1"/>
-          </a:effectRef>
-          <a:fontRef idx="minor">
-            <a:schemeClr val="lt1"/>
-          </a:fontRef>
-        </p:style>
-        <p:txBody>
-          <a:bodyPr rtlCol="0" anchor="ctr"/>
-          <a:lstStyle/>
-          <a:p>
-            <a:pPr algn="ctr"/>
-          </a:p>
-        </p:txBody>
-      </p:sp>
-      <p:sp>
-        <p:nvSpPr>
-          <p:cNvPr id="14" name="Rounded Rectangle 13"/>
-          <p:cNvSpPr/>
-          <p:nvPr/>
-        </p:nvSpPr>
-        <p:spPr>
-          <a:xfrm>
-            <a:off x="4206240" y="5806440"/>
-            <a:ext cx="3749039" cy="777240"/>
-          </a:xfrm>
-          <a:prstGeom prst="roundRect">
-            <a:avLst>
-              <a:gd name="adj" fmla="val 15000"/>
-            </a:avLst>
-          </a:prstGeom>
-          <a:solidFill>
-            <a:srgbClr val="141B46"/>
-          </a:solidFill>
-          <a:ln>
-            <a:noFill/>
-          </a:ln>
-          <a:effectLst/>
-        </p:spPr>
-        <p:style>
-          <a:lnRef idx="1">
-            <a:schemeClr val="accent1"/>
-          </a:lnRef>
-          <a:fillRef idx="3">
-            <a:schemeClr val="accent1"/>
-          </a:fillRef>
-          <a:effectRef idx="2">
-            <a:schemeClr val="accent1"/>
-          </a:effectRef>
-          <a:fontRef idx="minor">
-            <a:schemeClr val="lt1"/>
-          </a:fontRef>
-        </p:style>
-        <p:txBody>
-          <a:bodyPr rtlCol="0" anchor="ctr" wrap="square" lIns="50800" rIns="50800"/>
-          <a:lstStyle/>
-          <a:p>
-            <a:pPr algn="ctr"/>
-            <a:r>
-              <a:rPr sz="1250" b="1">
-                <a:solidFill>
-                  <a:srgbClr val="FFFFFF"/>
-                </a:solidFill>
-                <a:latin typeface="Calibri"/>
-              </a:rPr>
-              <a:t>Output: Sentiment
-(positive / neutral / negative)</a:t>
-            </a:r>
-          </a:p>
-        </p:txBody>
-      </p:sp>
-      <p:sp>
-        <p:nvSpPr>
-          <p:cNvPr id="15" name="TextBox 14"/>
-          <p:cNvSpPr txBox="1"/>
-          <p:nvPr/>
-        </p:nvSpPr>
-        <p:spPr>
-          <a:xfrm>
-            <a:off x="731520" y="6263640"/>
-            <a:ext cx="5486400" cy="274320"/>
-          </a:xfrm>
-          <a:prstGeom prst="rect">
-            <a:avLst/>
-          </a:prstGeom>
-          <a:noFill/>
-        </p:spPr>
-        <p:txBody>
-          <a:bodyPr wrap="square" anchor="t" lIns="0" rIns="0" tIns="0" bIns="0">
-            <a:spAutoFit/>
-          </a:bodyPr>
-          <a:lstStyle/>
-          <a:p>
-            <a:pPr algn="l"/>
-            <a:r>
-              <a:rPr sz="1050" b="0" i="1">
-                <a:solidFill>
-                  <a:srgbClr val="5B6B7A"/>
-                </a:solidFill>
-                <a:latin typeface="Calibri"/>
-              </a:rPr>
-              <a:t>Full rationale: PROJECT_ARCHITECTURE.md</a:t>
-            </a:r>
-          </a:p>
-        </p:txBody>
-      </p:sp>
-      <p:sp>
-        <p:nvSpPr>
-          <p:cNvPr id="16" name="TextBox 15"/>
+          </a:p>
+        </p:txBody>
+      </p:sp>
+      <p:pic>
+        <p:nvPicPr>
+          <p:cNvPr id="6" name="Picture 5" descr="class_distribution.png"/>
+          <p:cNvPicPr>
+            <a:picLocks noChangeAspect="1"/>
+          </p:cNvPicPr>
+          <p:nvPr/>
+        </p:nvPicPr>
+        <p:blipFill>
+          <a:blip r:embed="rId2"/>
+          <a:stretch>
+            <a:fillRect/>
+          </a:stretch>
+        </p:blipFill>
+        <p:spPr>
+          <a:xfrm>
+            <a:off x="6309360" y="1931670"/>
+            <a:ext cx="5212080" cy="3909060"/>
+          </a:xfrm>
+          <a:prstGeom prst="rect">
+            <a:avLst/>
+          </a:prstGeom>
+        </p:spPr>
+      </p:pic>
+      <p:sp>
+        <p:nvSpPr>
+          <p:cNvPr id="7" name="TextBox 6"/>
           <p:cNvSpPr txBox="1"/>
           <p:nvPr/>
         </p:nvSpPr>
@@ -12251,7 +15389,7 @@
       </p:sp>
       <p:sp>
         <p:nvSpPr>
-          <p:cNvPr id="17" name="TextBox 16"/>
+          <p:cNvPr id="8" name="TextBox 7"/>
           <p:cNvSpPr txBox="1"/>
           <p:nvPr/>
         </p:nvSpPr>
@@ -12375,7 +15513,7 @@
                 </a:solidFill>
                 <a:latin typeface="Cambria"/>
               </a:rPr>
-              <a:t>Text Pipeline</a:t>
+              <a:t>Proposed Architecture</a:t>
             </a:r>
           </a:p>
         </p:txBody>
@@ -12388,8 +15526,8 @@
         </p:nvSpPr>
         <p:spPr>
           <a:xfrm>
-            <a:off x="731520" y="1920240"/>
-            <a:ext cx="2331720" cy="914400"/>
+            <a:off x="731520" y="2011680"/>
+            <a:ext cx="2834640" cy="777240"/>
           </a:xfrm>
           <a:prstGeom prst="roundRect">
             <a:avLst>
@@ -12430,22 +15568,78 @@
                 </a:solidFill>
                 <a:latin typeface="Calibri"/>
               </a:rPr>
-              <a:t>Raw tweet
-text</a:t>
-            </a:r>
-          </a:p>
-        </p:txBody>
-      </p:sp>
-      <p:sp>
-        <p:nvSpPr>
-          <p:cNvPr id="5" name="Right Arrow 4"/>
+              <a:t>Text Pipeline
+(cleaning -&gt; embedding)</a:t>
+            </a:r>
+          </a:p>
+        </p:txBody>
+      </p:sp>
+      <p:sp>
+        <p:nvSpPr>
+          <p:cNvPr id="5" name="Rounded Rectangle 4"/>
           <p:cNvSpPr/>
           <p:nvPr/>
         </p:nvSpPr>
         <p:spPr>
           <a:xfrm>
-            <a:off x="3063240" y="2194560"/>
-            <a:ext cx="320040" cy="365760"/>
+            <a:off x="8595360" y="2011680"/>
+            <a:ext cx="2834640" cy="777240"/>
+          </a:xfrm>
+          <a:prstGeom prst="roundRect">
+            <a:avLst>
+              <a:gd name="adj" fmla="val 15000"/>
+            </a:avLst>
+          </a:prstGeom>
+          <a:solidFill>
+            <a:srgbClr val="1E2761"/>
+          </a:solidFill>
+          <a:ln>
+            <a:noFill/>
+          </a:ln>
+          <a:effectLst/>
+        </p:spPr>
+        <p:style>
+          <a:lnRef idx="1">
+            <a:schemeClr val="accent1"/>
+          </a:lnRef>
+          <a:fillRef idx="3">
+            <a:schemeClr val="accent1"/>
+          </a:fillRef>
+          <a:effectRef idx="2">
+            <a:schemeClr val="accent1"/>
+          </a:effectRef>
+          <a:fontRef idx="minor">
+            <a:schemeClr val="lt1"/>
+          </a:fontRef>
+        </p:style>
+        <p:txBody>
+          <a:bodyPr rtlCol="0" anchor="ctr" wrap="square" lIns="50800" rIns="50800"/>
+          <a:lstStyle/>
+          <a:p>
+            <a:pPr algn="ctr"/>
+            <a:r>
+              <a:rPr sz="1250" b="1">
+                <a:solidFill>
+                  <a:srgbClr val="FFFFFF"/>
+                </a:solidFill>
+                <a:latin typeface="Calibri"/>
+              </a:rPr>
+              <a:t>Image Pipeline
+(resize -&gt; embedding)</a:t>
+            </a:r>
+          </a:p>
+        </p:txBody>
+      </p:sp>
+      <p:sp>
+        <p:nvSpPr>
+          <p:cNvPr id="6" name="Right Arrow 5"/>
+          <p:cNvSpPr/>
+          <p:nvPr/>
+        </p:nvSpPr>
+        <p:spPr>
+          <a:xfrm>
+            <a:off x="3657600" y="2212848"/>
+            <a:ext cx="822960" cy="365760"/>
           </a:xfrm>
           <a:prstGeom prst="rightArrow">
             <a:avLst/>
@@ -12482,19 +15676,17 @@
       </p:sp>
       <p:sp>
         <p:nvSpPr>
-          <p:cNvPr id="6" name="Rounded Rectangle 5"/>
+          <p:cNvPr id="7" name="Right Arrow 6"/>
           <p:cNvSpPr/>
           <p:nvPr/>
         </p:nvSpPr>
         <p:spPr>
           <a:xfrm>
-            <a:off x="3383280" y="1920240"/>
-            <a:ext cx="2331720" cy="914400"/>
-          </a:xfrm>
-          <a:prstGeom prst="roundRect">
-            <a:avLst>
-              <a:gd name="adj" fmla="val 15000"/>
-            </a:avLst>
+            <a:off x="7680960" y="2212848"/>
+            <a:ext cx="822960" cy="365760"/>
+          </a:xfrm>
+          <a:prstGeom prst="rightArrow">
+            <a:avLst/>
           </a:prstGeom>
           <a:solidFill>
             <a:srgbClr val="EB6834"/>
@@ -12519,36 +15711,28 @@
           </a:fontRef>
         </p:style>
         <p:txBody>
-          <a:bodyPr rtlCol="0" anchor="ctr" wrap="square" lIns="50800" rIns="50800"/>
+          <a:bodyPr rtlCol="0" anchor="ctr"/>
           <a:lstStyle/>
           <a:p>
             <a:pPr algn="ctr"/>
-            <a:r>
-              <a:rPr sz="1250" b="1">
-                <a:solidFill>
-                  <a:srgbClr val="FFFFFF"/>
-                </a:solidFill>
-                <a:latin typeface="Calibri"/>
-              </a:rPr>
-              <a:t>Clean
-(URL / mention / emoji)</a:t>
-            </a:r>
-          </a:p>
-        </p:txBody>
-      </p:sp>
-      <p:sp>
-        <p:nvSpPr>
-          <p:cNvPr id="7" name="Right Arrow 6"/>
+          </a:p>
+        </p:txBody>
+      </p:sp>
+      <p:sp>
+        <p:nvSpPr>
+          <p:cNvPr id="8" name="Rounded Rectangle 7"/>
           <p:cNvSpPr/>
           <p:nvPr/>
         </p:nvSpPr>
         <p:spPr>
           <a:xfrm>
-            <a:off x="5715000" y="2194560"/>
-            <a:ext cx="320040" cy="365760"/>
-          </a:xfrm>
-          <a:prstGeom prst="rightArrow">
-            <a:avLst/>
+            <a:off x="4572000" y="3246120"/>
+            <a:ext cx="3017520" cy="777240"/>
+          </a:xfrm>
+          <a:prstGeom prst="roundRect">
+            <a:avLst>
+              <a:gd name="adj" fmla="val 15000"/>
+            </a:avLst>
           </a:prstGeom>
           <a:solidFill>
             <a:srgbClr val="EB6834"/>
@@ -12573,6 +15757,132 @@
           </a:fontRef>
         </p:style>
         <p:txBody>
+          <a:bodyPr rtlCol="0" anchor="ctr" wrap="square" lIns="50800" rIns="50800"/>
+          <a:lstStyle/>
+          <a:p>
+            <a:pPr algn="ctr"/>
+            <a:r>
+              <a:rPr sz="1250" b="1">
+                <a:solidFill>
+                  <a:srgbClr val="FFFFFF"/>
+                </a:solidFill>
+                <a:latin typeface="Calibri"/>
+              </a:rPr>
+              <a:t>Fusion
+(feature concatenation)</a:t>
+            </a:r>
+          </a:p>
+        </p:txBody>
+      </p:sp>
+      <p:cxnSp>
+        <p:nvCxnSpPr>
+          <p:cNvPr id="9" name="Connector 8"/>
+          <p:cNvCxnSpPr/>
+          <p:nvPr/>
+        </p:nvCxnSpPr>
+        <p:spPr>
+          <a:xfrm>
+            <a:off x="2148840" y="2788920"/>
+            <a:ext cx="3337560" cy="457200"/>
+          </a:xfrm>
+          <a:prstGeom prst="line">
+            <a:avLst/>
+          </a:prstGeom>
+          <a:ln w="25400">
+            <a:solidFill>
+              <a:srgbClr val="5B6B7A"/>
+            </a:solidFill>
+          </a:ln>
+          <a:effectLst/>
+        </p:spPr>
+        <p:style>
+          <a:lnRef idx="2">
+            <a:schemeClr val="accent1"/>
+          </a:lnRef>
+          <a:fillRef idx="0">
+            <a:schemeClr val="accent1"/>
+          </a:fillRef>
+          <a:effectRef idx="1">
+            <a:schemeClr val="accent1"/>
+          </a:effectRef>
+          <a:fontRef idx="minor">
+            <a:schemeClr val="tx1"/>
+          </a:fontRef>
+        </p:style>
+      </p:cxnSp>
+      <p:cxnSp>
+        <p:nvCxnSpPr>
+          <p:cNvPr id="10" name="Connector 9"/>
+          <p:cNvCxnSpPr/>
+          <p:nvPr/>
+        </p:nvCxnSpPr>
+        <p:spPr>
+          <a:xfrm flipH="1">
+            <a:off x="6400800" y="2788920"/>
+            <a:ext cx="3611880" cy="457200"/>
+          </a:xfrm>
+          <a:prstGeom prst="line">
+            <a:avLst/>
+          </a:prstGeom>
+          <a:ln w="25400">
+            <a:solidFill>
+              <a:srgbClr val="5B6B7A"/>
+            </a:solidFill>
+          </a:ln>
+          <a:effectLst/>
+        </p:spPr>
+        <p:style>
+          <a:lnRef idx="2">
+            <a:schemeClr val="accent1"/>
+          </a:lnRef>
+          <a:fillRef idx="0">
+            <a:schemeClr val="accent1"/>
+          </a:fillRef>
+          <a:effectRef idx="1">
+            <a:schemeClr val="accent1"/>
+          </a:effectRef>
+          <a:fontRef idx="minor">
+            <a:schemeClr val="tx1"/>
+          </a:fontRef>
+        </p:style>
+      </p:cxnSp>
+      <p:sp>
+        <p:nvSpPr>
+          <p:cNvPr id="11" name="Right Arrow 10"/>
+          <p:cNvSpPr/>
+          <p:nvPr/>
+        </p:nvSpPr>
+        <p:spPr>
+          <a:xfrm>
+            <a:off x="5806440" y="4224528"/>
+            <a:ext cx="594360" cy="365760"/>
+          </a:xfrm>
+          <a:prstGeom prst="rightArrow">
+            <a:avLst/>
+          </a:prstGeom>
+          <a:solidFill>
+            <a:srgbClr val="EB6834"/>
+          </a:solidFill>
+          <a:ln>
+            <a:noFill/>
+          </a:ln>
+          <a:effectLst/>
+        </p:spPr>
+        <p:style>
+          <a:lnRef idx="1">
+            <a:schemeClr val="accent1"/>
+          </a:lnRef>
+          <a:fillRef idx="3">
+            <a:schemeClr val="accent1"/>
+          </a:fillRef>
+          <a:effectRef idx="2">
+            <a:schemeClr val="accent1"/>
+          </a:effectRef>
+          <a:fontRef idx="minor">
+            <a:schemeClr val="lt1"/>
+          </a:fontRef>
+        </p:style>
+        <p:txBody>
           <a:bodyPr rtlCol="0" anchor="ctr"/>
           <a:lstStyle/>
           <a:p>
@@ -12582,14 +15892,14 @@
       </p:sp>
       <p:sp>
         <p:nvSpPr>
-          <p:cNvPr id="8" name="Rounded Rectangle 7"/>
+          <p:cNvPr id="12" name="Rounded Rectangle 11"/>
           <p:cNvSpPr/>
           <p:nvPr/>
         </p:nvSpPr>
         <p:spPr>
           <a:xfrm>
-            <a:off x="6035040" y="1920240"/>
-            <a:ext cx="2331720" cy="914400"/>
+            <a:off x="4572000" y="4526280"/>
+            <a:ext cx="3017520" cy="777240"/>
           </a:xfrm>
           <a:prstGeom prst="roundRect">
             <a:avLst>
@@ -12630,22 +15940,22 @@
                 </a:solidFill>
                 <a:latin typeface="Calibri"/>
               </a:rPr>
-              <a:t>Embed
-(TF-IDF or DistilBERT)</a:t>
-            </a:r>
-          </a:p>
-        </p:txBody>
-      </p:sp>
-      <p:sp>
-        <p:nvSpPr>
-          <p:cNvPr id="9" name="Right Arrow 8"/>
+              <a:t>Classification Head
+(MLP, 3-class softmax)</a:t>
+            </a:r>
+          </a:p>
+        </p:txBody>
+      </p:sp>
+      <p:sp>
+        <p:nvSpPr>
+          <p:cNvPr id="13" name="Right Arrow 12"/>
           <p:cNvSpPr/>
           <p:nvPr/>
         </p:nvSpPr>
         <p:spPr>
           <a:xfrm>
-            <a:off x="8366760" y="2194560"/>
-            <a:ext cx="320040" cy="365760"/>
+            <a:off x="5806440" y="5504688"/>
+            <a:ext cx="594360" cy="365760"/>
           </a:xfrm>
           <a:prstGeom prst="rightArrow">
             <a:avLst/>
@@ -12682,14 +15992,14 @@
       </p:sp>
       <p:sp>
         <p:nvSpPr>
-          <p:cNvPr id="10" name="Rounded Rectangle 9"/>
+          <p:cNvPr id="14" name="Rounded Rectangle 13"/>
           <p:cNvSpPr/>
           <p:nvPr/>
         </p:nvSpPr>
         <p:spPr>
           <a:xfrm>
-            <a:off x="8686800" y="1920240"/>
-            <a:ext cx="2331720" cy="914400"/>
+            <a:off x="4206240" y="5806440"/>
+            <a:ext cx="3749039" cy="777240"/>
           </a:xfrm>
           <a:prstGeom prst="roundRect">
             <a:avLst>
@@ -12697,7 +16007,7 @@
             </a:avLst>
           </a:prstGeom>
           <a:solidFill>
-            <a:srgbClr val="EB6834"/>
+            <a:srgbClr val="141B46"/>
           </a:solidFill>
           <a:ln>
             <a:noFill/>
@@ -12730,70 +16040,22 @@
                 </a:solidFill>
                 <a:latin typeface="Calibri"/>
               </a:rPr>
-              <a:t>Classify
-(Logistic Regression)</a:t>
-            </a:r>
-          </a:p>
-        </p:txBody>
-      </p:sp>
-      <p:sp>
-        <p:nvSpPr>
-          <p:cNvPr id="11" name="Rounded Rectangle 10"/>
-          <p:cNvSpPr/>
-          <p:nvPr/>
-        </p:nvSpPr>
-        <p:spPr>
-          <a:xfrm>
-            <a:off x="731520" y="3383280"/>
-            <a:ext cx="5212080" cy="2377440"/>
-          </a:xfrm>
-          <a:prstGeom prst="roundRect">
-            <a:avLst>
-              <a:gd name="adj" fmla="val 4000"/>
-            </a:avLst>
-          </a:prstGeom>
-          <a:solidFill>
-            <a:srgbClr val="FFFFFF"/>
-          </a:solidFill>
-          <a:ln w="15875">
-            <a:solidFill>
-              <a:srgbClr val="CADCFC"/>
-            </a:solidFill>
-          </a:ln>
-          <a:effectLst/>
-        </p:spPr>
-        <p:style>
-          <a:lnRef idx="1">
-            <a:schemeClr val="accent1"/>
-          </a:lnRef>
-          <a:fillRef idx="3">
-            <a:schemeClr val="accent1"/>
-          </a:fillRef>
-          <a:effectRef idx="2">
-            <a:schemeClr val="accent1"/>
-          </a:effectRef>
-          <a:fontRef idx="minor">
-            <a:schemeClr val="lt1"/>
-          </a:fontRef>
-        </p:style>
-        <p:txBody>
-          <a:bodyPr rtlCol="0" anchor="ctr"/>
-          <a:lstStyle/>
-          <a:p>
-            <a:pPr algn="ctr"/>
-          </a:p>
-        </p:txBody>
-      </p:sp>
-      <p:sp>
-        <p:nvSpPr>
-          <p:cNvPr id="12" name="TextBox 11"/>
-          <p:cNvSpPr txBox="1"/>
-          <p:nvPr/>
-        </p:nvSpPr>
-        <p:spPr>
-          <a:xfrm>
-            <a:off x="960120" y="3566160"/>
-            <a:ext cx="4754880" cy="457200"/>
+              <a:t>Output: Sentiment
+(positive / neutral / negative)</a:t>
+            </a:r>
+          </a:p>
+        </p:txBody>
+      </p:sp>
+      <p:sp>
+        <p:nvSpPr>
+          <p:cNvPr id="15" name="TextBox 14"/>
+          <p:cNvSpPr txBox="1"/>
+          <p:nvPr/>
+        </p:nvSpPr>
+        <p:spPr>
+          <a:xfrm>
+            <a:off x="731520" y="6263640"/>
+            <a:ext cx="5486400" cy="274320"/>
           </a:xfrm>
           <a:prstGeom prst="rect">
             <a:avLst/>
@@ -12808,176 +16070,13 @@
           <a:p>
             <a:pPr algn="l"/>
             <a:r>
-              <a:rPr sz="1700" b="1" i="0">
-                <a:solidFill>
-                  <a:srgbClr val="1E2761"/>
-                </a:solidFill>
-                <a:latin typeface="Cambria"/>
-              </a:rPr>
-              <a:t>A1 — TF-IDF baseline</a:t>
-            </a:r>
-          </a:p>
-        </p:txBody>
-      </p:sp>
-      <p:sp>
-        <p:nvSpPr>
-          <p:cNvPr id="13" name="TextBox 12"/>
-          <p:cNvSpPr txBox="1"/>
-          <p:nvPr/>
-        </p:nvSpPr>
-        <p:spPr>
-          <a:xfrm>
-            <a:off x="960120" y="4069080"/>
-            <a:ext cx="4754880" cy="1463040"/>
-          </a:xfrm>
-          <a:prstGeom prst="rect">
-            <a:avLst/>
-          </a:prstGeom>
-          <a:noFill/>
-        </p:spPr>
-        <p:txBody>
-          <a:bodyPr wrap="square" lIns="0" rIns="0">
-            <a:spAutoFit/>
-          </a:bodyPr>
-          <a:lstStyle/>
-          <a:p>
-            <a:pPr algn="l">
-              <a:lnSpc>
-                <a:spcPct val="108000"/>
-              </a:lnSpc>
-              <a:spcAft>
-                <a:spcPts val="600"/>
-              </a:spcAft>
-            </a:pPr>
-            <a:r>
-              <a:rPr sz="1250">
-                <a:solidFill>
-                  <a:srgbClr val="16213E"/>
-                </a:solidFill>
-                <a:latin typeface="Calibri"/>
-              </a:rPr>
-              <a:t>•  Unigrams + bigrams, 10k features</a:t>
-            </a:r>
-          </a:p>
-          <a:p>
-            <a:pPr algn="l">
-              <a:lnSpc>
-                <a:spcPct val="108000"/>
-              </a:lnSpc>
-              <a:spcAft>
-                <a:spcPts val="600"/>
-              </a:spcAft>
-            </a:pPr>
-            <a:r>
-              <a:rPr sz="1250">
-                <a:solidFill>
-                  <a:srgbClr val="16213E"/>
-                </a:solidFill>
-                <a:latin typeface="Calibri"/>
-              </a:rPr>
-              <a:t>•  Class-weighted Logistic Regression</a:t>
-            </a:r>
-          </a:p>
-          <a:p>
-            <a:pPr algn="l">
-              <a:lnSpc>
-                <a:spcPct val="108000"/>
-              </a:lnSpc>
-              <a:spcAft>
-                <a:spcPts val="600"/>
-              </a:spcAft>
-            </a:pPr>
-            <a:r>
-              <a:rPr sz="1250">
-                <a:solidFill>
-                  <a:srgbClr val="16213E"/>
-                </a:solidFill>
-                <a:latin typeface="Calibri"/>
-              </a:rPr>
-              <a:t>•  Test: 60.9% accuracy / 52.0% macro-F1</a:t>
-            </a:r>
-          </a:p>
-        </p:txBody>
-      </p:sp>
-      <p:sp>
-        <p:nvSpPr>
-          <p:cNvPr id="14" name="Rounded Rectangle 13"/>
-          <p:cNvSpPr/>
-          <p:nvPr/>
-        </p:nvSpPr>
-        <p:spPr>
-          <a:xfrm>
-            <a:off x="6217920" y="3383280"/>
-            <a:ext cx="5212080" cy="2377440"/>
-          </a:xfrm>
-          <a:prstGeom prst="roundRect">
-            <a:avLst>
-              <a:gd name="adj" fmla="val 4000"/>
-            </a:avLst>
-          </a:prstGeom>
-          <a:solidFill>
-            <a:srgbClr val="FFFFFF"/>
-          </a:solidFill>
-          <a:ln w="15875">
-            <a:solidFill>
-              <a:srgbClr val="EB6834"/>
-            </a:solidFill>
-          </a:ln>
-          <a:effectLst/>
-        </p:spPr>
-        <p:style>
-          <a:lnRef idx="1">
-            <a:schemeClr val="accent1"/>
-          </a:lnRef>
-          <a:fillRef idx="3">
-            <a:schemeClr val="accent1"/>
-          </a:fillRef>
-          <a:effectRef idx="2">
-            <a:schemeClr val="accent1"/>
-          </a:effectRef>
-          <a:fontRef idx="minor">
-            <a:schemeClr val="lt1"/>
-          </a:fontRef>
-        </p:style>
-        <p:txBody>
-          <a:bodyPr rtlCol="0" anchor="ctr"/>
-          <a:lstStyle/>
-          <a:p>
-            <a:pPr algn="ctr"/>
-          </a:p>
-        </p:txBody>
-      </p:sp>
-      <p:sp>
-        <p:nvSpPr>
-          <p:cNvPr id="15" name="TextBox 14"/>
-          <p:cNvSpPr txBox="1"/>
-          <p:nvPr/>
-        </p:nvSpPr>
-        <p:spPr>
-          <a:xfrm>
-            <a:off x="6446520" y="3566160"/>
-            <a:ext cx="4754880" cy="457200"/>
-          </a:xfrm>
-          <a:prstGeom prst="rect">
-            <a:avLst/>
-          </a:prstGeom>
-          <a:noFill/>
-        </p:spPr>
-        <p:txBody>
-          <a:bodyPr wrap="square" anchor="t" lIns="0" rIns="0" tIns="0" bIns="0">
-            <a:spAutoFit/>
-          </a:bodyPr>
-          <a:lstStyle/>
-          <a:p>
-            <a:pPr algn="l"/>
-            <a:r>
-              <a:rPr sz="1700" b="1" i="0">
-                <a:solidFill>
-                  <a:srgbClr val="1E2761"/>
-                </a:solidFill>
-                <a:latin typeface="Cambria"/>
-              </a:rPr>
-              <a:t>A2 — Frozen DistilBERT</a:t>
+              <a:rPr sz="1050" b="0" i="1">
+                <a:solidFill>
+                  <a:srgbClr val="5B6B7A"/>
+                </a:solidFill>
+                <a:latin typeface="Calibri"/>
+              </a:rPr>
+              <a:t>Full rationale: PROJECT_ARCHITECTURE.md</a:t>
             </a:r>
           </a:p>
         </p:txBody>
@@ -12985,86 +16084,6 @@
       <p:sp>
         <p:nvSpPr>
           <p:cNvPr id="16" name="TextBox 15"/>
-          <p:cNvSpPr txBox="1"/>
-          <p:nvPr/>
-        </p:nvSpPr>
-        <p:spPr>
-          <a:xfrm>
-            <a:off x="6446520" y="4069080"/>
-            <a:ext cx="4754880" cy="1463040"/>
-          </a:xfrm>
-          <a:prstGeom prst="rect">
-            <a:avLst/>
-          </a:prstGeom>
-          <a:noFill/>
-        </p:spPr>
-        <p:txBody>
-          <a:bodyPr wrap="square" lIns="0" rIns="0">
-            <a:spAutoFit/>
-          </a:bodyPr>
-          <a:lstStyle/>
-          <a:p>
-            <a:pPr algn="l">
-              <a:lnSpc>
-                <a:spcPct val="108000"/>
-              </a:lnSpc>
-              <a:spcAft>
-                <a:spcPts val="600"/>
-              </a:spcAft>
-            </a:pPr>
-            <a:r>
-              <a:rPr sz="1250">
-                <a:solidFill>
-                  <a:srgbClr val="16213E"/>
-                </a:solidFill>
-                <a:latin typeface="Calibri"/>
-              </a:rPr>
-              <a:t>•  distilbert-base-uncased, mean-pooled</a:t>
-            </a:r>
-          </a:p>
-          <a:p>
-            <a:pPr algn="l">
-              <a:lnSpc>
-                <a:spcPct val="108000"/>
-              </a:lnSpc>
-              <a:spcAft>
-                <a:spcPts val="600"/>
-              </a:spcAft>
-            </a:pPr>
-            <a:r>
-              <a:rPr sz="1250">
-                <a:solidFill>
-                  <a:srgbClr val="16213E"/>
-                </a:solidFill>
-                <a:latin typeface="Calibri"/>
-              </a:rPr>
-              <a:t>•  Chosen for CPU-only feasibility</a:t>
-            </a:r>
-          </a:p>
-          <a:p>
-            <a:pPr algn="l">
-              <a:lnSpc>
-                <a:spcPct val="108000"/>
-              </a:lnSpc>
-              <a:spcAft>
-                <a:spcPts val="600"/>
-              </a:spcAft>
-            </a:pPr>
-            <a:r>
-              <a:rPr sz="1250">
-                <a:solidFill>
-                  <a:srgbClr val="16213E"/>
-                </a:solidFill>
-                <a:latin typeface="Calibri"/>
-              </a:rPr>
-              <a:t>•  Test: 61.6% accuracy / 54.6% macro-F1</a:t>
-            </a:r>
-          </a:p>
-        </p:txBody>
-      </p:sp>
-      <p:sp>
-        <p:nvSpPr>
-          <p:cNvPr id="17" name="TextBox 16"/>
           <p:cNvSpPr txBox="1"/>
           <p:nvPr/>
         </p:nvSpPr>
@@ -13099,7 +16118,7 @@
       </p:sp>
       <p:sp>
         <p:nvSpPr>
-          <p:cNvPr id="18" name="TextBox 17"/>
+          <p:cNvPr id="17" name="TextBox 16"/>
           <p:cNvSpPr txBox="1"/>
           <p:nvPr/>
         </p:nvSpPr>
